--- a/PPT/遊戲平台專題簡報_送出版.pptx
+++ b/PPT/遊戲平台專題簡報_送出版.pptx
@@ -15,11 +15,11 @@
     <p:sldId id="275" r:id="rId6"/>
     <p:sldId id="259" r:id="rId7"/>
     <p:sldId id="260" r:id="rId8"/>
-    <p:sldId id="261" r:id="rId9"/>
-    <p:sldId id="262" r:id="rId10"/>
-    <p:sldId id="263" r:id="rId11"/>
-    <p:sldId id="278" r:id="rId12"/>
-    <p:sldId id="264" r:id="rId13"/>
+    <p:sldId id="264" r:id="rId9"/>
+    <p:sldId id="261" r:id="rId10"/>
+    <p:sldId id="262" r:id="rId11"/>
+    <p:sldId id="263" r:id="rId12"/>
+    <p:sldId id="278" r:id="rId13"/>
     <p:sldId id="265" r:id="rId14"/>
     <p:sldId id="266" r:id="rId15"/>
     <p:sldId id="279" r:id="rId16"/>
@@ -384,10 +384,7 @@
           <a:bodyPr/>
           <a:lstStyle/>
           <a:p>
-            <a:r>
-              <a:rPr lang="en-US" dirty="0"/>
-              <a:t>加入 Lobby 說明，並將 Game/GameMode/Room/RoomPlayers 關聯集中呈現。</a:t>
-            </a:r>
+            <a:endParaRPr lang="en-US" dirty="0"/>
           </a:p>
         </p:txBody>
       </p:sp>
@@ -417,7 +414,7 @@
     </p:spTree>
     <p:extLst>
       <p:ext uri="{BB962C8B-B14F-4D97-AF65-F5344CB8AC3E}">
-        <p14:creationId xmlns:p14="http://schemas.microsoft.com/office/powerpoint/2010/main" val="560851112"/>
+        <p14:creationId xmlns:p14="http://schemas.microsoft.com/office/powerpoint/2010/main" val="1024086991"/>
       </p:ext>
     </p:extLst>
   </p:cSld>
@@ -471,7 +468,10 @@
           <a:bodyPr/>
           <a:lstStyle/>
           <a:p>
-            <a:endParaRPr lang="en-US" dirty="0"/>
+            <a:r>
+              <a:rPr lang="en-US" dirty="0"/>
+              <a:t>加入 Lobby 說明，並將 Game/GameMode/Room/RoomPlayers 關聯集中呈現。</a:t>
+            </a:r>
           </a:p>
         </p:txBody>
       </p:sp>
@@ -501,7 +501,7 @@
     </p:spTree>
     <p:extLst>
       <p:ext uri="{BB962C8B-B14F-4D97-AF65-F5344CB8AC3E}">
-        <p14:creationId xmlns:p14="http://schemas.microsoft.com/office/powerpoint/2010/main" val="1024086991"/>
+        <p14:creationId xmlns:p14="http://schemas.microsoft.com/office/powerpoint/2010/main" val="560851112"/>
       </p:ext>
     </p:extLst>
   </p:cSld>
@@ -2853,6 +2853,2163 @@
 
 <file path=ppt/slides/slide10.xml><?xml version="1.0" encoding="utf-8"?>
 <p:sld xmlns:a="http://schemas.openxmlformats.org/drawingml/2006/main" xmlns:r="http://schemas.openxmlformats.org/officeDocument/2006/relationships" xmlns:p="http://schemas.openxmlformats.org/presentationml/2006/main">
+  <p:cSld name="Slide 7">
+    <p:bg>
+      <p:bgPr>
+        <a:solidFill>
+          <a:srgbClr val="F7F9FC"/>
+        </a:solidFill>
+        <a:effectLst/>
+      </p:bgPr>
+    </p:bg>
+    <p:spTree>
+      <p:nvGrpSpPr>
+        <p:cNvPr id="1" name=""/>
+        <p:cNvGrpSpPr/>
+        <p:nvPr/>
+      </p:nvGrpSpPr>
+      <p:grpSpPr>
+        <a:xfrm>
+          <a:off x="0" y="0"/>
+          <a:ext cx="0" cy="0"/>
+          <a:chOff x="0" y="0"/>
+          <a:chExt cx="0" cy="0"/>
+        </a:xfrm>
+      </p:grpSpPr>
+      <p:sp>
+        <p:nvSpPr>
+          <p:cNvPr id="2" name="Shape 0"/>
+          <p:cNvSpPr/>
+          <p:nvPr/>
+        </p:nvSpPr>
+        <p:spPr>
+          <a:xfrm>
+            <a:off x="10012680" y="0"/>
+            <a:ext cx="2176272" cy="6858000"/>
+          </a:xfrm>
+          <a:prstGeom prst="rect">
+            <a:avLst/>
+          </a:prstGeom>
+          <a:solidFill>
+            <a:srgbClr val="EEF4FF"/>
+          </a:solidFill>
+          <a:ln w="12700">
+            <a:solidFill>
+              <a:srgbClr val="EEF4FF"/>
+            </a:solidFill>
+            <a:prstDash val="solid"/>
+          </a:ln>
+        </p:spPr>
+      </p:sp>
+      <p:sp>
+        <p:nvSpPr>
+          <p:cNvPr id="3" name="Shape 1"/>
+          <p:cNvSpPr/>
+          <p:nvPr/>
+        </p:nvSpPr>
+        <p:spPr>
+          <a:xfrm>
+            <a:off x="10533888" y="0"/>
+            <a:ext cx="1655064" cy="6858000"/>
+          </a:xfrm>
+          <a:prstGeom prst="rect">
+            <a:avLst/>
+          </a:prstGeom>
+          <a:solidFill>
+            <a:srgbClr val="E8FAFF">
+              <a:alpha val="90000"/>
+            </a:srgbClr>
+          </a:solidFill>
+          <a:ln w="12700">
+            <a:solidFill>
+              <a:srgbClr val="E8FAFF"/>
+            </a:solidFill>
+            <a:prstDash val="solid"/>
+          </a:ln>
+        </p:spPr>
+      </p:sp>
+      <p:sp>
+        <p:nvSpPr>
+          <p:cNvPr id="4" name="Text 2"/>
+          <p:cNvSpPr txBox="1"/>
+          <p:nvPr/>
+        </p:nvSpPr>
+        <p:spPr>
+          <a:xfrm>
+            <a:off x="603504" y="347472"/>
+            <a:ext cx="4572000" cy="182880"/>
+          </a:xfrm>
+          <a:prstGeom prst="rect">
+            <a:avLst/>
+          </a:prstGeom>
+          <a:noFill/>
+          <a:ln/>
+        </p:spPr>
+        <p:txBody>
+          <a:bodyPr wrap="square" lIns="0" tIns="0" rIns="0" bIns="0" rtlCol="0" anchor="ctr">
+            <a:normAutofit/>
+          </a:bodyPr>
+          <a:lstStyle/>
+          <a:p>
+            <a:pPr marL="0" indent="0" algn="l">
+              <a:lnSpc>
+                <a:spcPct val="100000"/>
+              </a:lnSpc>
+              <a:buNone/>
+            </a:pPr>
+            <a:r>
+              <a:rPr lang="en-US" sz="950" b="1" dirty="0">
+                <a:solidFill>
+                  <a:srgbClr val="0891B2"/>
+                </a:solidFill>
+                <a:latin typeface="Microsoft JhengHei" pitchFamily="34" charset="0"/>
+                <a:ea typeface="Microsoft JhengHei" pitchFamily="34" charset="-122"/>
+                <a:cs typeface="Microsoft JhengHei" pitchFamily="34" charset="-120"/>
+              </a:rPr>
+              <a:t>ER MODEL · CORE</a:t>
+            </a:r>
+            <a:endParaRPr lang="en-US" sz="950" dirty="0"/>
+          </a:p>
+        </p:txBody>
+      </p:sp>
+      <p:sp>
+        <p:nvSpPr>
+          <p:cNvPr id="5" name="Text 3"/>
+          <p:cNvSpPr txBox="1"/>
+          <p:nvPr/>
+        </p:nvSpPr>
+        <p:spPr>
+          <a:xfrm>
+            <a:off x="603504" y="640080"/>
+            <a:ext cx="10424160" cy="438912"/>
+          </a:xfrm>
+          <a:prstGeom prst="rect">
+            <a:avLst/>
+          </a:prstGeom>
+          <a:noFill/>
+          <a:ln/>
+        </p:spPr>
+        <p:txBody>
+          <a:bodyPr wrap="square" lIns="0" tIns="0" rIns="0" bIns="0" rtlCol="0" anchor="ctr">
+            <a:normAutofit/>
+          </a:bodyPr>
+          <a:lstStyle/>
+          <a:p>
+            <a:pPr marL="0" indent="0" algn="l">
+              <a:lnSpc>
+                <a:spcPct val="100000"/>
+              </a:lnSpc>
+              <a:buNone/>
+            </a:pPr>
+            <a:r>
+              <a:rPr lang="en-US" sz="2400" b="1" dirty="0">
+                <a:solidFill>
+                  <a:srgbClr val="122033"/>
+                </a:solidFill>
+                <a:latin typeface="Microsoft JhengHei" pitchFamily="34" charset="0"/>
+                <a:ea typeface="Microsoft JhengHei" pitchFamily="34" charset="-122"/>
+                <a:cs typeface="Microsoft JhengHei" pitchFamily="34" charset="-120"/>
+              </a:rPr>
+              <a:t>核心 ER Model：會員、遊戲目錄與房間</a:t>
+            </a:r>
+            <a:endParaRPr lang="en-US" sz="2400" dirty="0"/>
+          </a:p>
+        </p:txBody>
+      </p:sp>
+      <p:sp>
+        <p:nvSpPr>
+          <p:cNvPr id="6" name="Text 4"/>
+          <p:cNvSpPr txBox="1"/>
+          <p:nvPr/>
+        </p:nvSpPr>
+        <p:spPr>
+          <a:xfrm>
+            <a:off x="612648" y="1143000"/>
+            <a:ext cx="10149840" cy="256032"/>
+          </a:xfrm>
+          <a:prstGeom prst="rect">
+            <a:avLst/>
+          </a:prstGeom>
+          <a:noFill/>
+          <a:ln/>
+        </p:spPr>
+        <p:txBody>
+          <a:bodyPr wrap="square" lIns="0" tIns="0" rIns="0" bIns="0" rtlCol="0" anchor="ctr">
+            <a:normAutofit/>
+          </a:bodyPr>
+          <a:lstStyle/>
+          <a:p>
+            <a:pPr marL="0" indent="0" algn="l">
+              <a:lnSpc>
+                <a:spcPct val="100000"/>
+              </a:lnSpc>
+              <a:buNone/>
+            </a:pPr>
+            <a:r>
+              <a:rPr lang="en-US" sz="1250" dirty="0">
+                <a:solidFill>
+                  <a:srgbClr val="5C6B82"/>
+                </a:solidFill>
+                <a:latin typeface="Microsoft JhengHei" pitchFamily="34" charset="0"/>
+                <a:ea typeface="Microsoft JhengHei" pitchFamily="34" charset="-122"/>
+                <a:cs typeface="Microsoft JhengHei" pitchFamily="34" charset="-120"/>
+              </a:rPr>
+              <a:t>先看會直接影響「登入 → 選遊戲 → 建房 → 進遊戲」的資料表。</a:t>
+            </a:r>
+            <a:endParaRPr lang="en-US" sz="1250" dirty="0"/>
+          </a:p>
+        </p:txBody>
+      </p:sp>
+      <p:sp>
+        <p:nvSpPr>
+          <p:cNvPr id="7" name="Shape 5"/>
+          <p:cNvSpPr/>
+          <p:nvPr/>
+        </p:nvSpPr>
+        <p:spPr>
+          <a:xfrm>
+            <a:off x="603504" y="1508760"/>
+            <a:ext cx="530352" cy="36576"/>
+          </a:xfrm>
+          <a:prstGeom prst="rect">
+            <a:avLst/>
+          </a:prstGeom>
+          <a:solidFill>
+            <a:srgbClr val="0891B2"/>
+          </a:solidFill>
+          <a:ln w="12700">
+            <a:solidFill>
+              <a:srgbClr val="0891B2"/>
+            </a:solidFill>
+            <a:prstDash val="solid"/>
+          </a:ln>
+        </p:spPr>
+      </p:sp>
+      <p:sp>
+        <p:nvSpPr>
+          <p:cNvPr id="8" name="Shape 6"/>
+          <p:cNvSpPr/>
+          <p:nvPr/>
+        </p:nvSpPr>
+        <p:spPr>
+          <a:xfrm>
+            <a:off x="603504" y="6419088"/>
+            <a:ext cx="10991088" cy="0"/>
+          </a:xfrm>
+          <a:prstGeom prst="line">
+            <a:avLst/>
+          </a:prstGeom>
+          <a:noFill/>
+          <a:ln w="8890">
+            <a:solidFill>
+              <a:srgbClr val="E7EDF5"/>
+            </a:solidFill>
+            <a:prstDash val="solid"/>
+          </a:ln>
+        </p:spPr>
+      </p:sp>
+      <p:sp>
+        <p:nvSpPr>
+          <p:cNvPr id="9" name="Text 7"/>
+          <p:cNvSpPr txBox="1"/>
+          <p:nvPr/>
+        </p:nvSpPr>
+        <p:spPr>
+          <a:xfrm>
+            <a:off x="603504" y="6519672"/>
+            <a:ext cx="4114800" cy="146304"/>
+          </a:xfrm>
+          <a:prstGeom prst="rect">
+            <a:avLst/>
+          </a:prstGeom>
+          <a:noFill/>
+          <a:ln/>
+        </p:spPr>
+        <p:txBody>
+          <a:bodyPr wrap="square" lIns="0" tIns="0" rIns="0" bIns="0" rtlCol="0" anchor="ctr">
+            <a:normAutofit/>
+          </a:bodyPr>
+          <a:lstStyle/>
+          <a:p>
+            <a:pPr marL="0" indent="0" algn="l">
+              <a:lnSpc>
+                <a:spcPct val="100000"/>
+              </a:lnSpc>
+              <a:buNone/>
+            </a:pPr>
+            <a:r>
+              <a:rPr lang="en-US" sz="850" b="1" dirty="0">
+                <a:solidFill>
+                  <a:srgbClr val="5C6B82"/>
+                </a:solidFill>
+                <a:latin typeface="Microsoft JhengHei" pitchFamily="34" charset="0"/>
+                <a:ea typeface="Microsoft JhengHei" pitchFamily="34" charset="-122"/>
+                <a:cs typeface="Microsoft JhengHei" pitchFamily="34" charset="-120"/>
+              </a:rPr>
+              <a:t>GAMEPLATFORM · 小組專題成果報告</a:t>
+            </a:r>
+            <a:endParaRPr lang="en-US" sz="850" dirty="0"/>
+          </a:p>
+        </p:txBody>
+      </p:sp>
+      <p:sp>
+        <p:nvSpPr>
+          <p:cNvPr id="10" name="Text 8"/>
+          <p:cNvSpPr txBox="1"/>
+          <p:nvPr/>
+        </p:nvSpPr>
+        <p:spPr>
+          <a:xfrm>
+            <a:off x="11201400" y="6492240"/>
+            <a:ext cx="411480" cy="182880"/>
+          </a:xfrm>
+          <a:prstGeom prst="rect">
+            <a:avLst/>
+          </a:prstGeom>
+          <a:noFill/>
+          <a:ln/>
+        </p:spPr>
+        <p:txBody>
+          <a:bodyPr wrap="square" lIns="0" tIns="0" rIns="0" bIns="0" rtlCol="0" anchor="ctr">
+            <a:normAutofit/>
+          </a:bodyPr>
+          <a:lstStyle/>
+          <a:p>
+            <a:pPr marL="0" indent="0" algn="r">
+              <a:lnSpc>
+                <a:spcPct val="100000"/>
+              </a:lnSpc>
+              <a:buNone/>
+            </a:pPr>
+            <a:r>
+              <a:rPr lang="en-US" sz="900" b="1" dirty="0" smtClean="0">
+                <a:solidFill>
+                  <a:srgbClr val="5C6B82"/>
+                </a:solidFill>
+                <a:latin typeface="Microsoft JhengHei" pitchFamily="34" charset="0"/>
+                <a:ea typeface="Microsoft JhengHei" pitchFamily="34" charset="-122"/>
+                <a:cs typeface="Microsoft JhengHei" pitchFamily="34" charset="-120"/>
+              </a:rPr>
+              <a:t>09</a:t>
+            </a:r>
+            <a:endParaRPr lang="en-US" sz="900" dirty="0"/>
+          </a:p>
+        </p:txBody>
+      </p:sp>
+      <p:sp>
+        <p:nvSpPr>
+          <p:cNvPr id="11" name="Shape 9"/>
+          <p:cNvSpPr/>
+          <p:nvPr/>
+        </p:nvSpPr>
+        <p:spPr>
+          <a:xfrm>
+            <a:off x="640080" y="1938528"/>
+            <a:ext cx="1280160" cy="1024128"/>
+          </a:xfrm>
+          <a:prstGeom prst="roundRect">
+            <a:avLst>
+              <a:gd name="adj" fmla="val 10714"/>
+            </a:avLst>
+          </a:prstGeom>
+          <a:solidFill>
+            <a:srgbClr val="FFFFFF"/>
+          </a:solidFill>
+          <a:ln w="12700">
+            <a:solidFill>
+              <a:srgbClr val="0891B2"/>
+            </a:solidFill>
+            <a:prstDash val="solid"/>
+          </a:ln>
+        </p:spPr>
+      </p:sp>
+      <p:sp>
+        <p:nvSpPr>
+          <p:cNvPr id="12" name="Shape 10"/>
+          <p:cNvSpPr/>
+          <p:nvPr/>
+        </p:nvSpPr>
+        <p:spPr>
+          <a:xfrm>
+            <a:off x="640080" y="1938528"/>
+            <a:ext cx="1280160" cy="329184"/>
+          </a:xfrm>
+          <a:prstGeom prst="rect">
+            <a:avLst/>
+          </a:prstGeom>
+          <a:solidFill>
+            <a:srgbClr val="0891B2"/>
+          </a:solidFill>
+          <a:ln w="12700">
+            <a:solidFill>
+              <a:srgbClr val="0891B2"/>
+            </a:solidFill>
+            <a:prstDash val="solid"/>
+          </a:ln>
+        </p:spPr>
+      </p:sp>
+      <p:sp>
+        <p:nvSpPr>
+          <p:cNvPr id="13" name="Text 11"/>
+          <p:cNvSpPr txBox="1"/>
+          <p:nvPr/>
+        </p:nvSpPr>
+        <p:spPr>
+          <a:xfrm>
+            <a:off x="758952" y="2020824"/>
+            <a:ext cx="1042416" cy="164592"/>
+          </a:xfrm>
+          <a:prstGeom prst="rect">
+            <a:avLst/>
+          </a:prstGeom>
+          <a:noFill/>
+          <a:ln/>
+        </p:spPr>
+        <p:txBody>
+          <a:bodyPr wrap="square" lIns="0" tIns="0" rIns="0" bIns="0" rtlCol="0" anchor="ctr">
+            <a:normAutofit/>
+          </a:bodyPr>
+          <a:lstStyle/>
+          <a:p>
+            <a:pPr marL="0" indent="0" algn="l">
+              <a:lnSpc>
+                <a:spcPct val="100000"/>
+              </a:lnSpc>
+              <a:buNone/>
+            </a:pPr>
+            <a:r>
+              <a:rPr lang="en-US" sz="1050" b="1" dirty="0">
+                <a:solidFill>
+                  <a:srgbClr val="FFFFFF"/>
+                </a:solidFill>
+                <a:latin typeface="Microsoft JhengHei" pitchFamily="34" charset="0"/>
+                <a:ea typeface="Microsoft JhengHei" pitchFamily="34" charset="-122"/>
+                <a:cs typeface="Microsoft JhengHei" pitchFamily="34" charset="-120"/>
+              </a:rPr>
+              <a:t>roles</a:t>
+            </a:r>
+            <a:endParaRPr lang="en-US" sz="1050" dirty="0"/>
+          </a:p>
+        </p:txBody>
+      </p:sp>
+      <p:sp>
+        <p:nvSpPr>
+          <p:cNvPr id="14" name="Text 12"/>
+          <p:cNvSpPr txBox="1"/>
+          <p:nvPr/>
+        </p:nvSpPr>
+        <p:spPr>
+          <a:xfrm>
+            <a:off x="768096" y="2377440"/>
+            <a:ext cx="1024128" cy="548640"/>
+          </a:xfrm>
+          <a:prstGeom prst="rect">
+            <a:avLst/>
+          </a:prstGeom>
+          <a:noFill/>
+          <a:ln/>
+        </p:spPr>
+        <p:txBody>
+          <a:bodyPr wrap="square" lIns="0" tIns="0" rIns="0" bIns="0" rtlCol="0" anchor="t">
+            <a:normAutofit/>
+          </a:bodyPr>
+          <a:lstStyle/>
+          <a:p>
+            <a:pPr marL="0" indent="0" algn="l">
+              <a:lnSpc>
+                <a:spcPct val="100000"/>
+              </a:lnSpc>
+              <a:buNone/>
+            </a:pPr>
+            <a:r>
+              <a:rPr lang="en-US" sz="850" dirty="0">
+                <a:solidFill>
+                  <a:srgbClr val="334155"/>
+                </a:solidFill>
+                <a:latin typeface="Microsoft JhengHei" pitchFamily="34" charset="0"/>
+                <a:ea typeface="Microsoft JhengHei" pitchFamily="34" charset="-122"/>
+                <a:cs typeface="Microsoft JhengHei" pitchFamily="34" charset="-120"/>
+              </a:rPr>
+              <a:t>PK id</a:t>
+            </a:r>
+            <a:endParaRPr lang="en-US" sz="850" dirty="0"/>
+          </a:p>
+          <a:p>
+            <a:pPr marL="0" indent="0" algn="l">
+              <a:lnSpc>
+                <a:spcPct val="100000"/>
+              </a:lnSpc>
+              <a:buNone/>
+            </a:pPr>
+            <a:r>
+              <a:rPr lang="en-US" sz="850" dirty="0">
+                <a:solidFill>
+                  <a:srgbClr val="334155"/>
+                </a:solidFill>
+                <a:latin typeface="Microsoft JhengHei" pitchFamily="34" charset="0"/>
+                <a:ea typeface="Microsoft JhengHei" pitchFamily="34" charset="-122"/>
+                <a:cs typeface="Microsoft JhengHei" pitchFamily="34" charset="-120"/>
+              </a:rPr>
+              <a:t>role_name</a:t>
+            </a:r>
+            <a:endParaRPr lang="en-US" sz="850" dirty="0"/>
+          </a:p>
+        </p:txBody>
+      </p:sp>
+      <p:sp>
+        <p:nvSpPr>
+          <p:cNvPr id="15" name="Shape 13"/>
+          <p:cNvSpPr/>
+          <p:nvPr/>
+        </p:nvSpPr>
+        <p:spPr>
+          <a:xfrm>
+            <a:off x="640080" y="3840480"/>
+            <a:ext cx="1280160" cy="1024128"/>
+          </a:xfrm>
+          <a:prstGeom prst="roundRect">
+            <a:avLst>
+              <a:gd name="adj" fmla="val 10714"/>
+            </a:avLst>
+          </a:prstGeom>
+          <a:solidFill>
+            <a:srgbClr val="FFFFFF"/>
+          </a:solidFill>
+          <a:ln w="12700">
+            <a:solidFill>
+              <a:srgbClr val="0891B2"/>
+            </a:solidFill>
+            <a:prstDash val="solid"/>
+          </a:ln>
+        </p:spPr>
+      </p:sp>
+      <p:sp>
+        <p:nvSpPr>
+          <p:cNvPr id="16" name="Shape 14"/>
+          <p:cNvSpPr/>
+          <p:nvPr/>
+        </p:nvSpPr>
+        <p:spPr>
+          <a:xfrm>
+            <a:off x="640080" y="3840480"/>
+            <a:ext cx="1280160" cy="329184"/>
+          </a:xfrm>
+          <a:prstGeom prst="rect">
+            <a:avLst/>
+          </a:prstGeom>
+          <a:solidFill>
+            <a:srgbClr val="0891B2"/>
+          </a:solidFill>
+          <a:ln w="12700">
+            <a:solidFill>
+              <a:srgbClr val="0891B2"/>
+            </a:solidFill>
+            <a:prstDash val="solid"/>
+          </a:ln>
+        </p:spPr>
+      </p:sp>
+      <p:sp>
+        <p:nvSpPr>
+          <p:cNvPr id="17" name="Text 15"/>
+          <p:cNvSpPr txBox="1"/>
+          <p:nvPr/>
+        </p:nvSpPr>
+        <p:spPr>
+          <a:xfrm>
+            <a:off x="758952" y="3922776"/>
+            <a:ext cx="1042416" cy="164592"/>
+          </a:xfrm>
+          <a:prstGeom prst="rect">
+            <a:avLst/>
+          </a:prstGeom>
+          <a:noFill/>
+          <a:ln/>
+        </p:spPr>
+        <p:txBody>
+          <a:bodyPr wrap="square" lIns="0" tIns="0" rIns="0" bIns="0" rtlCol="0" anchor="ctr">
+            <a:normAutofit/>
+          </a:bodyPr>
+          <a:lstStyle/>
+          <a:p>
+            <a:pPr marL="0" indent="0" algn="l">
+              <a:lnSpc>
+                <a:spcPct val="100000"/>
+              </a:lnSpc>
+              <a:buNone/>
+            </a:pPr>
+            <a:r>
+              <a:rPr lang="en-US" sz="1050" b="1" dirty="0">
+                <a:solidFill>
+                  <a:srgbClr val="FFFFFF"/>
+                </a:solidFill>
+                <a:latin typeface="Microsoft JhengHei" pitchFamily="34" charset="0"/>
+                <a:ea typeface="Microsoft JhengHei" pitchFamily="34" charset="-122"/>
+                <a:cs typeface="Microsoft JhengHei" pitchFamily="34" charset="-120"/>
+              </a:rPr>
+              <a:t>statuses</a:t>
+            </a:r>
+            <a:endParaRPr lang="en-US" sz="1050" dirty="0"/>
+          </a:p>
+        </p:txBody>
+      </p:sp>
+      <p:sp>
+        <p:nvSpPr>
+          <p:cNvPr id="18" name="Text 16"/>
+          <p:cNvSpPr txBox="1"/>
+          <p:nvPr/>
+        </p:nvSpPr>
+        <p:spPr>
+          <a:xfrm>
+            <a:off x="768096" y="4279392"/>
+            <a:ext cx="1024128" cy="548640"/>
+          </a:xfrm>
+          <a:prstGeom prst="rect">
+            <a:avLst/>
+          </a:prstGeom>
+          <a:noFill/>
+          <a:ln/>
+        </p:spPr>
+        <p:txBody>
+          <a:bodyPr wrap="square" lIns="0" tIns="0" rIns="0" bIns="0" rtlCol="0" anchor="t">
+            <a:normAutofit/>
+          </a:bodyPr>
+          <a:lstStyle/>
+          <a:p>
+            <a:pPr marL="0" indent="0" algn="l">
+              <a:lnSpc>
+                <a:spcPct val="100000"/>
+              </a:lnSpc>
+              <a:buNone/>
+            </a:pPr>
+            <a:r>
+              <a:rPr lang="en-US" sz="850" dirty="0">
+                <a:solidFill>
+                  <a:srgbClr val="334155"/>
+                </a:solidFill>
+                <a:latin typeface="Microsoft JhengHei" pitchFamily="34" charset="0"/>
+                <a:ea typeface="Microsoft JhengHei" pitchFamily="34" charset="-122"/>
+                <a:cs typeface="Microsoft JhengHei" pitchFamily="34" charset="-120"/>
+              </a:rPr>
+              <a:t>PK id</a:t>
+            </a:r>
+            <a:endParaRPr lang="en-US" sz="850" dirty="0"/>
+          </a:p>
+          <a:p>
+            <a:pPr marL="0" indent="0" algn="l">
+              <a:lnSpc>
+                <a:spcPct val="100000"/>
+              </a:lnSpc>
+              <a:buNone/>
+            </a:pPr>
+            <a:r>
+              <a:rPr lang="en-US" sz="850" dirty="0">
+                <a:solidFill>
+                  <a:srgbClr val="334155"/>
+                </a:solidFill>
+                <a:latin typeface="Microsoft JhengHei" pitchFamily="34" charset="0"/>
+                <a:ea typeface="Microsoft JhengHei" pitchFamily="34" charset="-122"/>
+                <a:cs typeface="Microsoft JhengHei" pitchFamily="34" charset="-120"/>
+              </a:rPr>
+              <a:t>status_name</a:t>
+            </a:r>
+            <a:endParaRPr lang="en-US" sz="850" dirty="0"/>
+          </a:p>
+        </p:txBody>
+      </p:sp>
+      <p:sp>
+        <p:nvSpPr>
+          <p:cNvPr id="19" name="Shape 17"/>
+          <p:cNvSpPr/>
+          <p:nvPr/>
+        </p:nvSpPr>
+        <p:spPr>
+          <a:xfrm>
+            <a:off x="2487168" y="2423160"/>
+            <a:ext cx="1828800" cy="1536192"/>
+          </a:xfrm>
+          <a:prstGeom prst="roundRect">
+            <a:avLst>
+              <a:gd name="adj" fmla="val 7143"/>
+            </a:avLst>
+          </a:prstGeom>
+          <a:solidFill>
+            <a:srgbClr val="FFFFFF"/>
+          </a:solidFill>
+          <a:ln w="12700">
+            <a:solidFill>
+              <a:srgbClr val="0891B2"/>
+            </a:solidFill>
+            <a:prstDash val="solid"/>
+          </a:ln>
+        </p:spPr>
+      </p:sp>
+      <p:sp>
+        <p:nvSpPr>
+          <p:cNvPr id="20" name="Shape 18"/>
+          <p:cNvSpPr/>
+          <p:nvPr/>
+        </p:nvSpPr>
+        <p:spPr>
+          <a:xfrm>
+            <a:off x="2487168" y="2423160"/>
+            <a:ext cx="1828800" cy="329184"/>
+          </a:xfrm>
+          <a:prstGeom prst="rect">
+            <a:avLst/>
+          </a:prstGeom>
+          <a:solidFill>
+            <a:srgbClr val="0891B2"/>
+          </a:solidFill>
+          <a:ln w="12700">
+            <a:solidFill>
+              <a:srgbClr val="0891B2"/>
+            </a:solidFill>
+            <a:prstDash val="solid"/>
+          </a:ln>
+        </p:spPr>
+      </p:sp>
+      <p:sp>
+        <p:nvSpPr>
+          <p:cNvPr id="21" name="Text 19"/>
+          <p:cNvSpPr txBox="1"/>
+          <p:nvPr/>
+        </p:nvSpPr>
+        <p:spPr>
+          <a:xfrm>
+            <a:off x="2606040" y="2505456"/>
+            <a:ext cx="1591056" cy="164592"/>
+          </a:xfrm>
+          <a:prstGeom prst="rect">
+            <a:avLst/>
+          </a:prstGeom>
+          <a:noFill/>
+          <a:ln/>
+        </p:spPr>
+        <p:txBody>
+          <a:bodyPr wrap="square" lIns="0" tIns="0" rIns="0" bIns="0" rtlCol="0" anchor="ctr">
+            <a:normAutofit/>
+          </a:bodyPr>
+          <a:lstStyle/>
+          <a:p>
+            <a:pPr marL="0" indent="0" algn="l">
+              <a:lnSpc>
+                <a:spcPct val="100000"/>
+              </a:lnSpc>
+              <a:buNone/>
+            </a:pPr>
+            <a:r>
+              <a:rPr lang="en-US" sz="1050" b="1" dirty="0">
+                <a:solidFill>
+                  <a:srgbClr val="FFFFFF"/>
+                </a:solidFill>
+                <a:latin typeface="Microsoft JhengHei" pitchFamily="34" charset="0"/>
+                <a:ea typeface="Microsoft JhengHei" pitchFamily="34" charset="-122"/>
+                <a:cs typeface="Microsoft JhengHei" pitchFamily="34" charset="-120"/>
+              </a:rPr>
+              <a:t>users</a:t>
+            </a:r>
+            <a:endParaRPr lang="en-US" sz="1050" dirty="0"/>
+          </a:p>
+        </p:txBody>
+      </p:sp>
+      <p:sp>
+        <p:nvSpPr>
+          <p:cNvPr id="22" name="Text 20"/>
+          <p:cNvSpPr txBox="1"/>
+          <p:nvPr/>
+        </p:nvSpPr>
+        <p:spPr>
+          <a:xfrm>
+            <a:off x="2615184" y="2862072"/>
+            <a:ext cx="1572768" cy="1060704"/>
+          </a:xfrm>
+          <a:prstGeom prst="rect">
+            <a:avLst/>
+          </a:prstGeom>
+          <a:noFill/>
+          <a:ln/>
+        </p:spPr>
+        <p:txBody>
+          <a:bodyPr wrap="square" lIns="0" tIns="0" rIns="0" bIns="0" rtlCol="0" anchor="t">
+            <a:normAutofit/>
+          </a:bodyPr>
+          <a:lstStyle/>
+          <a:p>
+            <a:pPr marL="0" indent="0" algn="l">
+              <a:lnSpc>
+                <a:spcPct val="100000"/>
+              </a:lnSpc>
+              <a:buNone/>
+            </a:pPr>
+            <a:r>
+              <a:rPr lang="en-US" sz="850" dirty="0">
+                <a:solidFill>
+                  <a:srgbClr val="334155"/>
+                </a:solidFill>
+                <a:latin typeface="Microsoft JhengHei" pitchFamily="34" charset="0"/>
+                <a:ea typeface="Microsoft JhengHei" pitchFamily="34" charset="-122"/>
+                <a:cs typeface="Microsoft JhengHei" pitchFamily="34" charset="-120"/>
+              </a:rPr>
+              <a:t>PK id</a:t>
+            </a:r>
+            <a:endParaRPr lang="en-US" sz="850" dirty="0"/>
+          </a:p>
+          <a:p>
+            <a:pPr marL="0" indent="0" algn="l">
+              <a:lnSpc>
+                <a:spcPct val="100000"/>
+              </a:lnSpc>
+              <a:buNone/>
+            </a:pPr>
+            <a:r>
+              <a:rPr lang="en-US" sz="850" dirty="0">
+                <a:solidFill>
+                  <a:srgbClr val="334155"/>
+                </a:solidFill>
+                <a:latin typeface="Microsoft JhengHei" pitchFamily="34" charset="0"/>
+                <a:ea typeface="Microsoft JhengHei" pitchFamily="34" charset="-122"/>
+                <a:cs typeface="Microsoft JhengHei" pitchFamily="34" charset="-120"/>
+              </a:rPr>
+              <a:t>account (UQ)</a:t>
+            </a:r>
+            <a:endParaRPr lang="en-US" sz="850" dirty="0"/>
+          </a:p>
+          <a:p>
+            <a:pPr marL="0" indent="0" algn="l">
+              <a:lnSpc>
+                <a:spcPct val="100000"/>
+              </a:lnSpc>
+              <a:buNone/>
+            </a:pPr>
+            <a:r>
+              <a:rPr lang="en-US" sz="850" dirty="0">
+                <a:solidFill>
+                  <a:srgbClr val="334155"/>
+                </a:solidFill>
+                <a:latin typeface="Microsoft JhengHei" pitchFamily="34" charset="0"/>
+                <a:ea typeface="Microsoft JhengHei" pitchFamily="34" charset="-122"/>
+                <a:cs typeface="Microsoft JhengHei" pitchFamily="34" charset="-120"/>
+              </a:rPr>
+              <a:t>username</a:t>
+            </a:r>
+            <a:endParaRPr lang="en-US" sz="850" dirty="0"/>
+          </a:p>
+          <a:p>
+            <a:pPr marL="0" indent="0" algn="l">
+              <a:lnSpc>
+                <a:spcPct val="100000"/>
+              </a:lnSpc>
+              <a:buNone/>
+            </a:pPr>
+            <a:r>
+              <a:rPr lang="en-US" sz="850" dirty="0">
+                <a:solidFill>
+                  <a:srgbClr val="334155"/>
+                </a:solidFill>
+                <a:latin typeface="Microsoft JhengHei" pitchFamily="34" charset="0"/>
+                <a:ea typeface="Microsoft JhengHei" pitchFamily="34" charset="-122"/>
+                <a:cs typeface="Microsoft JhengHei" pitchFamily="34" charset="-120"/>
+              </a:rPr>
+              <a:t>role_id · status_id</a:t>
+            </a:r>
+            <a:endParaRPr lang="en-US" sz="850" dirty="0"/>
+          </a:p>
+        </p:txBody>
+      </p:sp>
+      <p:sp>
+        <p:nvSpPr>
+          <p:cNvPr id="23" name="Shape 21"/>
+          <p:cNvSpPr/>
+          <p:nvPr/>
+        </p:nvSpPr>
+        <p:spPr>
+          <a:xfrm>
+            <a:off x="4892040" y="1938528"/>
+            <a:ext cx="1572768" cy="1371600"/>
+          </a:xfrm>
+          <a:prstGeom prst="roundRect">
+            <a:avLst>
+              <a:gd name="adj" fmla="val 8000"/>
+            </a:avLst>
+          </a:prstGeom>
+          <a:solidFill>
+            <a:srgbClr val="FFFFFF"/>
+          </a:solidFill>
+          <a:ln w="12700">
+            <a:solidFill>
+              <a:srgbClr val="7C3AED"/>
+            </a:solidFill>
+            <a:prstDash val="solid"/>
+          </a:ln>
+        </p:spPr>
+      </p:sp>
+      <p:sp>
+        <p:nvSpPr>
+          <p:cNvPr id="24" name="Shape 22"/>
+          <p:cNvSpPr/>
+          <p:nvPr/>
+        </p:nvSpPr>
+        <p:spPr>
+          <a:xfrm>
+            <a:off x="4892040" y="1938528"/>
+            <a:ext cx="1572768" cy="329184"/>
+          </a:xfrm>
+          <a:prstGeom prst="rect">
+            <a:avLst/>
+          </a:prstGeom>
+          <a:solidFill>
+            <a:srgbClr val="7C3AED"/>
+          </a:solidFill>
+          <a:ln w="12700">
+            <a:solidFill>
+              <a:srgbClr val="7C3AED"/>
+            </a:solidFill>
+            <a:prstDash val="solid"/>
+          </a:ln>
+        </p:spPr>
+      </p:sp>
+      <p:sp>
+        <p:nvSpPr>
+          <p:cNvPr id="25" name="Text 23"/>
+          <p:cNvSpPr txBox="1"/>
+          <p:nvPr/>
+        </p:nvSpPr>
+        <p:spPr>
+          <a:xfrm>
+            <a:off x="5010912" y="2020824"/>
+            <a:ext cx="1335024" cy="164592"/>
+          </a:xfrm>
+          <a:prstGeom prst="rect">
+            <a:avLst/>
+          </a:prstGeom>
+          <a:noFill/>
+          <a:ln/>
+        </p:spPr>
+        <p:txBody>
+          <a:bodyPr wrap="square" lIns="0" tIns="0" rIns="0" bIns="0" rtlCol="0" anchor="ctr">
+            <a:normAutofit/>
+          </a:bodyPr>
+          <a:lstStyle/>
+          <a:p>
+            <a:pPr marL="0" indent="0" algn="l">
+              <a:lnSpc>
+                <a:spcPct val="100000"/>
+              </a:lnSpc>
+              <a:buNone/>
+            </a:pPr>
+            <a:r>
+              <a:rPr lang="en-US" sz="1050" b="1" dirty="0">
+                <a:solidFill>
+                  <a:srgbClr val="FFFFFF"/>
+                </a:solidFill>
+                <a:latin typeface="Microsoft JhengHei" pitchFamily="34" charset="0"/>
+                <a:ea typeface="Microsoft JhengHei" pitchFamily="34" charset="-122"/>
+                <a:cs typeface="Microsoft JhengHei" pitchFamily="34" charset="-120"/>
+              </a:rPr>
+              <a:t>games</a:t>
+            </a:r>
+            <a:endParaRPr lang="en-US" sz="1050" dirty="0"/>
+          </a:p>
+        </p:txBody>
+      </p:sp>
+      <p:sp>
+        <p:nvSpPr>
+          <p:cNvPr id="26" name="Text 24"/>
+          <p:cNvSpPr txBox="1"/>
+          <p:nvPr/>
+        </p:nvSpPr>
+        <p:spPr>
+          <a:xfrm>
+            <a:off x="5020056" y="2377440"/>
+            <a:ext cx="1316736" cy="896112"/>
+          </a:xfrm>
+          <a:prstGeom prst="rect">
+            <a:avLst/>
+          </a:prstGeom>
+          <a:noFill/>
+          <a:ln/>
+        </p:spPr>
+        <p:txBody>
+          <a:bodyPr wrap="square" lIns="0" tIns="0" rIns="0" bIns="0" rtlCol="0" anchor="t">
+            <a:normAutofit/>
+          </a:bodyPr>
+          <a:lstStyle/>
+          <a:p>
+            <a:pPr marL="0" indent="0" algn="l">
+              <a:lnSpc>
+                <a:spcPct val="100000"/>
+              </a:lnSpc>
+              <a:buNone/>
+            </a:pPr>
+            <a:r>
+              <a:rPr lang="en-US" sz="850" dirty="0">
+                <a:solidFill>
+                  <a:srgbClr val="334155"/>
+                </a:solidFill>
+                <a:latin typeface="Microsoft JhengHei" pitchFamily="34" charset="0"/>
+                <a:ea typeface="Microsoft JhengHei" pitchFamily="34" charset="-122"/>
+                <a:cs typeface="Microsoft JhengHei" pitchFamily="34" charset="-120"/>
+              </a:rPr>
+              <a:t>PK game_id</a:t>
+            </a:r>
+            <a:endParaRPr lang="en-US" sz="850" dirty="0"/>
+          </a:p>
+          <a:p>
+            <a:pPr marL="0" indent="0" algn="l">
+              <a:lnSpc>
+                <a:spcPct val="100000"/>
+              </a:lnSpc>
+              <a:buNone/>
+            </a:pPr>
+            <a:r>
+              <a:rPr lang="en-US" sz="850" dirty="0">
+                <a:solidFill>
+                  <a:srgbClr val="334155"/>
+                </a:solidFill>
+                <a:latin typeface="Microsoft JhengHei" pitchFamily="34" charset="0"/>
+                <a:ea typeface="Microsoft JhengHei" pitchFamily="34" charset="-122"/>
+                <a:cs typeface="Microsoft JhengHei" pitchFamily="34" charset="-120"/>
+              </a:rPr>
+              <a:t>game_code (UQ)</a:t>
+            </a:r>
+            <a:endParaRPr lang="en-US" sz="850" dirty="0"/>
+          </a:p>
+          <a:p>
+            <a:pPr marL="0" indent="0" algn="l">
+              <a:lnSpc>
+                <a:spcPct val="100000"/>
+              </a:lnSpc>
+              <a:buNone/>
+            </a:pPr>
+            <a:r>
+              <a:rPr lang="en-US" sz="850" dirty="0">
+                <a:solidFill>
+                  <a:srgbClr val="334155"/>
+                </a:solidFill>
+                <a:latin typeface="Microsoft JhengHei" pitchFamily="34" charset="0"/>
+                <a:ea typeface="Microsoft JhengHei" pitchFamily="34" charset="-122"/>
+                <a:cs typeface="Microsoft JhengHei" pitchFamily="34" charset="-120"/>
+              </a:rPr>
+              <a:t>frontend_path</a:t>
+            </a:r>
+            <a:endParaRPr lang="en-US" sz="850" dirty="0"/>
+          </a:p>
+          <a:p>
+            <a:pPr marL="0" indent="0" algn="l">
+              <a:lnSpc>
+                <a:spcPct val="100000"/>
+              </a:lnSpc>
+              <a:buNone/>
+            </a:pPr>
+            <a:r>
+              <a:rPr lang="en-US" sz="850" dirty="0">
+                <a:solidFill>
+                  <a:srgbClr val="334155"/>
+                </a:solidFill>
+                <a:latin typeface="Microsoft JhengHei" pitchFamily="34" charset="0"/>
+                <a:ea typeface="Microsoft JhengHei" pitchFamily="34" charset="-122"/>
+                <a:cs typeface="Microsoft JhengHei" pitchFamily="34" charset="-120"/>
+              </a:rPr>
+              <a:t>backend_path</a:t>
+            </a:r>
+            <a:endParaRPr lang="en-US" sz="850" dirty="0"/>
+          </a:p>
+        </p:txBody>
+      </p:sp>
+      <p:sp>
+        <p:nvSpPr>
+          <p:cNvPr id="27" name="Shape 25"/>
+          <p:cNvSpPr/>
+          <p:nvPr/>
+        </p:nvSpPr>
+        <p:spPr>
+          <a:xfrm>
+            <a:off x="4892040" y="3840480"/>
+            <a:ext cx="1755648" cy="1371600"/>
+          </a:xfrm>
+          <a:prstGeom prst="roundRect">
+            <a:avLst>
+              <a:gd name="adj" fmla="val 8000"/>
+            </a:avLst>
+          </a:prstGeom>
+          <a:solidFill>
+            <a:srgbClr val="FFFFFF"/>
+          </a:solidFill>
+          <a:ln w="12700">
+            <a:solidFill>
+              <a:srgbClr val="7C3AED"/>
+            </a:solidFill>
+            <a:prstDash val="solid"/>
+          </a:ln>
+        </p:spPr>
+      </p:sp>
+      <p:sp>
+        <p:nvSpPr>
+          <p:cNvPr id="28" name="Shape 26"/>
+          <p:cNvSpPr/>
+          <p:nvPr/>
+        </p:nvSpPr>
+        <p:spPr>
+          <a:xfrm>
+            <a:off x="4892040" y="3840480"/>
+            <a:ext cx="1755648" cy="329184"/>
+          </a:xfrm>
+          <a:prstGeom prst="rect">
+            <a:avLst/>
+          </a:prstGeom>
+          <a:solidFill>
+            <a:srgbClr val="7C3AED"/>
+          </a:solidFill>
+          <a:ln w="12700">
+            <a:solidFill>
+              <a:srgbClr val="7C3AED"/>
+            </a:solidFill>
+            <a:prstDash val="solid"/>
+          </a:ln>
+        </p:spPr>
+      </p:sp>
+      <p:sp>
+        <p:nvSpPr>
+          <p:cNvPr id="29" name="Text 27"/>
+          <p:cNvSpPr txBox="1"/>
+          <p:nvPr/>
+        </p:nvSpPr>
+        <p:spPr>
+          <a:xfrm>
+            <a:off x="5010912" y="3922776"/>
+            <a:ext cx="1517904" cy="164592"/>
+          </a:xfrm>
+          <a:prstGeom prst="rect">
+            <a:avLst/>
+          </a:prstGeom>
+          <a:noFill/>
+          <a:ln/>
+        </p:spPr>
+        <p:txBody>
+          <a:bodyPr wrap="square" lIns="0" tIns="0" rIns="0" bIns="0" rtlCol="0" anchor="ctr">
+            <a:normAutofit/>
+          </a:bodyPr>
+          <a:lstStyle/>
+          <a:p>
+            <a:pPr marL="0" indent="0" algn="l">
+              <a:lnSpc>
+                <a:spcPct val="100000"/>
+              </a:lnSpc>
+              <a:buNone/>
+            </a:pPr>
+            <a:r>
+              <a:rPr lang="en-US" sz="1050" b="1" dirty="0">
+                <a:solidFill>
+                  <a:srgbClr val="FFFFFF"/>
+                </a:solidFill>
+                <a:latin typeface="Microsoft JhengHei" pitchFamily="34" charset="0"/>
+                <a:ea typeface="Microsoft JhengHei" pitchFamily="34" charset="-122"/>
+                <a:cs typeface="Microsoft JhengHei" pitchFamily="34" charset="-120"/>
+              </a:rPr>
+              <a:t>game_modes</a:t>
+            </a:r>
+            <a:endParaRPr lang="en-US" sz="1050" dirty="0"/>
+          </a:p>
+        </p:txBody>
+      </p:sp>
+      <p:sp>
+        <p:nvSpPr>
+          <p:cNvPr id="30" name="Text 28"/>
+          <p:cNvSpPr txBox="1"/>
+          <p:nvPr/>
+        </p:nvSpPr>
+        <p:spPr>
+          <a:xfrm>
+            <a:off x="5020056" y="4279392"/>
+            <a:ext cx="1499616" cy="896112"/>
+          </a:xfrm>
+          <a:prstGeom prst="rect">
+            <a:avLst/>
+          </a:prstGeom>
+          <a:noFill/>
+          <a:ln/>
+        </p:spPr>
+        <p:txBody>
+          <a:bodyPr wrap="square" lIns="0" tIns="0" rIns="0" bIns="0" rtlCol="0" anchor="t">
+            <a:normAutofit/>
+          </a:bodyPr>
+          <a:lstStyle/>
+          <a:p>
+            <a:pPr marL="0" indent="0" algn="l">
+              <a:lnSpc>
+                <a:spcPct val="100000"/>
+              </a:lnSpc>
+              <a:buNone/>
+            </a:pPr>
+            <a:r>
+              <a:rPr lang="en-US" sz="850" dirty="0">
+                <a:solidFill>
+                  <a:srgbClr val="334155"/>
+                </a:solidFill>
+                <a:latin typeface="Microsoft JhengHei" pitchFamily="34" charset="0"/>
+                <a:ea typeface="Microsoft JhengHei" pitchFamily="34" charset="-122"/>
+                <a:cs typeface="Microsoft JhengHei" pitchFamily="34" charset="-120"/>
+              </a:rPr>
+              <a:t>PK mode_id</a:t>
+            </a:r>
+            <a:endParaRPr lang="en-US" sz="850" dirty="0"/>
+          </a:p>
+          <a:p>
+            <a:pPr marL="0" indent="0" algn="l">
+              <a:lnSpc>
+                <a:spcPct val="100000"/>
+              </a:lnSpc>
+              <a:buNone/>
+            </a:pPr>
+            <a:r>
+              <a:rPr lang="en-US" sz="850" dirty="0">
+                <a:solidFill>
+                  <a:srgbClr val="334155"/>
+                </a:solidFill>
+                <a:latin typeface="Microsoft JhengHei" pitchFamily="34" charset="0"/>
+                <a:ea typeface="Microsoft JhengHei" pitchFamily="34" charset="-122"/>
+                <a:cs typeface="Microsoft JhengHei" pitchFamily="34" charset="-120"/>
+              </a:rPr>
+              <a:t>FK game_id</a:t>
+            </a:r>
+            <a:endParaRPr lang="en-US" sz="850" dirty="0"/>
+          </a:p>
+          <a:p>
+            <a:pPr marL="0" indent="0" algn="l">
+              <a:lnSpc>
+                <a:spcPct val="100000"/>
+              </a:lnSpc>
+              <a:buNone/>
+            </a:pPr>
+            <a:r>
+              <a:rPr lang="en-US" sz="850" dirty="0">
+                <a:solidFill>
+                  <a:srgbClr val="334155"/>
+                </a:solidFill>
+                <a:latin typeface="Microsoft JhengHei" pitchFamily="34" charset="0"/>
+                <a:ea typeface="Microsoft JhengHei" pitchFamily="34" charset="-122"/>
+                <a:cs typeface="Microsoft JhengHei" pitchFamily="34" charset="-120"/>
+              </a:rPr>
+              <a:t>mode_code</a:t>
+            </a:r>
+            <a:endParaRPr lang="en-US" sz="850" dirty="0"/>
+          </a:p>
+          <a:p>
+            <a:pPr marL="0" indent="0" algn="l">
+              <a:lnSpc>
+                <a:spcPct val="100000"/>
+              </a:lnSpc>
+              <a:buNone/>
+            </a:pPr>
+            <a:r>
+              <a:rPr lang="en-US" sz="850" dirty="0">
+                <a:solidFill>
+                  <a:srgbClr val="334155"/>
+                </a:solidFill>
+                <a:latin typeface="Microsoft JhengHei" pitchFamily="34" charset="0"/>
+                <a:ea typeface="Microsoft JhengHei" pitchFamily="34" charset="-122"/>
+                <a:cs typeface="Microsoft JhengHei" pitchFamily="34" charset="-120"/>
+              </a:rPr>
+              <a:t>min/max players</a:t>
+            </a:r>
+            <a:endParaRPr lang="en-US" sz="850" dirty="0"/>
+          </a:p>
+        </p:txBody>
+      </p:sp>
+      <p:sp>
+        <p:nvSpPr>
+          <p:cNvPr id="31" name="Shape 29"/>
+          <p:cNvSpPr/>
+          <p:nvPr/>
+        </p:nvSpPr>
+        <p:spPr>
+          <a:xfrm>
+            <a:off x="7516368" y="2331720"/>
+            <a:ext cx="1965960" cy="1627632"/>
+          </a:xfrm>
+          <a:prstGeom prst="roundRect">
+            <a:avLst>
+              <a:gd name="adj" fmla="val 6742"/>
+            </a:avLst>
+          </a:prstGeom>
+          <a:solidFill>
+            <a:srgbClr val="FFFFFF"/>
+          </a:solidFill>
+          <a:ln w="12700">
+            <a:solidFill>
+              <a:srgbClr val="059669"/>
+            </a:solidFill>
+            <a:prstDash val="solid"/>
+          </a:ln>
+        </p:spPr>
+      </p:sp>
+      <p:sp>
+        <p:nvSpPr>
+          <p:cNvPr id="32" name="Shape 30"/>
+          <p:cNvSpPr/>
+          <p:nvPr/>
+        </p:nvSpPr>
+        <p:spPr>
+          <a:xfrm>
+            <a:off x="7516368" y="2331720"/>
+            <a:ext cx="1965960" cy="329184"/>
+          </a:xfrm>
+          <a:prstGeom prst="rect">
+            <a:avLst/>
+          </a:prstGeom>
+          <a:solidFill>
+            <a:srgbClr val="059669"/>
+          </a:solidFill>
+          <a:ln w="12700">
+            <a:solidFill>
+              <a:srgbClr val="059669"/>
+            </a:solidFill>
+            <a:prstDash val="solid"/>
+          </a:ln>
+        </p:spPr>
+      </p:sp>
+      <p:sp>
+        <p:nvSpPr>
+          <p:cNvPr id="33" name="Text 31"/>
+          <p:cNvSpPr txBox="1"/>
+          <p:nvPr/>
+        </p:nvSpPr>
+        <p:spPr>
+          <a:xfrm>
+            <a:off x="7635240" y="2414016"/>
+            <a:ext cx="1728216" cy="164592"/>
+          </a:xfrm>
+          <a:prstGeom prst="rect">
+            <a:avLst/>
+          </a:prstGeom>
+          <a:noFill/>
+          <a:ln/>
+        </p:spPr>
+        <p:txBody>
+          <a:bodyPr wrap="square" lIns="0" tIns="0" rIns="0" bIns="0" rtlCol="0" anchor="ctr">
+            <a:normAutofit/>
+          </a:bodyPr>
+          <a:lstStyle/>
+          <a:p>
+            <a:pPr marL="0" indent="0" algn="l">
+              <a:lnSpc>
+                <a:spcPct val="100000"/>
+              </a:lnSpc>
+              <a:buNone/>
+            </a:pPr>
+            <a:r>
+              <a:rPr lang="en-US" sz="1050" b="1" dirty="0">
+                <a:solidFill>
+                  <a:srgbClr val="FFFFFF"/>
+                </a:solidFill>
+                <a:latin typeface="Microsoft JhengHei" pitchFamily="34" charset="0"/>
+                <a:ea typeface="Microsoft JhengHei" pitchFamily="34" charset="-122"/>
+                <a:cs typeface="Microsoft JhengHei" pitchFamily="34" charset="-120"/>
+              </a:rPr>
+              <a:t>rooms</a:t>
+            </a:r>
+            <a:endParaRPr lang="en-US" sz="1050" dirty="0"/>
+          </a:p>
+        </p:txBody>
+      </p:sp>
+      <p:sp>
+        <p:nvSpPr>
+          <p:cNvPr id="34" name="Text 32"/>
+          <p:cNvSpPr txBox="1"/>
+          <p:nvPr/>
+        </p:nvSpPr>
+        <p:spPr>
+          <a:xfrm>
+            <a:off x="7644384" y="2770632"/>
+            <a:ext cx="1709928" cy="1152144"/>
+          </a:xfrm>
+          <a:prstGeom prst="rect">
+            <a:avLst/>
+          </a:prstGeom>
+          <a:noFill/>
+          <a:ln/>
+        </p:spPr>
+        <p:txBody>
+          <a:bodyPr wrap="square" lIns="0" tIns="0" rIns="0" bIns="0" rtlCol="0" anchor="t">
+            <a:normAutofit/>
+          </a:bodyPr>
+          <a:lstStyle/>
+          <a:p>
+            <a:pPr marL="0" indent="0" algn="l">
+              <a:lnSpc>
+                <a:spcPct val="100000"/>
+              </a:lnSpc>
+              <a:buNone/>
+            </a:pPr>
+            <a:r>
+              <a:rPr lang="en-US" sz="850" dirty="0">
+                <a:solidFill>
+                  <a:srgbClr val="334155"/>
+                </a:solidFill>
+                <a:latin typeface="Microsoft JhengHei" pitchFamily="34" charset="0"/>
+                <a:ea typeface="Microsoft JhengHei" pitchFamily="34" charset="-122"/>
+                <a:cs typeface="Microsoft JhengHei" pitchFamily="34" charset="-120"/>
+              </a:rPr>
+              <a:t>PK id (8碼)</a:t>
+            </a:r>
+            <a:endParaRPr lang="en-US" sz="850" dirty="0"/>
+          </a:p>
+          <a:p>
+            <a:pPr marL="0" indent="0" algn="l">
+              <a:lnSpc>
+                <a:spcPct val="100000"/>
+              </a:lnSpc>
+              <a:buNone/>
+            </a:pPr>
+            <a:r>
+              <a:rPr lang="en-US" sz="850" dirty="0">
+                <a:solidFill>
+                  <a:srgbClr val="334155"/>
+                </a:solidFill>
+                <a:latin typeface="Microsoft JhengHei" pitchFamily="34" charset="0"/>
+                <a:ea typeface="Microsoft JhengHei" pitchFamily="34" charset="-122"/>
+                <a:cs typeface="Microsoft JhengHei" pitchFamily="34" charset="-120"/>
+              </a:rPr>
+              <a:t>game_id · mode_id</a:t>
+            </a:r>
+            <a:endParaRPr lang="en-US" sz="850" dirty="0"/>
+          </a:p>
+          <a:p>
+            <a:pPr marL="0" indent="0" algn="l">
+              <a:lnSpc>
+                <a:spcPct val="100000"/>
+              </a:lnSpc>
+              <a:buNone/>
+            </a:pPr>
+            <a:r>
+              <a:rPr lang="en-US" sz="850" dirty="0">
+                <a:solidFill>
+                  <a:srgbClr val="334155"/>
+                </a:solidFill>
+                <a:latin typeface="Microsoft JhengHei" pitchFamily="34" charset="0"/>
+                <a:ea typeface="Microsoft JhengHei" pitchFamily="34" charset="-122"/>
+                <a:cs typeface="Microsoft JhengHei" pitchFamily="34" charset="-120"/>
+              </a:rPr>
+              <a:t>host_account</a:t>
+            </a:r>
+            <a:endParaRPr lang="en-US" sz="850" dirty="0"/>
+          </a:p>
+          <a:p>
+            <a:pPr marL="0" indent="0" algn="l">
+              <a:lnSpc>
+                <a:spcPct val="100000"/>
+              </a:lnSpc>
+              <a:buNone/>
+            </a:pPr>
+            <a:r>
+              <a:rPr lang="en-US" sz="850" dirty="0">
+                <a:solidFill>
+                  <a:srgbClr val="334155"/>
+                </a:solidFill>
+                <a:latin typeface="Microsoft JhengHei" pitchFamily="34" charset="0"/>
+                <a:ea typeface="Microsoft JhengHei" pitchFamily="34" charset="-122"/>
+                <a:cs typeface="Microsoft JhengHei" pitchFamily="34" charset="-120"/>
+              </a:rPr>
+              <a:t>status</a:t>
+            </a:r>
+            <a:endParaRPr lang="en-US" sz="850" dirty="0"/>
+          </a:p>
+        </p:txBody>
+      </p:sp>
+      <p:sp>
+        <p:nvSpPr>
+          <p:cNvPr id="35" name="Shape 33"/>
+          <p:cNvSpPr/>
+          <p:nvPr/>
+        </p:nvSpPr>
+        <p:spPr>
+          <a:xfrm>
+            <a:off x="10012680" y="2596896"/>
+            <a:ext cx="1481328" cy="1188720"/>
+          </a:xfrm>
+          <a:prstGeom prst="roundRect">
+            <a:avLst>
+              <a:gd name="adj" fmla="val 9231"/>
+            </a:avLst>
+          </a:prstGeom>
+          <a:solidFill>
+            <a:srgbClr val="FFFFFF"/>
+          </a:solidFill>
+          <a:ln w="12700">
+            <a:solidFill>
+              <a:srgbClr val="059669"/>
+            </a:solidFill>
+            <a:prstDash val="solid"/>
+          </a:ln>
+        </p:spPr>
+      </p:sp>
+      <p:sp>
+        <p:nvSpPr>
+          <p:cNvPr id="36" name="Shape 34"/>
+          <p:cNvSpPr/>
+          <p:nvPr/>
+        </p:nvSpPr>
+        <p:spPr>
+          <a:xfrm>
+            <a:off x="10012680" y="2596896"/>
+            <a:ext cx="1481328" cy="329184"/>
+          </a:xfrm>
+          <a:prstGeom prst="rect">
+            <a:avLst/>
+          </a:prstGeom>
+          <a:solidFill>
+            <a:srgbClr val="059669"/>
+          </a:solidFill>
+          <a:ln w="12700">
+            <a:solidFill>
+              <a:srgbClr val="059669"/>
+            </a:solidFill>
+            <a:prstDash val="solid"/>
+          </a:ln>
+        </p:spPr>
+      </p:sp>
+      <p:sp>
+        <p:nvSpPr>
+          <p:cNvPr id="37" name="Text 35"/>
+          <p:cNvSpPr txBox="1"/>
+          <p:nvPr/>
+        </p:nvSpPr>
+        <p:spPr>
+          <a:xfrm>
+            <a:off x="10131552" y="2679192"/>
+            <a:ext cx="1243584" cy="164592"/>
+          </a:xfrm>
+          <a:prstGeom prst="rect">
+            <a:avLst/>
+          </a:prstGeom>
+          <a:noFill/>
+          <a:ln/>
+        </p:spPr>
+        <p:txBody>
+          <a:bodyPr wrap="square" lIns="0" tIns="0" rIns="0" bIns="0" rtlCol="0" anchor="ctr">
+            <a:normAutofit/>
+          </a:bodyPr>
+          <a:lstStyle/>
+          <a:p>
+            <a:pPr marL="0" indent="0" algn="l">
+              <a:lnSpc>
+                <a:spcPct val="100000"/>
+              </a:lnSpc>
+              <a:buNone/>
+            </a:pPr>
+            <a:r>
+              <a:rPr lang="en-US" sz="1050" b="1" dirty="0">
+                <a:solidFill>
+                  <a:srgbClr val="FFFFFF"/>
+                </a:solidFill>
+                <a:latin typeface="Microsoft JhengHei" pitchFamily="34" charset="0"/>
+                <a:ea typeface="Microsoft JhengHei" pitchFamily="34" charset="-122"/>
+                <a:cs typeface="Microsoft JhengHei" pitchFamily="34" charset="-120"/>
+              </a:rPr>
+              <a:t>room_players</a:t>
+            </a:r>
+            <a:endParaRPr lang="en-US" sz="1050" dirty="0"/>
+          </a:p>
+        </p:txBody>
+      </p:sp>
+      <p:sp>
+        <p:nvSpPr>
+          <p:cNvPr id="38" name="Text 36"/>
+          <p:cNvSpPr txBox="1"/>
+          <p:nvPr/>
+        </p:nvSpPr>
+        <p:spPr>
+          <a:xfrm>
+            <a:off x="10140696" y="3035808"/>
+            <a:ext cx="1225296" cy="713232"/>
+          </a:xfrm>
+          <a:prstGeom prst="rect">
+            <a:avLst/>
+          </a:prstGeom>
+          <a:noFill/>
+          <a:ln/>
+        </p:spPr>
+        <p:txBody>
+          <a:bodyPr wrap="square" lIns="0" tIns="0" rIns="0" bIns="0" rtlCol="0" anchor="t">
+            <a:normAutofit/>
+          </a:bodyPr>
+          <a:lstStyle/>
+          <a:p>
+            <a:pPr marL="0" indent="0" algn="l">
+              <a:lnSpc>
+                <a:spcPct val="100000"/>
+              </a:lnSpc>
+              <a:buNone/>
+            </a:pPr>
+            <a:r>
+              <a:rPr lang="en-US" sz="850" dirty="0">
+                <a:solidFill>
+                  <a:srgbClr val="334155"/>
+                </a:solidFill>
+                <a:latin typeface="Microsoft JhengHei" pitchFamily="34" charset="0"/>
+                <a:ea typeface="Microsoft JhengHei" pitchFamily="34" charset="-122"/>
+                <a:cs typeface="Microsoft JhengHei" pitchFamily="34" charset="-120"/>
+              </a:rPr>
+              <a:t>room_id</a:t>
+            </a:r>
+            <a:endParaRPr lang="en-US" sz="850" dirty="0"/>
+          </a:p>
+          <a:p>
+            <a:pPr marL="0" indent="0" algn="l">
+              <a:lnSpc>
+                <a:spcPct val="100000"/>
+              </a:lnSpc>
+              <a:buNone/>
+            </a:pPr>
+            <a:r>
+              <a:rPr lang="en-US" sz="850" dirty="0">
+                <a:solidFill>
+                  <a:srgbClr val="334155"/>
+                </a:solidFill>
+                <a:latin typeface="Microsoft JhengHei" pitchFamily="34" charset="0"/>
+                <a:ea typeface="Microsoft JhengHei" pitchFamily="34" charset="-122"/>
+                <a:cs typeface="Microsoft JhengHei" pitchFamily="34" charset="-120"/>
+              </a:rPr>
+              <a:t>player_account</a:t>
+            </a:r>
+            <a:endParaRPr lang="en-US" sz="850" dirty="0"/>
+          </a:p>
+        </p:txBody>
+      </p:sp>
+      <p:sp>
+        <p:nvSpPr>
+          <p:cNvPr id="39" name="Shape 37"/>
+          <p:cNvSpPr/>
+          <p:nvPr/>
+        </p:nvSpPr>
+        <p:spPr>
+          <a:xfrm>
+            <a:off x="1956816" y="2560320"/>
+            <a:ext cx="384048" cy="109728"/>
+          </a:xfrm>
+          <a:prstGeom prst="rightArrow">
+            <a:avLst/>
+          </a:prstGeom>
+          <a:solidFill>
+            <a:srgbClr val="D7E0EB"/>
+          </a:solidFill>
+          <a:ln w="12700">
+            <a:solidFill>
+              <a:srgbClr val="D7E0EB"/>
+            </a:solidFill>
+            <a:prstDash val="solid"/>
+          </a:ln>
+        </p:spPr>
+      </p:sp>
+      <p:sp>
+        <p:nvSpPr>
+          <p:cNvPr id="40" name="Shape 38"/>
+          <p:cNvSpPr/>
+          <p:nvPr/>
+        </p:nvSpPr>
+        <p:spPr>
+          <a:xfrm>
+            <a:off x="1956816" y="4142232"/>
+            <a:ext cx="384048" cy="109728"/>
+          </a:xfrm>
+          <a:prstGeom prst="rightArrow">
+            <a:avLst/>
+          </a:prstGeom>
+          <a:solidFill>
+            <a:srgbClr val="D7E0EB"/>
+          </a:solidFill>
+          <a:ln w="12700">
+            <a:solidFill>
+              <a:srgbClr val="D7E0EB"/>
+            </a:solidFill>
+            <a:prstDash val="solid"/>
+          </a:ln>
+        </p:spPr>
+      </p:sp>
+      <p:sp>
+        <p:nvSpPr>
+          <p:cNvPr id="41" name="Shape 39"/>
+          <p:cNvSpPr/>
+          <p:nvPr/>
+        </p:nvSpPr>
+        <p:spPr>
+          <a:xfrm>
+            <a:off x="6656832" y="2578608"/>
+            <a:ext cx="594360" cy="109728"/>
+          </a:xfrm>
+          <a:prstGeom prst="rightArrow">
+            <a:avLst/>
+          </a:prstGeom>
+          <a:solidFill>
+            <a:srgbClr val="D7E0EB"/>
+          </a:solidFill>
+          <a:ln w="12700">
+            <a:solidFill>
+              <a:srgbClr val="D7E0EB"/>
+            </a:solidFill>
+            <a:prstDash val="solid"/>
+          </a:ln>
+        </p:spPr>
+      </p:sp>
+      <p:sp>
+        <p:nvSpPr>
+          <p:cNvPr id="42" name="Shape 40"/>
+          <p:cNvSpPr/>
+          <p:nvPr/>
+        </p:nvSpPr>
+        <p:spPr>
+          <a:xfrm>
+            <a:off x="6839712" y="4315968"/>
+            <a:ext cx="512064" cy="109728"/>
+          </a:xfrm>
+          <a:prstGeom prst="rightArrow">
+            <a:avLst/>
+          </a:prstGeom>
+          <a:solidFill>
+            <a:srgbClr val="D7E0EB"/>
+          </a:solidFill>
+          <a:ln w="12700">
+            <a:solidFill>
+              <a:srgbClr val="D7E0EB"/>
+            </a:solidFill>
+            <a:prstDash val="solid"/>
+          </a:ln>
+        </p:spPr>
+      </p:sp>
+      <p:sp>
+        <p:nvSpPr>
+          <p:cNvPr id="43" name="Shape 41"/>
+          <p:cNvSpPr/>
+          <p:nvPr/>
+        </p:nvSpPr>
+        <p:spPr>
+          <a:xfrm>
+            <a:off x="9564624" y="3118104"/>
+            <a:ext cx="320040" cy="109728"/>
+          </a:xfrm>
+          <a:prstGeom prst="rightArrow">
+            <a:avLst/>
+          </a:prstGeom>
+          <a:solidFill>
+            <a:srgbClr val="D7E0EB"/>
+          </a:solidFill>
+          <a:ln w="12700">
+            <a:solidFill>
+              <a:srgbClr val="D7E0EB"/>
+            </a:solidFill>
+            <a:prstDash val="solid"/>
+          </a:ln>
+        </p:spPr>
+      </p:sp>
+      <p:sp>
+        <p:nvSpPr>
+          <p:cNvPr id="44" name="Shape 42"/>
+          <p:cNvSpPr/>
+          <p:nvPr/>
+        </p:nvSpPr>
+        <p:spPr>
+          <a:xfrm>
+            <a:off x="1984248" y="2139696"/>
+            <a:ext cx="502920" cy="329184"/>
+          </a:xfrm>
+          <a:prstGeom prst="roundRect">
+            <a:avLst>
+              <a:gd name="adj" fmla="val 50000"/>
+            </a:avLst>
+          </a:prstGeom>
+          <a:solidFill>
+            <a:srgbClr val="F2F6FB"/>
+          </a:solidFill>
+          <a:ln w="12700">
+            <a:solidFill>
+              <a:srgbClr val="0891B2"/>
+            </a:solidFill>
+            <a:prstDash val="solid"/>
+          </a:ln>
+        </p:spPr>
+      </p:sp>
+      <p:sp>
+        <p:nvSpPr>
+          <p:cNvPr id="45" name="Text 43"/>
+          <p:cNvSpPr txBox="1"/>
+          <p:nvPr/>
+        </p:nvSpPr>
+        <p:spPr>
+          <a:xfrm>
+            <a:off x="2057400" y="2208276"/>
+            <a:ext cx="356616" cy="182880"/>
+          </a:xfrm>
+          <a:prstGeom prst="rect">
+            <a:avLst/>
+          </a:prstGeom>
+          <a:noFill/>
+          <a:ln/>
+        </p:spPr>
+        <p:txBody>
+          <a:bodyPr wrap="square" lIns="254" tIns="254" rIns="254" bIns="254" rtlCol="0" anchor="ctr">
+            <a:normAutofit/>
+          </a:bodyPr>
+          <a:lstStyle/>
+          <a:p>
+            <a:pPr marL="0" indent="0" algn="ctr">
+              <a:lnSpc>
+                <a:spcPct val="100000"/>
+              </a:lnSpc>
+              <a:buNone/>
+            </a:pPr>
+            <a:r>
+              <a:rPr lang="en-US" sz="950" b="1" dirty="0">
+                <a:solidFill>
+                  <a:srgbClr val="0891B2"/>
+                </a:solidFill>
+                <a:latin typeface="Microsoft JhengHei" pitchFamily="34" charset="0"/>
+                <a:ea typeface="Microsoft JhengHei" pitchFamily="34" charset="-122"/>
+                <a:cs typeface="Microsoft JhengHei" pitchFamily="34" charset="-120"/>
+              </a:rPr>
+              <a:t>1 : N</a:t>
+            </a:r>
+            <a:endParaRPr lang="en-US" sz="950" dirty="0"/>
+          </a:p>
+        </p:txBody>
+      </p:sp>
+      <p:sp>
+        <p:nvSpPr>
+          <p:cNvPr id="46" name="Shape 44"/>
+          <p:cNvSpPr/>
+          <p:nvPr/>
+        </p:nvSpPr>
+        <p:spPr>
+          <a:xfrm>
+            <a:off x="1984248" y="3712464"/>
+            <a:ext cx="502920" cy="329184"/>
+          </a:xfrm>
+          <a:prstGeom prst="roundRect">
+            <a:avLst>
+              <a:gd name="adj" fmla="val 50000"/>
+            </a:avLst>
+          </a:prstGeom>
+          <a:solidFill>
+            <a:srgbClr val="F2F6FB"/>
+          </a:solidFill>
+          <a:ln w="12700">
+            <a:solidFill>
+              <a:srgbClr val="0891B2"/>
+            </a:solidFill>
+            <a:prstDash val="solid"/>
+          </a:ln>
+        </p:spPr>
+      </p:sp>
+      <p:sp>
+        <p:nvSpPr>
+          <p:cNvPr id="47" name="Text 45"/>
+          <p:cNvSpPr txBox="1"/>
+          <p:nvPr/>
+        </p:nvSpPr>
+        <p:spPr>
+          <a:xfrm>
+            <a:off x="2057400" y="3781044"/>
+            <a:ext cx="356616" cy="182880"/>
+          </a:xfrm>
+          <a:prstGeom prst="rect">
+            <a:avLst/>
+          </a:prstGeom>
+          <a:noFill/>
+          <a:ln/>
+        </p:spPr>
+        <p:txBody>
+          <a:bodyPr wrap="square" lIns="254" tIns="254" rIns="254" bIns="254" rtlCol="0" anchor="ctr">
+            <a:normAutofit/>
+          </a:bodyPr>
+          <a:lstStyle/>
+          <a:p>
+            <a:pPr marL="0" indent="0" algn="ctr">
+              <a:lnSpc>
+                <a:spcPct val="100000"/>
+              </a:lnSpc>
+              <a:buNone/>
+            </a:pPr>
+            <a:r>
+              <a:rPr lang="en-US" sz="950" b="1" dirty="0">
+                <a:solidFill>
+                  <a:srgbClr val="0891B2"/>
+                </a:solidFill>
+                <a:latin typeface="Microsoft JhengHei" pitchFamily="34" charset="0"/>
+                <a:ea typeface="Microsoft JhengHei" pitchFamily="34" charset="-122"/>
+                <a:cs typeface="Microsoft JhengHei" pitchFamily="34" charset="-120"/>
+              </a:rPr>
+              <a:t>1 : N</a:t>
+            </a:r>
+            <a:endParaRPr lang="en-US" sz="950" dirty="0"/>
+          </a:p>
+        </p:txBody>
+      </p:sp>
+      <p:sp>
+        <p:nvSpPr>
+          <p:cNvPr id="48" name="Shape 46"/>
+          <p:cNvSpPr/>
+          <p:nvPr/>
+        </p:nvSpPr>
+        <p:spPr>
+          <a:xfrm>
+            <a:off x="6693408" y="2148840"/>
+            <a:ext cx="502920" cy="329184"/>
+          </a:xfrm>
+          <a:prstGeom prst="roundRect">
+            <a:avLst>
+              <a:gd name="adj" fmla="val 50000"/>
+            </a:avLst>
+          </a:prstGeom>
+          <a:solidFill>
+            <a:srgbClr val="F2F6FB"/>
+          </a:solidFill>
+          <a:ln w="12700">
+            <a:solidFill>
+              <a:srgbClr val="7C3AED"/>
+            </a:solidFill>
+            <a:prstDash val="solid"/>
+          </a:ln>
+        </p:spPr>
+      </p:sp>
+      <p:sp>
+        <p:nvSpPr>
+          <p:cNvPr id="49" name="Text 47"/>
+          <p:cNvSpPr txBox="1"/>
+          <p:nvPr/>
+        </p:nvSpPr>
+        <p:spPr>
+          <a:xfrm>
+            <a:off x="6766560" y="2217420"/>
+            <a:ext cx="356616" cy="182880"/>
+          </a:xfrm>
+          <a:prstGeom prst="rect">
+            <a:avLst/>
+          </a:prstGeom>
+          <a:noFill/>
+          <a:ln/>
+        </p:spPr>
+        <p:txBody>
+          <a:bodyPr wrap="square" lIns="254" tIns="254" rIns="254" bIns="254" rtlCol="0" anchor="ctr">
+            <a:normAutofit/>
+          </a:bodyPr>
+          <a:lstStyle/>
+          <a:p>
+            <a:pPr marL="0" indent="0" algn="ctr">
+              <a:lnSpc>
+                <a:spcPct val="100000"/>
+              </a:lnSpc>
+              <a:buNone/>
+            </a:pPr>
+            <a:r>
+              <a:rPr lang="en-US" sz="950" b="1" dirty="0">
+                <a:solidFill>
+                  <a:srgbClr val="7C3AED"/>
+                </a:solidFill>
+                <a:latin typeface="Microsoft JhengHei" pitchFamily="34" charset="0"/>
+                <a:ea typeface="Microsoft JhengHei" pitchFamily="34" charset="-122"/>
+                <a:cs typeface="Microsoft JhengHei" pitchFamily="34" charset="-120"/>
+              </a:rPr>
+              <a:t>1 : N</a:t>
+            </a:r>
+            <a:endParaRPr lang="en-US" sz="950" dirty="0"/>
+          </a:p>
+        </p:txBody>
+      </p:sp>
+      <p:sp>
+        <p:nvSpPr>
+          <p:cNvPr id="50" name="Shape 48"/>
+          <p:cNvSpPr/>
+          <p:nvPr/>
+        </p:nvSpPr>
+        <p:spPr>
+          <a:xfrm>
+            <a:off x="6876288" y="3886200"/>
+            <a:ext cx="502920" cy="329184"/>
+          </a:xfrm>
+          <a:prstGeom prst="roundRect">
+            <a:avLst>
+              <a:gd name="adj" fmla="val 50000"/>
+            </a:avLst>
+          </a:prstGeom>
+          <a:solidFill>
+            <a:srgbClr val="F2F6FB"/>
+          </a:solidFill>
+          <a:ln w="12700">
+            <a:solidFill>
+              <a:srgbClr val="7C3AED"/>
+            </a:solidFill>
+            <a:prstDash val="solid"/>
+          </a:ln>
+        </p:spPr>
+      </p:sp>
+      <p:sp>
+        <p:nvSpPr>
+          <p:cNvPr id="51" name="Text 49"/>
+          <p:cNvSpPr txBox="1"/>
+          <p:nvPr/>
+        </p:nvSpPr>
+        <p:spPr>
+          <a:xfrm>
+            <a:off x="6949440" y="3954780"/>
+            <a:ext cx="356616" cy="182880"/>
+          </a:xfrm>
+          <a:prstGeom prst="rect">
+            <a:avLst/>
+          </a:prstGeom>
+          <a:noFill/>
+          <a:ln/>
+        </p:spPr>
+        <p:txBody>
+          <a:bodyPr wrap="square" lIns="254" tIns="254" rIns="254" bIns="254" rtlCol="0" anchor="ctr">
+            <a:normAutofit/>
+          </a:bodyPr>
+          <a:lstStyle/>
+          <a:p>
+            <a:pPr marL="0" indent="0" algn="ctr">
+              <a:lnSpc>
+                <a:spcPct val="100000"/>
+              </a:lnSpc>
+              <a:buNone/>
+            </a:pPr>
+            <a:r>
+              <a:rPr lang="en-US" sz="950" b="1" dirty="0">
+                <a:solidFill>
+                  <a:srgbClr val="7C3AED"/>
+                </a:solidFill>
+                <a:latin typeface="Microsoft JhengHei" pitchFamily="34" charset="0"/>
+                <a:ea typeface="Microsoft JhengHei" pitchFamily="34" charset="-122"/>
+                <a:cs typeface="Microsoft JhengHei" pitchFamily="34" charset="-120"/>
+              </a:rPr>
+              <a:t>1 : N</a:t>
+            </a:r>
+            <a:endParaRPr lang="en-US" sz="950" dirty="0"/>
+          </a:p>
+        </p:txBody>
+      </p:sp>
+      <p:sp>
+        <p:nvSpPr>
+          <p:cNvPr id="52" name="Shape 50"/>
+          <p:cNvSpPr/>
+          <p:nvPr/>
+        </p:nvSpPr>
+        <p:spPr>
+          <a:xfrm>
+            <a:off x="9537192" y="2706624"/>
+            <a:ext cx="502920" cy="329184"/>
+          </a:xfrm>
+          <a:prstGeom prst="roundRect">
+            <a:avLst>
+              <a:gd name="adj" fmla="val 50000"/>
+            </a:avLst>
+          </a:prstGeom>
+          <a:solidFill>
+            <a:srgbClr val="F2F6FB"/>
+          </a:solidFill>
+          <a:ln w="12700">
+            <a:solidFill>
+              <a:srgbClr val="059669"/>
+            </a:solidFill>
+            <a:prstDash val="solid"/>
+          </a:ln>
+        </p:spPr>
+      </p:sp>
+      <p:sp>
+        <p:nvSpPr>
+          <p:cNvPr id="53" name="Text 51"/>
+          <p:cNvSpPr txBox="1"/>
+          <p:nvPr/>
+        </p:nvSpPr>
+        <p:spPr>
+          <a:xfrm>
+            <a:off x="9610344" y="2775204"/>
+            <a:ext cx="356616" cy="182880"/>
+          </a:xfrm>
+          <a:prstGeom prst="rect">
+            <a:avLst/>
+          </a:prstGeom>
+          <a:noFill/>
+          <a:ln/>
+        </p:spPr>
+        <p:txBody>
+          <a:bodyPr wrap="square" lIns="254" tIns="254" rIns="254" bIns="254" rtlCol="0" anchor="ctr">
+            <a:normAutofit/>
+          </a:bodyPr>
+          <a:lstStyle/>
+          <a:p>
+            <a:pPr marL="0" indent="0" algn="ctr">
+              <a:lnSpc>
+                <a:spcPct val="100000"/>
+              </a:lnSpc>
+              <a:buNone/>
+            </a:pPr>
+            <a:r>
+              <a:rPr lang="en-US" sz="950" b="1" dirty="0">
+                <a:solidFill>
+                  <a:srgbClr val="059669"/>
+                </a:solidFill>
+                <a:latin typeface="Microsoft JhengHei" pitchFamily="34" charset="0"/>
+                <a:ea typeface="Microsoft JhengHei" pitchFamily="34" charset="-122"/>
+                <a:cs typeface="Microsoft JhengHei" pitchFamily="34" charset="-120"/>
+              </a:rPr>
+              <a:t>1 : N</a:t>
+            </a:r>
+            <a:endParaRPr lang="en-US" sz="950" dirty="0"/>
+          </a:p>
+        </p:txBody>
+      </p:sp>
+      <p:sp>
+        <p:nvSpPr>
+          <p:cNvPr id="54" name="Text 52"/>
+          <p:cNvSpPr txBox="1"/>
+          <p:nvPr/>
+        </p:nvSpPr>
+        <p:spPr>
+          <a:xfrm>
+            <a:off x="4572000" y="5623560"/>
+            <a:ext cx="6263640" cy="292608"/>
+          </a:xfrm>
+          <a:prstGeom prst="rect">
+            <a:avLst/>
+          </a:prstGeom>
+          <a:noFill/>
+          <a:ln/>
+        </p:spPr>
+        <p:txBody>
+          <a:bodyPr wrap="square" lIns="254" tIns="254" rIns="254" bIns="254" rtlCol="0" anchor="ctr">
+            <a:normAutofit/>
+          </a:bodyPr>
+          <a:lstStyle/>
+          <a:p>
+            <a:pPr marL="0" indent="0" algn="ctr">
+              <a:lnSpc>
+                <a:spcPct val="100000"/>
+              </a:lnSpc>
+              <a:buNone/>
+            </a:pPr>
+            <a:r>
+              <a:rPr lang="en-US" sz="1020" dirty="0">
+                <a:solidFill>
+                  <a:srgbClr val="5C6B82"/>
+                </a:solidFill>
+                <a:latin typeface="Microsoft JhengHei" pitchFamily="34" charset="0"/>
+                <a:ea typeface="Microsoft JhengHei" pitchFamily="34" charset="-122"/>
+                <a:cs typeface="Microsoft JhengHei" pitchFamily="34" charset="-120"/>
+              </a:rPr>
+              <a:t>rooms 同時保存 game_id 與 mode_id；room_players 是 Room.players 的 ElementCollection 關聯表。</a:t>
+            </a:r>
+            <a:endParaRPr lang="en-US" sz="1020" dirty="0"/>
+          </a:p>
+        </p:txBody>
+      </p:sp>
+    </p:spTree>
+  </p:cSld>
+  <p:clrMapOvr>
+    <a:masterClrMapping/>
+  </p:clrMapOvr>
+</p:sld>
+</file>
+
+<file path=ppt/slides/slide11.xml><?xml version="1.0" encoding="utf-8"?>
+<p:sld xmlns:a="http://schemas.openxmlformats.org/drawingml/2006/main" xmlns:r="http://schemas.openxmlformats.org/officeDocument/2006/relationships" xmlns:p="http://schemas.openxmlformats.org/presentationml/2006/main">
   <p:cSld name="Slide 8">
     <p:bg>
       <p:bgPr>
@@ -4525,7 +6682,7 @@
 </p:sld>
 </file>
 
-<file path=ppt/slides/slide11.xml><?xml version="1.0" encoding="utf-8"?>
+<file path=ppt/slides/slide12.xml><?xml version="1.0" encoding="utf-8"?>
 <p:sld xmlns:a="http://schemas.openxmlformats.org/drawingml/2006/main" xmlns:r="http://schemas.openxmlformats.org/officeDocument/2006/relationships" xmlns:p="http://schemas.openxmlformats.org/presentationml/2006/main">
   <p:cSld>
     <p:bg>
@@ -4582,18 +6739,7 @@
                 <a:ea typeface="Microsoft JhengHei" pitchFamily="34" charset="-122"/>
                 <a:cs typeface="Microsoft JhengHei" pitchFamily="34" charset="-120"/>
               </a:rPr>
-              <a:t>ER </a:t>
-            </a:r>
-            <a:r>
-              <a:rPr lang="en-US" sz="950" b="1" dirty="0">
-                <a:solidFill>
-                  <a:srgbClr val="059669"/>
-                </a:solidFill>
-                <a:latin typeface="Microsoft JhengHei" pitchFamily="34" charset="0"/>
-                <a:ea typeface="Microsoft JhengHei" pitchFamily="34" charset="-122"/>
-                <a:cs typeface="Microsoft JhengHei" pitchFamily="34" charset="-120"/>
-              </a:rPr>
-              <a:t>MODEL</a:t>
+              <a:t>ER MODEL</a:t>
             </a:r>
             <a:r>
               <a:rPr lang="zh-TW" altLang="en-US" sz="950" b="1" dirty="0">
@@ -6460,8 +8606,8 @@
         </p:nvSpPr>
         <p:spPr>
           <a:xfrm rot="5400000" flipV="1">
-            <a:off x="7669046" y="3784514"/>
-            <a:ext cx="971827" cy="92003"/>
+            <a:off x="7704147" y="3749413"/>
+            <a:ext cx="971827" cy="162206"/>
           </a:xfrm>
           <a:prstGeom prst="rightArrow">
             <a:avLst/>
@@ -6492,8 +8638,8 @@
         </p:nvSpPr>
         <p:spPr>
           <a:xfrm rot="2660390" flipV="1">
-            <a:off x="6553150" y="3787764"/>
-            <a:ext cx="1039838" cy="106894"/>
+            <a:off x="6562368" y="3782146"/>
+            <a:ext cx="1162566" cy="149273"/>
           </a:xfrm>
           <a:prstGeom prst="rightArrow">
             <a:avLst/>
@@ -6524,8 +8670,8 @@
         </p:nvSpPr>
         <p:spPr>
           <a:xfrm rot="2660390" flipV="1">
-            <a:off x="3397447" y="3857334"/>
-            <a:ext cx="1380408" cy="63034"/>
+            <a:off x="3420891" y="3799799"/>
+            <a:ext cx="1380408" cy="130122"/>
           </a:xfrm>
           <a:prstGeom prst="rightArrow">
             <a:avLst/>
@@ -6696,1468 +8842,6 @@
         <p14:creationId xmlns:p14="http://schemas.microsoft.com/office/powerpoint/2010/main" val="1197863704"/>
       </p:ext>
     </p:extLst>
-  </p:cSld>
-  <p:clrMapOvr>
-    <a:masterClrMapping/>
-  </p:clrMapOvr>
-</p:sld>
-</file>
-
-<file path=ppt/slides/slide12.xml><?xml version="1.0" encoding="utf-8"?>
-<p:sld xmlns:a="http://schemas.openxmlformats.org/drawingml/2006/main" xmlns:r="http://schemas.openxmlformats.org/officeDocument/2006/relationships" xmlns:p="http://schemas.openxmlformats.org/presentationml/2006/main">
-  <p:cSld name="Slide 9">
-    <p:bg>
-      <p:bgPr>
-        <a:solidFill>
-          <a:srgbClr val="F7F9FC"/>
-        </a:solidFill>
-        <a:effectLst/>
-      </p:bgPr>
-    </p:bg>
-    <p:spTree>
-      <p:nvGrpSpPr>
-        <p:cNvPr id="1" name=""/>
-        <p:cNvGrpSpPr/>
-        <p:nvPr/>
-      </p:nvGrpSpPr>
-      <p:grpSpPr>
-        <a:xfrm>
-          <a:off x="0" y="0"/>
-          <a:ext cx="0" cy="0"/>
-          <a:chOff x="0" y="0"/>
-          <a:chExt cx="0" cy="0"/>
-        </a:xfrm>
-      </p:grpSpPr>
-      <p:sp>
-        <p:nvSpPr>
-          <p:cNvPr id="2" name="Shape 0"/>
-          <p:cNvSpPr/>
-          <p:nvPr/>
-        </p:nvSpPr>
-        <p:spPr>
-          <a:xfrm>
-            <a:off x="10012680" y="0"/>
-            <a:ext cx="2176272" cy="6858000"/>
-          </a:xfrm>
-          <a:prstGeom prst="rect">
-            <a:avLst/>
-          </a:prstGeom>
-          <a:solidFill>
-            <a:srgbClr val="EEF4FF"/>
-          </a:solidFill>
-          <a:ln w="12700">
-            <a:solidFill>
-              <a:srgbClr val="EEF4FF"/>
-            </a:solidFill>
-            <a:prstDash val="solid"/>
-          </a:ln>
-        </p:spPr>
-      </p:sp>
-      <p:sp>
-        <p:nvSpPr>
-          <p:cNvPr id="3" name="Shape 1"/>
-          <p:cNvSpPr/>
-          <p:nvPr/>
-        </p:nvSpPr>
-        <p:spPr>
-          <a:xfrm>
-            <a:off x="10533888" y="0"/>
-            <a:ext cx="1655064" cy="6858000"/>
-          </a:xfrm>
-          <a:prstGeom prst="rect">
-            <a:avLst/>
-          </a:prstGeom>
-          <a:solidFill>
-            <a:srgbClr val="E8FAFF">
-              <a:alpha val="90000"/>
-            </a:srgbClr>
-          </a:solidFill>
-          <a:ln w="12700">
-            <a:solidFill>
-              <a:srgbClr val="E8FAFF"/>
-            </a:solidFill>
-            <a:prstDash val="solid"/>
-          </a:ln>
-        </p:spPr>
-      </p:sp>
-      <p:sp>
-        <p:nvSpPr>
-          <p:cNvPr id="4" name="Text 2"/>
-          <p:cNvSpPr txBox="1"/>
-          <p:nvPr/>
-        </p:nvSpPr>
-        <p:spPr>
-          <a:xfrm>
-            <a:off x="603504" y="347472"/>
-            <a:ext cx="4572000" cy="182880"/>
-          </a:xfrm>
-          <a:prstGeom prst="rect">
-            <a:avLst/>
-          </a:prstGeom>
-          <a:noFill/>
-          <a:ln/>
-        </p:spPr>
-        <p:txBody>
-          <a:bodyPr wrap="square" lIns="0" tIns="0" rIns="0" bIns="0" rtlCol="0" anchor="ctr">
-            <a:normAutofit/>
-          </a:bodyPr>
-          <a:lstStyle/>
-          <a:p>
-            <a:pPr marL="0" indent="0" algn="l">
-              <a:lnSpc>
-                <a:spcPct val="100000"/>
-              </a:lnSpc>
-              <a:buNone/>
-            </a:pPr>
-            <a:r>
-              <a:rPr lang="en-US" sz="950" b="1" dirty="0">
-                <a:solidFill>
-                  <a:srgbClr val="0891B2"/>
-                </a:solidFill>
-                <a:latin typeface="Microsoft JhengHei" pitchFamily="34" charset="0"/>
-                <a:ea typeface="Microsoft JhengHei" pitchFamily="34" charset="-122"/>
-                <a:cs typeface="Microsoft JhengHei" pitchFamily="34" charset="-120"/>
-              </a:rPr>
-              <a:t>AUTHENTICATION FLOW</a:t>
-            </a:r>
-            <a:endParaRPr lang="en-US" sz="950" dirty="0"/>
-          </a:p>
-        </p:txBody>
-      </p:sp>
-      <p:sp>
-        <p:nvSpPr>
-          <p:cNvPr id="5" name="Text 3"/>
-          <p:cNvSpPr txBox="1"/>
-          <p:nvPr/>
-        </p:nvSpPr>
-        <p:spPr>
-          <a:xfrm>
-            <a:off x="603504" y="640080"/>
-            <a:ext cx="10424160" cy="438912"/>
-          </a:xfrm>
-          <a:prstGeom prst="rect">
-            <a:avLst/>
-          </a:prstGeom>
-          <a:noFill/>
-          <a:ln/>
-        </p:spPr>
-        <p:txBody>
-          <a:bodyPr wrap="square" lIns="0" tIns="0" rIns="0" bIns="0" rtlCol="0" anchor="ctr">
-            <a:normAutofit/>
-          </a:bodyPr>
-          <a:lstStyle/>
-          <a:p>
-            <a:pPr marL="0" indent="0" algn="l">
-              <a:lnSpc>
-                <a:spcPct val="100000"/>
-              </a:lnSpc>
-              <a:buNone/>
-            </a:pPr>
-            <a:r>
-              <a:rPr lang="en-US" sz="2400" b="1" dirty="0">
-                <a:solidFill>
-                  <a:srgbClr val="122033"/>
-                </a:solidFill>
-                <a:latin typeface="Microsoft JhengHei" pitchFamily="34" charset="0"/>
-                <a:ea typeface="Microsoft JhengHei" pitchFamily="34" charset="-122"/>
-                <a:cs typeface="Microsoft JhengHei" pitchFamily="34" charset="-120"/>
-              </a:rPr>
-              <a:t>JWT 讓不同頁面共享同一個登入身分</a:t>
-            </a:r>
-            <a:endParaRPr lang="en-US" sz="2400" dirty="0"/>
-          </a:p>
-        </p:txBody>
-      </p:sp>
-      <p:sp>
-        <p:nvSpPr>
-          <p:cNvPr id="6" name="Text 4"/>
-          <p:cNvSpPr txBox="1"/>
-          <p:nvPr/>
-        </p:nvSpPr>
-        <p:spPr>
-          <a:xfrm>
-            <a:off x="612648" y="1143000"/>
-            <a:ext cx="10149840" cy="256032"/>
-          </a:xfrm>
-          <a:prstGeom prst="rect">
-            <a:avLst/>
-          </a:prstGeom>
-          <a:noFill/>
-          <a:ln/>
-        </p:spPr>
-        <p:txBody>
-          <a:bodyPr wrap="square" lIns="0" tIns="0" rIns="0" bIns="0" rtlCol="0" anchor="ctr">
-            <a:normAutofit/>
-          </a:bodyPr>
-          <a:lstStyle/>
-          <a:p>
-            <a:pPr marL="0" indent="0" algn="l">
-              <a:lnSpc>
-                <a:spcPct val="100000"/>
-              </a:lnSpc>
-              <a:buNone/>
-            </a:pPr>
-            <a:r>
-              <a:rPr lang="en-US" sz="1250" dirty="0">
-                <a:solidFill>
-                  <a:srgbClr val="5C6B82"/>
-                </a:solidFill>
-                <a:latin typeface="Microsoft JhengHei" pitchFamily="34" charset="0"/>
-                <a:ea typeface="Microsoft JhengHei" pitchFamily="34" charset="-122"/>
-                <a:cs typeface="Microsoft JhengHei" pitchFamily="34" charset="-120"/>
-              </a:rPr>
-              <a:t>前端保存登入結果；每次受保護請求仍由後端重新驗證 token 與帳號狀態。</a:t>
-            </a:r>
-            <a:endParaRPr lang="en-US" sz="1250" dirty="0"/>
-          </a:p>
-        </p:txBody>
-      </p:sp>
-      <p:sp>
-        <p:nvSpPr>
-          <p:cNvPr id="7" name="Shape 5"/>
-          <p:cNvSpPr/>
-          <p:nvPr/>
-        </p:nvSpPr>
-        <p:spPr>
-          <a:xfrm>
-            <a:off x="603504" y="1508760"/>
-            <a:ext cx="530352" cy="36576"/>
-          </a:xfrm>
-          <a:prstGeom prst="rect">
-            <a:avLst/>
-          </a:prstGeom>
-          <a:solidFill>
-            <a:srgbClr val="0891B2"/>
-          </a:solidFill>
-          <a:ln w="12700">
-            <a:solidFill>
-              <a:srgbClr val="0891B2"/>
-            </a:solidFill>
-            <a:prstDash val="solid"/>
-          </a:ln>
-        </p:spPr>
-      </p:sp>
-      <p:sp>
-        <p:nvSpPr>
-          <p:cNvPr id="8" name="Shape 6"/>
-          <p:cNvSpPr/>
-          <p:nvPr/>
-        </p:nvSpPr>
-        <p:spPr>
-          <a:xfrm>
-            <a:off x="603504" y="6419088"/>
-            <a:ext cx="10991088" cy="0"/>
-          </a:xfrm>
-          <a:prstGeom prst="line">
-            <a:avLst/>
-          </a:prstGeom>
-          <a:noFill/>
-          <a:ln w="8890">
-            <a:solidFill>
-              <a:srgbClr val="E7EDF5"/>
-            </a:solidFill>
-            <a:prstDash val="solid"/>
-          </a:ln>
-        </p:spPr>
-      </p:sp>
-      <p:sp>
-        <p:nvSpPr>
-          <p:cNvPr id="9" name="Text 7"/>
-          <p:cNvSpPr txBox="1"/>
-          <p:nvPr/>
-        </p:nvSpPr>
-        <p:spPr>
-          <a:xfrm>
-            <a:off x="603504" y="6519672"/>
-            <a:ext cx="4114800" cy="146304"/>
-          </a:xfrm>
-          <a:prstGeom prst="rect">
-            <a:avLst/>
-          </a:prstGeom>
-          <a:noFill/>
-          <a:ln/>
-        </p:spPr>
-        <p:txBody>
-          <a:bodyPr wrap="square" lIns="0" tIns="0" rIns="0" bIns="0" rtlCol="0" anchor="ctr">
-            <a:normAutofit/>
-          </a:bodyPr>
-          <a:lstStyle/>
-          <a:p>
-            <a:pPr marL="0" indent="0" algn="l">
-              <a:lnSpc>
-                <a:spcPct val="100000"/>
-              </a:lnSpc>
-              <a:buNone/>
-            </a:pPr>
-            <a:r>
-              <a:rPr lang="en-US" sz="850" b="1" dirty="0">
-                <a:solidFill>
-                  <a:srgbClr val="5C6B82"/>
-                </a:solidFill>
-                <a:latin typeface="Microsoft JhengHei" pitchFamily="34" charset="0"/>
-                <a:ea typeface="Microsoft JhengHei" pitchFamily="34" charset="-122"/>
-                <a:cs typeface="Microsoft JhengHei" pitchFamily="34" charset="-120"/>
-              </a:rPr>
-              <a:t>GAMEPLATFORM · 小組專題成果報告</a:t>
-            </a:r>
-            <a:endParaRPr lang="en-US" sz="850" dirty="0"/>
-          </a:p>
-        </p:txBody>
-      </p:sp>
-      <p:sp>
-        <p:nvSpPr>
-          <p:cNvPr id="11" name="Shape 9"/>
-          <p:cNvSpPr/>
-          <p:nvPr/>
-        </p:nvSpPr>
-        <p:spPr>
-          <a:xfrm>
-            <a:off x="621792" y="2011680"/>
-            <a:ext cx="1783080" cy="1316736"/>
-          </a:xfrm>
-          <a:prstGeom prst="roundRect">
-            <a:avLst>
-              <a:gd name="adj" fmla="val 8333"/>
-            </a:avLst>
-          </a:prstGeom>
-          <a:solidFill>
-            <a:srgbClr val="FFFFFF"/>
-          </a:solidFill>
-          <a:ln w="10160">
-            <a:solidFill>
-              <a:srgbClr val="2563EB"/>
-            </a:solidFill>
-            <a:prstDash val="solid"/>
-          </a:ln>
-        </p:spPr>
-      </p:sp>
-      <p:sp>
-        <p:nvSpPr>
-          <p:cNvPr id="12" name="Shape 10"/>
-          <p:cNvSpPr/>
-          <p:nvPr/>
-        </p:nvSpPr>
-        <p:spPr>
-          <a:xfrm>
-            <a:off x="1307592" y="2176272"/>
-            <a:ext cx="365760" cy="365760"/>
-          </a:xfrm>
-          <a:prstGeom prst="ellipse">
-            <a:avLst/>
-          </a:prstGeom>
-          <a:solidFill>
-            <a:srgbClr val="2563EB"/>
-          </a:solidFill>
-          <a:ln w="12700">
-            <a:solidFill>
-              <a:srgbClr val="2563EB"/>
-            </a:solidFill>
-            <a:prstDash val="solid"/>
-          </a:ln>
-        </p:spPr>
-      </p:sp>
-      <p:sp>
-        <p:nvSpPr>
-          <p:cNvPr id="13" name="Text 11"/>
-          <p:cNvSpPr txBox="1"/>
-          <p:nvPr/>
-        </p:nvSpPr>
-        <p:spPr>
-          <a:xfrm>
-            <a:off x="1307592" y="2176272"/>
-            <a:ext cx="365760" cy="365760"/>
-          </a:xfrm>
-          <a:prstGeom prst="rect">
-            <a:avLst/>
-          </a:prstGeom>
-          <a:noFill/>
-          <a:ln/>
-        </p:spPr>
-        <p:txBody>
-          <a:bodyPr wrap="square" lIns="0" tIns="0" rIns="0" bIns="0" rtlCol="0" anchor="ctr">
-            <a:normAutofit/>
-          </a:bodyPr>
-          <a:lstStyle/>
-          <a:p>
-            <a:pPr marL="0" indent="0" algn="ctr">
-              <a:lnSpc>
-                <a:spcPct val="100000"/>
-              </a:lnSpc>
-              <a:buNone/>
-            </a:pPr>
-            <a:r>
-              <a:rPr lang="en-US" sz="1300" b="1" dirty="0">
-                <a:solidFill>
-                  <a:srgbClr val="FFFFFF"/>
-                </a:solidFill>
-                <a:latin typeface="Microsoft JhengHei" pitchFamily="34" charset="0"/>
-                <a:ea typeface="Microsoft JhengHei" pitchFamily="34" charset="-122"/>
-                <a:cs typeface="Microsoft JhengHei" pitchFamily="34" charset="-120"/>
-              </a:rPr>
-              <a:t>1</a:t>
-            </a:r>
-            <a:endParaRPr lang="en-US" sz="1300" dirty="0"/>
-          </a:p>
-        </p:txBody>
-      </p:sp>
-      <p:sp>
-        <p:nvSpPr>
-          <p:cNvPr id="14" name="Text 12"/>
-          <p:cNvSpPr txBox="1"/>
-          <p:nvPr/>
-        </p:nvSpPr>
-        <p:spPr>
-          <a:xfrm>
-            <a:off x="731520" y="2660904"/>
-            <a:ext cx="1563624" cy="201168"/>
-          </a:xfrm>
-          <a:prstGeom prst="rect">
-            <a:avLst/>
-          </a:prstGeom>
-          <a:noFill/>
-          <a:ln/>
-        </p:spPr>
-        <p:txBody>
-          <a:bodyPr wrap="square" lIns="254" tIns="254" rIns="254" bIns="254" rtlCol="0" anchor="ctr">
-            <a:normAutofit/>
-          </a:bodyPr>
-          <a:lstStyle/>
-          <a:p>
-            <a:pPr marL="0" indent="0" algn="ctr">
-              <a:lnSpc>
-                <a:spcPct val="100000"/>
-              </a:lnSpc>
-              <a:buNone/>
-            </a:pPr>
-            <a:r>
-              <a:rPr lang="en-US" sz="1240" b="1" dirty="0">
-                <a:solidFill>
-                  <a:srgbClr val="122033"/>
-                </a:solidFill>
-                <a:latin typeface="Microsoft JhengHei" pitchFamily="34" charset="0"/>
-                <a:ea typeface="Microsoft JhengHei" pitchFamily="34" charset="-122"/>
-                <a:cs typeface="Microsoft JhengHei" pitchFamily="34" charset="-120"/>
-              </a:rPr>
-              <a:t>Login</a:t>
-            </a:r>
-            <a:endParaRPr lang="en-US" sz="1240" dirty="0"/>
-          </a:p>
-        </p:txBody>
-      </p:sp>
-      <p:sp>
-        <p:nvSpPr>
-          <p:cNvPr id="15" name="Text 13"/>
-          <p:cNvSpPr txBox="1"/>
-          <p:nvPr/>
-        </p:nvSpPr>
-        <p:spPr>
-          <a:xfrm>
-            <a:off x="731520" y="2944368"/>
-            <a:ext cx="1563624" cy="210312"/>
-          </a:xfrm>
-          <a:prstGeom prst="rect">
-            <a:avLst/>
-          </a:prstGeom>
-          <a:noFill/>
-          <a:ln/>
-        </p:spPr>
-        <p:txBody>
-          <a:bodyPr wrap="square" lIns="254" tIns="254" rIns="254" bIns="254" rtlCol="0" anchor="ctr">
-            <a:normAutofit/>
-          </a:bodyPr>
-          <a:lstStyle/>
-          <a:p>
-            <a:pPr marL="0" indent="0" algn="ctr">
-              <a:lnSpc>
-                <a:spcPct val="100000"/>
-              </a:lnSpc>
-              <a:buNone/>
-            </a:pPr>
-            <a:r>
-              <a:rPr lang="en-US" sz="880" dirty="0">
-                <a:solidFill>
-                  <a:srgbClr val="5C6B82"/>
-                </a:solidFill>
-                <a:latin typeface="Microsoft JhengHei" pitchFamily="34" charset="0"/>
-                <a:ea typeface="Microsoft JhengHei" pitchFamily="34" charset="-122"/>
-                <a:cs typeface="Microsoft JhengHei" pitchFamily="34" charset="-120"/>
-              </a:rPr>
-              <a:t>account + password</a:t>
-            </a:r>
-            <a:endParaRPr lang="en-US" sz="880" dirty="0"/>
-          </a:p>
-        </p:txBody>
-      </p:sp>
-      <p:sp>
-        <p:nvSpPr>
-          <p:cNvPr id="16" name="Shape 14"/>
-          <p:cNvSpPr/>
-          <p:nvPr/>
-        </p:nvSpPr>
-        <p:spPr>
-          <a:xfrm>
-            <a:off x="2487168" y="2606040"/>
-            <a:ext cx="237744" cy="91440"/>
-          </a:xfrm>
-          <a:prstGeom prst="rightArrow">
-            <a:avLst/>
-          </a:prstGeom>
-          <a:solidFill>
-            <a:srgbClr val="D7E0EB"/>
-          </a:solidFill>
-          <a:ln w="12700">
-            <a:solidFill>
-              <a:srgbClr val="D7E0EB"/>
-            </a:solidFill>
-            <a:prstDash val="solid"/>
-          </a:ln>
-        </p:spPr>
-      </p:sp>
-      <p:sp>
-        <p:nvSpPr>
-          <p:cNvPr id="17" name="Shape 15"/>
-          <p:cNvSpPr/>
-          <p:nvPr/>
-        </p:nvSpPr>
-        <p:spPr>
-          <a:xfrm>
-            <a:off x="2871216" y="2011680"/>
-            <a:ext cx="1783080" cy="1316736"/>
-          </a:xfrm>
-          <a:prstGeom prst="roundRect">
-            <a:avLst>
-              <a:gd name="adj" fmla="val 8333"/>
-            </a:avLst>
-          </a:prstGeom>
-          <a:solidFill>
-            <a:srgbClr val="FFFFFF"/>
-          </a:solidFill>
-          <a:ln w="10160">
-            <a:solidFill>
-              <a:srgbClr val="7C3AED"/>
-            </a:solidFill>
-            <a:prstDash val="solid"/>
-          </a:ln>
-        </p:spPr>
-      </p:sp>
-      <p:sp>
-        <p:nvSpPr>
-          <p:cNvPr id="18" name="Shape 16"/>
-          <p:cNvSpPr/>
-          <p:nvPr/>
-        </p:nvSpPr>
-        <p:spPr>
-          <a:xfrm>
-            <a:off x="3557016" y="2176272"/>
-            <a:ext cx="365760" cy="365760"/>
-          </a:xfrm>
-          <a:prstGeom prst="ellipse">
-            <a:avLst/>
-          </a:prstGeom>
-          <a:solidFill>
-            <a:srgbClr val="7C3AED"/>
-          </a:solidFill>
-          <a:ln w="12700">
-            <a:solidFill>
-              <a:srgbClr val="7C3AED"/>
-            </a:solidFill>
-            <a:prstDash val="solid"/>
-          </a:ln>
-        </p:spPr>
-      </p:sp>
-      <p:sp>
-        <p:nvSpPr>
-          <p:cNvPr id="19" name="Text 17"/>
-          <p:cNvSpPr txBox="1"/>
-          <p:nvPr/>
-        </p:nvSpPr>
-        <p:spPr>
-          <a:xfrm>
-            <a:off x="3557016" y="2176272"/>
-            <a:ext cx="365760" cy="365760"/>
-          </a:xfrm>
-          <a:prstGeom prst="rect">
-            <a:avLst/>
-          </a:prstGeom>
-          <a:noFill/>
-          <a:ln/>
-        </p:spPr>
-        <p:txBody>
-          <a:bodyPr wrap="square" lIns="0" tIns="0" rIns="0" bIns="0" rtlCol="0" anchor="ctr">
-            <a:normAutofit/>
-          </a:bodyPr>
-          <a:lstStyle/>
-          <a:p>
-            <a:pPr marL="0" indent="0" algn="ctr">
-              <a:lnSpc>
-                <a:spcPct val="100000"/>
-              </a:lnSpc>
-              <a:buNone/>
-            </a:pPr>
-            <a:r>
-              <a:rPr lang="en-US" sz="1300" b="1" dirty="0">
-                <a:solidFill>
-                  <a:srgbClr val="FFFFFF"/>
-                </a:solidFill>
-                <a:latin typeface="Microsoft JhengHei" pitchFamily="34" charset="0"/>
-                <a:ea typeface="Microsoft JhengHei" pitchFamily="34" charset="-122"/>
-                <a:cs typeface="Microsoft JhengHei" pitchFamily="34" charset="-120"/>
-              </a:rPr>
-              <a:t>2</a:t>
-            </a:r>
-            <a:endParaRPr lang="en-US" sz="1300" dirty="0"/>
-          </a:p>
-        </p:txBody>
-      </p:sp>
-      <p:sp>
-        <p:nvSpPr>
-          <p:cNvPr id="20" name="Text 18"/>
-          <p:cNvSpPr txBox="1"/>
-          <p:nvPr/>
-        </p:nvSpPr>
-        <p:spPr>
-          <a:xfrm>
-            <a:off x="2980944" y="2660904"/>
-            <a:ext cx="1563624" cy="201168"/>
-          </a:xfrm>
-          <a:prstGeom prst="rect">
-            <a:avLst/>
-          </a:prstGeom>
-          <a:noFill/>
-          <a:ln/>
-        </p:spPr>
-        <p:txBody>
-          <a:bodyPr wrap="square" lIns="254" tIns="254" rIns="254" bIns="254" rtlCol="0" anchor="ctr">
-            <a:normAutofit/>
-          </a:bodyPr>
-          <a:lstStyle/>
-          <a:p>
-            <a:pPr marL="0" indent="0" algn="ctr">
-              <a:lnSpc>
-                <a:spcPct val="100000"/>
-              </a:lnSpc>
-              <a:buNone/>
-            </a:pPr>
-            <a:r>
-              <a:rPr lang="en-US" sz="1240" b="1" dirty="0">
-                <a:solidFill>
-                  <a:srgbClr val="122033"/>
-                </a:solidFill>
-                <a:latin typeface="Microsoft JhengHei" pitchFamily="34" charset="0"/>
-                <a:ea typeface="Microsoft JhengHei" pitchFamily="34" charset="-122"/>
-                <a:cs typeface="Microsoft JhengHei" pitchFamily="34" charset="-120"/>
-              </a:rPr>
-              <a:t>JWT</a:t>
-            </a:r>
-            <a:endParaRPr lang="en-US" sz="1240" dirty="0"/>
-          </a:p>
-        </p:txBody>
-      </p:sp>
-      <p:sp>
-        <p:nvSpPr>
-          <p:cNvPr id="21" name="Text 19"/>
-          <p:cNvSpPr txBox="1"/>
-          <p:nvPr/>
-        </p:nvSpPr>
-        <p:spPr>
-          <a:xfrm>
-            <a:off x="2980944" y="2944368"/>
-            <a:ext cx="1563624" cy="210312"/>
-          </a:xfrm>
-          <a:prstGeom prst="rect">
-            <a:avLst/>
-          </a:prstGeom>
-          <a:noFill/>
-          <a:ln/>
-        </p:spPr>
-        <p:txBody>
-          <a:bodyPr wrap="square" lIns="254" tIns="254" rIns="254" bIns="254" rtlCol="0" anchor="ctr">
-            <a:normAutofit/>
-          </a:bodyPr>
-          <a:lstStyle/>
-          <a:p>
-            <a:pPr marL="0" indent="0" algn="ctr">
-              <a:lnSpc>
-                <a:spcPct val="100000"/>
-              </a:lnSpc>
-              <a:buNone/>
-            </a:pPr>
-            <a:r>
-              <a:rPr lang="en-US" sz="880" dirty="0">
-                <a:solidFill>
-                  <a:srgbClr val="5C6B82"/>
-                </a:solidFill>
-                <a:latin typeface="Microsoft JhengHei" pitchFamily="34" charset="0"/>
-                <a:ea typeface="Microsoft JhengHei" pitchFamily="34" charset="-122"/>
-                <a:cs typeface="Microsoft JhengHei" pitchFamily="34" charset="-120"/>
-              </a:rPr>
-              <a:t>userId · account · role</a:t>
-            </a:r>
-            <a:endParaRPr lang="en-US" sz="880" dirty="0"/>
-          </a:p>
-        </p:txBody>
-      </p:sp>
-      <p:sp>
-        <p:nvSpPr>
-          <p:cNvPr id="22" name="Shape 20"/>
-          <p:cNvSpPr/>
-          <p:nvPr/>
-        </p:nvSpPr>
-        <p:spPr>
-          <a:xfrm>
-            <a:off x="4736592" y="2606040"/>
-            <a:ext cx="237744" cy="91440"/>
-          </a:xfrm>
-          <a:prstGeom prst="rightArrow">
-            <a:avLst/>
-          </a:prstGeom>
-          <a:solidFill>
-            <a:srgbClr val="D7E0EB"/>
-          </a:solidFill>
-          <a:ln w="12700">
-            <a:solidFill>
-              <a:srgbClr val="D7E0EB"/>
-            </a:solidFill>
-            <a:prstDash val="solid"/>
-          </a:ln>
-        </p:spPr>
-      </p:sp>
-      <p:sp>
-        <p:nvSpPr>
-          <p:cNvPr id="23" name="Shape 21"/>
-          <p:cNvSpPr/>
-          <p:nvPr/>
-        </p:nvSpPr>
-        <p:spPr>
-          <a:xfrm>
-            <a:off x="5120640" y="2011680"/>
-            <a:ext cx="1783080" cy="1316736"/>
-          </a:xfrm>
-          <a:prstGeom prst="roundRect">
-            <a:avLst>
-              <a:gd name="adj" fmla="val 8333"/>
-            </a:avLst>
-          </a:prstGeom>
-          <a:solidFill>
-            <a:srgbClr val="FFFFFF"/>
-          </a:solidFill>
-          <a:ln w="10160">
-            <a:solidFill>
-              <a:srgbClr val="0891B2"/>
-            </a:solidFill>
-            <a:prstDash val="solid"/>
-          </a:ln>
-        </p:spPr>
-      </p:sp>
-      <p:sp>
-        <p:nvSpPr>
-          <p:cNvPr id="24" name="Shape 22"/>
-          <p:cNvSpPr/>
-          <p:nvPr/>
-        </p:nvSpPr>
-        <p:spPr>
-          <a:xfrm>
-            <a:off x="5806440" y="2176272"/>
-            <a:ext cx="365760" cy="365760"/>
-          </a:xfrm>
-          <a:prstGeom prst="ellipse">
-            <a:avLst/>
-          </a:prstGeom>
-          <a:solidFill>
-            <a:srgbClr val="0891B2"/>
-          </a:solidFill>
-          <a:ln w="12700">
-            <a:solidFill>
-              <a:srgbClr val="0891B2"/>
-            </a:solidFill>
-            <a:prstDash val="solid"/>
-          </a:ln>
-        </p:spPr>
-      </p:sp>
-      <p:sp>
-        <p:nvSpPr>
-          <p:cNvPr id="25" name="Text 23"/>
-          <p:cNvSpPr txBox="1"/>
-          <p:nvPr/>
-        </p:nvSpPr>
-        <p:spPr>
-          <a:xfrm>
-            <a:off x="5806440" y="2176272"/>
-            <a:ext cx="365760" cy="365760"/>
-          </a:xfrm>
-          <a:prstGeom prst="rect">
-            <a:avLst/>
-          </a:prstGeom>
-          <a:noFill/>
-          <a:ln/>
-        </p:spPr>
-        <p:txBody>
-          <a:bodyPr wrap="square" lIns="0" tIns="0" rIns="0" bIns="0" rtlCol="0" anchor="ctr">
-            <a:normAutofit/>
-          </a:bodyPr>
-          <a:lstStyle/>
-          <a:p>
-            <a:pPr marL="0" indent="0" algn="ctr">
-              <a:lnSpc>
-                <a:spcPct val="100000"/>
-              </a:lnSpc>
-              <a:buNone/>
-            </a:pPr>
-            <a:r>
-              <a:rPr lang="en-US" sz="1300" b="1" dirty="0">
-                <a:solidFill>
-                  <a:srgbClr val="FFFFFF"/>
-                </a:solidFill>
-                <a:latin typeface="Microsoft JhengHei" pitchFamily="34" charset="0"/>
-                <a:ea typeface="Microsoft JhengHei" pitchFamily="34" charset="-122"/>
-                <a:cs typeface="Microsoft JhengHei" pitchFamily="34" charset="-120"/>
-              </a:rPr>
-              <a:t>3</a:t>
-            </a:r>
-            <a:endParaRPr lang="en-US" sz="1300" dirty="0"/>
-          </a:p>
-        </p:txBody>
-      </p:sp>
-      <p:sp>
-        <p:nvSpPr>
-          <p:cNvPr id="26" name="Text 24"/>
-          <p:cNvSpPr txBox="1"/>
-          <p:nvPr/>
-        </p:nvSpPr>
-        <p:spPr>
-          <a:xfrm>
-            <a:off x="5230368" y="2660904"/>
-            <a:ext cx="1563624" cy="201168"/>
-          </a:xfrm>
-          <a:prstGeom prst="rect">
-            <a:avLst/>
-          </a:prstGeom>
-          <a:noFill/>
-          <a:ln/>
-        </p:spPr>
-        <p:txBody>
-          <a:bodyPr wrap="square" lIns="254" tIns="254" rIns="254" bIns="254" rtlCol="0" anchor="ctr">
-            <a:normAutofit/>
-          </a:bodyPr>
-          <a:lstStyle/>
-          <a:p>
-            <a:pPr marL="0" indent="0" algn="ctr">
-              <a:lnSpc>
-                <a:spcPct val="100000"/>
-              </a:lnSpc>
-              <a:buNone/>
-            </a:pPr>
-            <a:r>
-              <a:rPr lang="en-US" sz="1240" b="1" dirty="0">
-                <a:solidFill>
-                  <a:srgbClr val="122033"/>
-                </a:solidFill>
-                <a:latin typeface="Microsoft JhengHei" pitchFamily="34" charset="0"/>
-                <a:ea typeface="Microsoft JhengHei" pitchFamily="34" charset="-122"/>
-                <a:cs typeface="Microsoft JhengHei" pitchFamily="34" charset="-120"/>
-              </a:rPr>
-              <a:t>Authorization</a:t>
-            </a:r>
-            <a:endParaRPr lang="en-US" sz="1240" dirty="0"/>
-          </a:p>
-        </p:txBody>
-      </p:sp>
-      <p:sp>
-        <p:nvSpPr>
-          <p:cNvPr id="27" name="Text 25"/>
-          <p:cNvSpPr txBox="1"/>
-          <p:nvPr/>
-        </p:nvSpPr>
-        <p:spPr>
-          <a:xfrm>
-            <a:off x="5230368" y="2944368"/>
-            <a:ext cx="1563624" cy="210312"/>
-          </a:xfrm>
-          <a:prstGeom prst="rect">
-            <a:avLst/>
-          </a:prstGeom>
-          <a:noFill/>
-          <a:ln/>
-        </p:spPr>
-        <p:txBody>
-          <a:bodyPr wrap="square" lIns="254" tIns="254" rIns="254" bIns="254" rtlCol="0" anchor="ctr">
-            <a:normAutofit/>
-          </a:bodyPr>
-          <a:lstStyle/>
-          <a:p>
-            <a:pPr marL="0" indent="0" algn="ctr">
-              <a:lnSpc>
-                <a:spcPct val="100000"/>
-              </a:lnSpc>
-              <a:buNone/>
-            </a:pPr>
-            <a:r>
-              <a:rPr lang="en-US" sz="880" dirty="0">
-                <a:solidFill>
-                  <a:srgbClr val="5C6B82"/>
-                </a:solidFill>
-                <a:latin typeface="Microsoft JhengHei" pitchFamily="34" charset="0"/>
-                <a:ea typeface="Microsoft JhengHei" pitchFamily="34" charset="-122"/>
-                <a:cs typeface="Microsoft JhengHei" pitchFamily="34" charset="-120"/>
-              </a:rPr>
-              <a:t>Bearer token</a:t>
-            </a:r>
-            <a:endParaRPr lang="en-US" sz="880" dirty="0"/>
-          </a:p>
-        </p:txBody>
-      </p:sp>
-      <p:sp>
-        <p:nvSpPr>
-          <p:cNvPr id="28" name="Shape 26"/>
-          <p:cNvSpPr/>
-          <p:nvPr/>
-        </p:nvSpPr>
-        <p:spPr>
-          <a:xfrm>
-            <a:off x="6986016" y="2606040"/>
-            <a:ext cx="237744" cy="91440"/>
-          </a:xfrm>
-          <a:prstGeom prst="rightArrow">
-            <a:avLst/>
-          </a:prstGeom>
-          <a:solidFill>
-            <a:srgbClr val="D7E0EB"/>
-          </a:solidFill>
-          <a:ln w="12700">
-            <a:solidFill>
-              <a:srgbClr val="D7E0EB"/>
-            </a:solidFill>
-            <a:prstDash val="solid"/>
-          </a:ln>
-        </p:spPr>
-      </p:sp>
-      <p:sp>
-        <p:nvSpPr>
-          <p:cNvPr id="29" name="Shape 27"/>
-          <p:cNvSpPr/>
-          <p:nvPr/>
-        </p:nvSpPr>
-        <p:spPr>
-          <a:xfrm>
-            <a:off x="7370064" y="2011680"/>
-            <a:ext cx="1783080" cy="1316736"/>
-          </a:xfrm>
-          <a:prstGeom prst="roundRect">
-            <a:avLst>
-              <a:gd name="adj" fmla="val 8333"/>
-            </a:avLst>
-          </a:prstGeom>
-          <a:solidFill>
-            <a:srgbClr val="FFFFFF"/>
-          </a:solidFill>
-          <a:ln w="10160">
-            <a:solidFill>
-              <a:srgbClr val="D97706"/>
-            </a:solidFill>
-            <a:prstDash val="solid"/>
-          </a:ln>
-        </p:spPr>
-      </p:sp>
-      <p:sp>
-        <p:nvSpPr>
-          <p:cNvPr id="30" name="Shape 28"/>
-          <p:cNvSpPr/>
-          <p:nvPr/>
-        </p:nvSpPr>
-        <p:spPr>
-          <a:xfrm>
-            <a:off x="8055864" y="2176272"/>
-            <a:ext cx="365760" cy="365760"/>
-          </a:xfrm>
-          <a:prstGeom prst="ellipse">
-            <a:avLst/>
-          </a:prstGeom>
-          <a:solidFill>
-            <a:srgbClr val="D97706"/>
-          </a:solidFill>
-          <a:ln w="12700">
-            <a:solidFill>
-              <a:srgbClr val="D97706"/>
-            </a:solidFill>
-            <a:prstDash val="solid"/>
-          </a:ln>
-        </p:spPr>
-      </p:sp>
-      <p:sp>
-        <p:nvSpPr>
-          <p:cNvPr id="31" name="Text 29"/>
-          <p:cNvSpPr txBox="1"/>
-          <p:nvPr/>
-        </p:nvSpPr>
-        <p:spPr>
-          <a:xfrm>
-            <a:off x="8055864" y="2176272"/>
-            <a:ext cx="365760" cy="365760"/>
-          </a:xfrm>
-          <a:prstGeom prst="rect">
-            <a:avLst/>
-          </a:prstGeom>
-          <a:noFill/>
-          <a:ln/>
-        </p:spPr>
-        <p:txBody>
-          <a:bodyPr wrap="square" lIns="0" tIns="0" rIns="0" bIns="0" rtlCol="0" anchor="ctr">
-            <a:normAutofit/>
-          </a:bodyPr>
-          <a:lstStyle/>
-          <a:p>
-            <a:pPr marL="0" indent="0" algn="ctr">
-              <a:lnSpc>
-                <a:spcPct val="100000"/>
-              </a:lnSpc>
-              <a:buNone/>
-            </a:pPr>
-            <a:r>
-              <a:rPr lang="en-US" sz="1300" b="1" dirty="0">
-                <a:solidFill>
-                  <a:srgbClr val="FFFFFF"/>
-                </a:solidFill>
-                <a:latin typeface="Microsoft JhengHei" pitchFamily="34" charset="0"/>
-                <a:ea typeface="Microsoft JhengHei" pitchFamily="34" charset="-122"/>
-                <a:cs typeface="Microsoft JhengHei" pitchFamily="34" charset="-120"/>
-              </a:rPr>
-              <a:t>4</a:t>
-            </a:r>
-            <a:endParaRPr lang="en-US" sz="1300" dirty="0"/>
-          </a:p>
-        </p:txBody>
-      </p:sp>
-      <p:sp>
-        <p:nvSpPr>
-          <p:cNvPr id="32" name="Text 30"/>
-          <p:cNvSpPr txBox="1"/>
-          <p:nvPr/>
-        </p:nvSpPr>
-        <p:spPr>
-          <a:xfrm>
-            <a:off x="7479792" y="2660904"/>
-            <a:ext cx="1563624" cy="201168"/>
-          </a:xfrm>
-          <a:prstGeom prst="rect">
-            <a:avLst/>
-          </a:prstGeom>
-          <a:noFill/>
-          <a:ln/>
-        </p:spPr>
-        <p:txBody>
-          <a:bodyPr wrap="square" lIns="254" tIns="254" rIns="254" bIns="254" rtlCol="0" anchor="ctr">
-            <a:normAutofit/>
-          </a:bodyPr>
-          <a:lstStyle/>
-          <a:p>
-            <a:pPr marL="0" indent="0" algn="ctr">
-              <a:lnSpc>
-                <a:spcPct val="100000"/>
-              </a:lnSpc>
-              <a:buNone/>
-            </a:pPr>
-            <a:r>
-              <a:rPr lang="en-US" sz="1240" b="1" dirty="0">
-                <a:solidFill>
-                  <a:srgbClr val="122033"/>
-                </a:solidFill>
-                <a:latin typeface="Microsoft JhengHei" pitchFamily="34" charset="0"/>
-                <a:ea typeface="Microsoft JhengHei" pitchFamily="34" charset="-122"/>
-                <a:cs typeface="Microsoft JhengHei" pitchFamily="34" charset="-120"/>
-              </a:rPr>
-              <a:t>Security Filter</a:t>
-            </a:r>
-            <a:endParaRPr lang="en-US" sz="1240" dirty="0"/>
-          </a:p>
-        </p:txBody>
-      </p:sp>
-      <p:sp>
-        <p:nvSpPr>
-          <p:cNvPr id="33" name="Text 31"/>
-          <p:cNvSpPr txBox="1"/>
-          <p:nvPr/>
-        </p:nvSpPr>
-        <p:spPr>
-          <a:xfrm>
-            <a:off x="7479792" y="2944368"/>
-            <a:ext cx="1563624" cy="210312"/>
-          </a:xfrm>
-          <a:prstGeom prst="rect">
-            <a:avLst/>
-          </a:prstGeom>
-          <a:noFill/>
-          <a:ln/>
-        </p:spPr>
-        <p:txBody>
-          <a:bodyPr wrap="square" lIns="254" tIns="254" rIns="254" bIns="254" rtlCol="0" anchor="ctr">
-            <a:normAutofit/>
-          </a:bodyPr>
-          <a:lstStyle/>
-          <a:p>
-            <a:pPr marL="0" indent="0" algn="ctr">
-              <a:lnSpc>
-                <a:spcPct val="100000"/>
-              </a:lnSpc>
-              <a:buNone/>
-            </a:pPr>
-            <a:r>
-              <a:rPr lang="en-US" sz="880" dirty="0">
-                <a:solidFill>
-                  <a:srgbClr val="5C6B82"/>
-                </a:solidFill>
-                <a:latin typeface="Microsoft JhengHei" pitchFamily="34" charset="0"/>
-                <a:ea typeface="Microsoft JhengHei" pitchFamily="34" charset="-122"/>
-                <a:cs typeface="Microsoft JhengHei" pitchFamily="34" charset="-120"/>
-              </a:rPr>
-              <a:t>驗簽 · 到期 · 狀態</a:t>
-            </a:r>
-            <a:endParaRPr lang="en-US" sz="880" dirty="0"/>
-          </a:p>
-        </p:txBody>
-      </p:sp>
-      <p:sp>
-        <p:nvSpPr>
-          <p:cNvPr id="34" name="Shape 32"/>
-          <p:cNvSpPr/>
-          <p:nvPr/>
-        </p:nvSpPr>
-        <p:spPr>
-          <a:xfrm>
-            <a:off x="9235440" y="2606040"/>
-            <a:ext cx="237744" cy="91440"/>
-          </a:xfrm>
-          <a:prstGeom prst="rightArrow">
-            <a:avLst/>
-          </a:prstGeom>
-          <a:solidFill>
-            <a:srgbClr val="D7E0EB"/>
-          </a:solidFill>
-          <a:ln w="12700">
-            <a:solidFill>
-              <a:srgbClr val="D7E0EB"/>
-            </a:solidFill>
-            <a:prstDash val="solid"/>
-          </a:ln>
-        </p:spPr>
-      </p:sp>
-      <p:sp>
-        <p:nvSpPr>
-          <p:cNvPr id="35" name="Shape 33"/>
-          <p:cNvSpPr/>
-          <p:nvPr/>
-        </p:nvSpPr>
-        <p:spPr>
-          <a:xfrm>
-            <a:off x="9619488" y="2011680"/>
-            <a:ext cx="1783080" cy="1316736"/>
-          </a:xfrm>
-          <a:prstGeom prst="roundRect">
-            <a:avLst>
-              <a:gd name="adj" fmla="val 8333"/>
-            </a:avLst>
-          </a:prstGeom>
-          <a:solidFill>
-            <a:srgbClr val="FFFFFF"/>
-          </a:solidFill>
-          <a:ln w="10160">
-            <a:solidFill>
-              <a:srgbClr val="059669"/>
-            </a:solidFill>
-            <a:prstDash val="solid"/>
-          </a:ln>
-        </p:spPr>
-      </p:sp>
-      <p:sp>
-        <p:nvSpPr>
-          <p:cNvPr id="36" name="Shape 34"/>
-          <p:cNvSpPr/>
-          <p:nvPr/>
-        </p:nvSpPr>
-        <p:spPr>
-          <a:xfrm>
-            <a:off x="10305288" y="2176272"/>
-            <a:ext cx="365760" cy="365760"/>
-          </a:xfrm>
-          <a:prstGeom prst="ellipse">
-            <a:avLst/>
-          </a:prstGeom>
-          <a:solidFill>
-            <a:srgbClr val="059669"/>
-          </a:solidFill>
-          <a:ln w="12700">
-            <a:solidFill>
-              <a:srgbClr val="059669"/>
-            </a:solidFill>
-            <a:prstDash val="solid"/>
-          </a:ln>
-        </p:spPr>
-      </p:sp>
-      <p:sp>
-        <p:nvSpPr>
-          <p:cNvPr id="37" name="Text 35"/>
-          <p:cNvSpPr txBox="1"/>
-          <p:nvPr/>
-        </p:nvSpPr>
-        <p:spPr>
-          <a:xfrm>
-            <a:off x="10305288" y="2176272"/>
-            <a:ext cx="365760" cy="365760"/>
-          </a:xfrm>
-          <a:prstGeom prst="rect">
-            <a:avLst/>
-          </a:prstGeom>
-          <a:noFill/>
-          <a:ln/>
-        </p:spPr>
-        <p:txBody>
-          <a:bodyPr wrap="square" lIns="0" tIns="0" rIns="0" bIns="0" rtlCol="0" anchor="ctr">
-            <a:normAutofit/>
-          </a:bodyPr>
-          <a:lstStyle/>
-          <a:p>
-            <a:pPr marL="0" indent="0" algn="ctr">
-              <a:lnSpc>
-                <a:spcPct val="100000"/>
-              </a:lnSpc>
-              <a:buNone/>
-            </a:pPr>
-            <a:r>
-              <a:rPr lang="en-US" sz="1300" b="1" dirty="0">
-                <a:solidFill>
-                  <a:srgbClr val="FFFFFF"/>
-                </a:solidFill>
-                <a:latin typeface="Microsoft JhengHei" pitchFamily="34" charset="0"/>
-                <a:ea typeface="Microsoft JhengHei" pitchFamily="34" charset="-122"/>
-                <a:cs typeface="Microsoft JhengHei" pitchFamily="34" charset="-120"/>
-              </a:rPr>
-              <a:t>5</a:t>
-            </a:r>
-            <a:endParaRPr lang="en-US" sz="1300" dirty="0"/>
-          </a:p>
-        </p:txBody>
-      </p:sp>
-      <p:sp>
-        <p:nvSpPr>
-          <p:cNvPr id="38" name="Text 36"/>
-          <p:cNvSpPr txBox="1"/>
-          <p:nvPr/>
-        </p:nvSpPr>
-        <p:spPr>
-          <a:xfrm>
-            <a:off x="9729216" y="2660904"/>
-            <a:ext cx="1563624" cy="201168"/>
-          </a:xfrm>
-          <a:prstGeom prst="rect">
-            <a:avLst/>
-          </a:prstGeom>
-          <a:noFill/>
-          <a:ln/>
-        </p:spPr>
-        <p:txBody>
-          <a:bodyPr wrap="square" lIns="254" tIns="254" rIns="254" bIns="254" rtlCol="0" anchor="ctr">
-            <a:normAutofit/>
-          </a:bodyPr>
-          <a:lstStyle/>
-          <a:p>
-            <a:pPr marL="0" indent="0" algn="ctr">
-              <a:lnSpc>
-                <a:spcPct val="100000"/>
-              </a:lnSpc>
-              <a:buNone/>
-            </a:pPr>
-            <a:r>
-              <a:rPr lang="en-US" sz="1240" b="1" dirty="0">
-                <a:solidFill>
-                  <a:srgbClr val="122033"/>
-                </a:solidFill>
-                <a:latin typeface="Microsoft JhengHei" pitchFamily="34" charset="0"/>
-                <a:ea typeface="Microsoft JhengHei" pitchFamily="34" charset="-122"/>
-                <a:cs typeface="Microsoft JhengHei" pitchFamily="34" charset="-120"/>
-              </a:rPr>
-              <a:t>Platform Modules</a:t>
-            </a:r>
-            <a:endParaRPr lang="en-US" sz="1240" dirty="0"/>
-          </a:p>
-        </p:txBody>
-      </p:sp>
-      <p:sp>
-        <p:nvSpPr>
-          <p:cNvPr id="39" name="Text 37"/>
-          <p:cNvSpPr txBox="1"/>
-          <p:nvPr/>
-        </p:nvSpPr>
-        <p:spPr>
-          <a:xfrm>
-            <a:off x="9729216" y="2944368"/>
-            <a:ext cx="1563624" cy="210312"/>
-          </a:xfrm>
-          <a:prstGeom prst="rect">
-            <a:avLst/>
-          </a:prstGeom>
-          <a:noFill/>
-          <a:ln/>
-        </p:spPr>
-        <p:txBody>
-          <a:bodyPr wrap="square" lIns="254" tIns="254" rIns="254" bIns="254" rtlCol="0" anchor="ctr">
-            <a:normAutofit/>
-          </a:bodyPr>
-          <a:lstStyle/>
-          <a:p>
-            <a:pPr marL="0" indent="0" algn="ctr">
-              <a:lnSpc>
-                <a:spcPct val="100000"/>
-              </a:lnSpc>
-              <a:buNone/>
-            </a:pPr>
-            <a:r>
-              <a:rPr lang="en-US" sz="880" dirty="0">
-                <a:solidFill>
-                  <a:srgbClr val="5C6B82"/>
-                </a:solidFill>
-                <a:latin typeface="Microsoft JhengHei" pitchFamily="34" charset="0"/>
-                <a:ea typeface="Microsoft JhengHei" pitchFamily="34" charset="-122"/>
-                <a:cs typeface="Microsoft JhengHei" pitchFamily="34" charset="-120"/>
-              </a:rPr>
-              <a:t>User · Board · Lobby · Games</a:t>
-            </a:r>
-            <a:endParaRPr lang="en-US" sz="880" dirty="0"/>
-          </a:p>
-        </p:txBody>
-      </p:sp>
-      <p:sp>
-        <p:nvSpPr>
-          <p:cNvPr id="40" name="Shape 38"/>
-          <p:cNvSpPr/>
-          <p:nvPr/>
-        </p:nvSpPr>
-        <p:spPr>
-          <a:xfrm>
-            <a:off x="1591056" y="4526280"/>
-            <a:ext cx="9006840" cy="731520"/>
-          </a:xfrm>
-          <a:prstGeom prst="roundRect">
-            <a:avLst>
-              <a:gd name="adj" fmla="val 15000"/>
-            </a:avLst>
-          </a:prstGeom>
-          <a:solidFill>
-            <a:srgbClr val="FBFDFF"/>
-          </a:solidFill>
-          <a:ln w="13970">
-            <a:solidFill>
-              <a:srgbClr val="0891B2"/>
-            </a:solidFill>
-            <a:prstDash val="solid"/>
-          </a:ln>
-        </p:spPr>
-      </p:sp>
-      <p:sp>
-        <p:nvSpPr>
-          <p:cNvPr id="41" name="Shape 39"/>
-          <p:cNvSpPr/>
-          <p:nvPr/>
-        </p:nvSpPr>
-        <p:spPr>
-          <a:xfrm>
-            <a:off x="1591056" y="4526280"/>
-            <a:ext cx="73152" cy="731520"/>
-          </a:xfrm>
-          <a:prstGeom prst="rect">
-            <a:avLst/>
-          </a:prstGeom>
-          <a:solidFill>
-            <a:srgbClr val="0891B2"/>
-          </a:solidFill>
-          <a:ln w="12700">
-            <a:solidFill>
-              <a:srgbClr val="0891B2"/>
-            </a:solidFill>
-            <a:prstDash val="solid"/>
-          </a:ln>
-        </p:spPr>
-      </p:sp>
-      <p:sp>
-        <p:nvSpPr>
-          <p:cNvPr id="42" name="Text 40"/>
-          <p:cNvSpPr txBox="1"/>
-          <p:nvPr/>
-        </p:nvSpPr>
-        <p:spPr>
-          <a:xfrm>
-            <a:off x="1819656" y="4654296"/>
-            <a:ext cx="8641080" cy="502920"/>
-          </a:xfrm>
-          <a:prstGeom prst="rect">
-            <a:avLst/>
-          </a:prstGeom>
-          <a:noFill/>
-          <a:ln/>
-        </p:spPr>
-        <p:txBody>
-          <a:bodyPr wrap="square" lIns="254" tIns="254" rIns="254" bIns="254" rtlCol="0" anchor="ctr">
-            <a:normAutofit/>
-          </a:bodyPr>
-          <a:lstStyle/>
-          <a:p>
-            <a:pPr marL="0" indent="0" algn="l">
-              <a:lnSpc>
-                <a:spcPct val="100000"/>
-              </a:lnSpc>
-              <a:buNone/>
-            </a:pPr>
-            <a:r>
-              <a:rPr lang="en-US" sz="1250" b="1" dirty="0">
-                <a:solidFill>
-                  <a:srgbClr val="122033"/>
-                </a:solidFill>
-                <a:latin typeface="Microsoft JhengHei" pitchFamily="34" charset="0"/>
-                <a:ea typeface="Microsoft JhengHei" pitchFamily="34" charset="-122"/>
-                <a:cs typeface="Microsoft JhengHei" pitchFamily="34" charset="-120"/>
-              </a:rPr>
-              <a:t>localStorage 只保存資料；真正能不能操作，仍以後端驗證結果為準。</a:t>
-            </a:r>
-            <a:endParaRPr lang="en-US" sz="1250" dirty="0"/>
-          </a:p>
-        </p:txBody>
-      </p:sp>
-      <p:sp>
-        <p:nvSpPr>
-          <p:cNvPr id="43" name="Text 8"/>
-          <p:cNvSpPr txBox="1"/>
-          <p:nvPr/>
-        </p:nvSpPr>
-        <p:spPr>
-          <a:xfrm>
-            <a:off x="11201400" y="6492240"/>
-            <a:ext cx="411480" cy="182880"/>
-          </a:xfrm>
-          <a:prstGeom prst="rect">
-            <a:avLst/>
-          </a:prstGeom>
-          <a:noFill/>
-          <a:ln/>
-        </p:spPr>
-        <p:txBody>
-          <a:bodyPr wrap="square" lIns="0" tIns="0" rIns="0" bIns="0" rtlCol="0" anchor="ctr">
-            <a:normAutofit/>
-          </a:bodyPr>
-          <a:lstStyle/>
-          <a:p>
-            <a:pPr marL="0" indent="0" algn="r">
-              <a:lnSpc>
-                <a:spcPct val="100000"/>
-              </a:lnSpc>
-              <a:buNone/>
-            </a:pPr>
-            <a:r>
-              <a:rPr lang="en-US" sz="900" dirty="0" smtClean="0"/>
-              <a:t>12</a:t>
-            </a:r>
-            <a:endParaRPr lang="en-US" sz="900" dirty="0"/>
-          </a:p>
-        </p:txBody>
-      </p:sp>
-    </p:spTree>
   </p:cSld>
   <p:clrMapOvr>
     <a:masterClrMapping/>
@@ -24944,10 +25628,10 @@
                 <a:ea typeface="Microsoft JhengHei" pitchFamily="34" charset="-122"/>
                 <a:cs typeface="Microsoft JhengHei" pitchFamily="34" charset="-120"/>
               </a:rPr>
-              <a:t>從資料庫讀取遊戲</a:t>
-            </a:r>
-            <a:r>
-              <a:rPr lang="zh-TW" altLang="en-US" sz="1250" b="1" dirty="0" smtClean="0">
+              <a:t>從資料庫讀取遊戲路徑</a:t>
+            </a:r>
+            <a:r>
+              <a:rPr lang="en-US" altLang="zh-TW" sz="1250" b="1" dirty="0" smtClean="0">
                 <a:solidFill>
                   <a:srgbClr val="122033"/>
                 </a:solidFill>
@@ -24955,10 +25639,10 @@
                 <a:ea typeface="Microsoft JhengHei" pitchFamily="34" charset="-122"/>
                 <a:cs typeface="Microsoft JhengHei" pitchFamily="34" charset="-120"/>
               </a:rPr>
-              <a:t>路徑</a:t>
-            </a:r>
-            <a:r>
-              <a:rPr lang="en-US" altLang="zh-TW" sz="1250" b="1" dirty="0" smtClean="0">
+              <a:t>	 =&gt;        </a:t>
+            </a:r>
+            <a:r>
+              <a:rPr lang="en-US" sz="1250" b="1" dirty="0" err="1" smtClean="0">
                 <a:solidFill>
                   <a:srgbClr val="122033"/>
                 </a:solidFill>
@@ -24966,10 +25650,10 @@
                 <a:ea typeface="Microsoft JhengHei" pitchFamily="34" charset="-122"/>
                 <a:cs typeface="Microsoft JhengHei" pitchFamily="34" charset="-120"/>
               </a:rPr>
-              <a:t>	 </a:t>
-            </a:r>
-            <a:r>
-              <a:rPr lang="en-US" altLang="zh-TW" sz="1250" b="1" dirty="0" smtClean="0">
+              <a:t>決定要開啟哪個遊戲頁面</a:t>
+            </a:r>
+            <a:r>
+              <a:rPr lang="en-US" sz="1250" b="1" dirty="0" smtClean="0">
                 <a:solidFill>
                   <a:srgbClr val="122033"/>
                 </a:solidFill>
@@ -24977,40 +25661,7 @@
                 <a:ea typeface="Microsoft JhengHei" pitchFamily="34" charset="-122"/>
                 <a:cs typeface="Microsoft JhengHei" pitchFamily="34" charset="-120"/>
               </a:rPr>
-              <a:t>=&gt;        </a:t>
-            </a:r>
-            <a:r>
-              <a:rPr lang="en-US" sz="1250" b="1" dirty="0" err="1" smtClean="0">
-                <a:solidFill>
-                  <a:srgbClr val="122033"/>
-                </a:solidFill>
-                <a:latin typeface="Microsoft JhengHei" pitchFamily="34" charset="0"/>
-                <a:ea typeface="Microsoft JhengHei" pitchFamily="34" charset="-122"/>
-                <a:cs typeface="Microsoft JhengHei" pitchFamily="34" charset="-120"/>
-              </a:rPr>
-              <a:t>決定要開啟哪個遊戲頁面</a:t>
-            </a:r>
-            <a:r>
-              <a:rPr lang="en-US" sz="1250" b="1" dirty="0" smtClean="0">
-                <a:solidFill>
-                  <a:srgbClr val="122033"/>
-                </a:solidFill>
-                <a:latin typeface="Microsoft JhengHei" pitchFamily="34" charset="0"/>
-                <a:ea typeface="Microsoft JhengHei" pitchFamily="34" charset="-122"/>
-                <a:cs typeface="Microsoft JhengHei" pitchFamily="34" charset="-120"/>
-              </a:rPr>
-              <a:t> 	 =&gt;       </a:t>
-            </a:r>
-            <a:r>
-              <a:rPr lang="en-US" sz="1250" b="1" dirty="0" smtClean="0">
-                <a:solidFill>
-                  <a:srgbClr val="122033"/>
-                </a:solidFill>
-                <a:latin typeface="Microsoft JhengHei" pitchFamily="34" charset="0"/>
-                <a:ea typeface="Microsoft JhengHei" pitchFamily="34" charset="-122"/>
-                <a:cs typeface="Microsoft JhengHei" pitchFamily="34" charset="-120"/>
-              </a:rPr>
-              <a:t>room </a:t>
+              <a:t> 	 =&gt;       room </a:t>
             </a:r>
             <a:r>
               <a:rPr lang="en-US" sz="1250" b="1" dirty="0">
@@ -25036,6 +25687,1468 @@
 </file>
 
 <file path=ppt/slides/slide8.xml><?xml version="1.0" encoding="utf-8"?>
+<p:sld xmlns:a="http://schemas.openxmlformats.org/drawingml/2006/main" xmlns:r="http://schemas.openxmlformats.org/officeDocument/2006/relationships" xmlns:p="http://schemas.openxmlformats.org/presentationml/2006/main">
+  <p:cSld name="Slide 9">
+    <p:bg>
+      <p:bgPr>
+        <a:solidFill>
+          <a:srgbClr val="F7F9FC"/>
+        </a:solidFill>
+        <a:effectLst/>
+      </p:bgPr>
+    </p:bg>
+    <p:spTree>
+      <p:nvGrpSpPr>
+        <p:cNvPr id="1" name=""/>
+        <p:cNvGrpSpPr/>
+        <p:nvPr/>
+      </p:nvGrpSpPr>
+      <p:grpSpPr>
+        <a:xfrm>
+          <a:off x="0" y="0"/>
+          <a:ext cx="0" cy="0"/>
+          <a:chOff x="0" y="0"/>
+          <a:chExt cx="0" cy="0"/>
+        </a:xfrm>
+      </p:grpSpPr>
+      <p:sp>
+        <p:nvSpPr>
+          <p:cNvPr id="2" name="Shape 0"/>
+          <p:cNvSpPr/>
+          <p:nvPr/>
+        </p:nvSpPr>
+        <p:spPr>
+          <a:xfrm>
+            <a:off x="10012680" y="0"/>
+            <a:ext cx="2176272" cy="6858000"/>
+          </a:xfrm>
+          <a:prstGeom prst="rect">
+            <a:avLst/>
+          </a:prstGeom>
+          <a:solidFill>
+            <a:srgbClr val="EEF4FF"/>
+          </a:solidFill>
+          <a:ln w="12700">
+            <a:solidFill>
+              <a:srgbClr val="EEF4FF"/>
+            </a:solidFill>
+            <a:prstDash val="solid"/>
+          </a:ln>
+        </p:spPr>
+      </p:sp>
+      <p:sp>
+        <p:nvSpPr>
+          <p:cNvPr id="3" name="Shape 1"/>
+          <p:cNvSpPr/>
+          <p:nvPr/>
+        </p:nvSpPr>
+        <p:spPr>
+          <a:xfrm>
+            <a:off x="10533888" y="0"/>
+            <a:ext cx="1655064" cy="6858000"/>
+          </a:xfrm>
+          <a:prstGeom prst="rect">
+            <a:avLst/>
+          </a:prstGeom>
+          <a:solidFill>
+            <a:srgbClr val="E8FAFF">
+              <a:alpha val="90000"/>
+            </a:srgbClr>
+          </a:solidFill>
+          <a:ln w="12700">
+            <a:solidFill>
+              <a:srgbClr val="E8FAFF"/>
+            </a:solidFill>
+            <a:prstDash val="solid"/>
+          </a:ln>
+        </p:spPr>
+      </p:sp>
+      <p:sp>
+        <p:nvSpPr>
+          <p:cNvPr id="4" name="Text 2"/>
+          <p:cNvSpPr txBox="1"/>
+          <p:nvPr/>
+        </p:nvSpPr>
+        <p:spPr>
+          <a:xfrm>
+            <a:off x="603504" y="347472"/>
+            <a:ext cx="4572000" cy="182880"/>
+          </a:xfrm>
+          <a:prstGeom prst="rect">
+            <a:avLst/>
+          </a:prstGeom>
+          <a:noFill/>
+          <a:ln/>
+        </p:spPr>
+        <p:txBody>
+          <a:bodyPr wrap="square" lIns="0" tIns="0" rIns="0" bIns="0" rtlCol="0" anchor="ctr">
+            <a:normAutofit/>
+          </a:bodyPr>
+          <a:lstStyle/>
+          <a:p>
+            <a:pPr marL="0" indent="0" algn="l">
+              <a:lnSpc>
+                <a:spcPct val="100000"/>
+              </a:lnSpc>
+              <a:buNone/>
+            </a:pPr>
+            <a:r>
+              <a:rPr lang="en-US" sz="950" b="1" dirty="0">
+                <a:solidFill>
+                  <a:srgbClr val="0891B2"/>
+                </a:solidFill>
+                <a:latin typeface="Microsoft JhengHei" pitchFamily="34" charset="0"/>
+                <a:ea typeface="Microsoft JhengHei" pitchFamily="34" charset="-122"/>
+                <a:cs typeface="Microsoft JhengHei" pitchFamily="34" charset="-120"/>
+              </a:rPr>
+              <a:t>AUTHENTICATION FLOW</a:t>
+            </a:r>
+            <a:endParaRPr lang="en-US" sz="950" dirty="0"/>
+          </a:p>
+        </p:txBody>
+      </p:sp>
+      <p:sp>
+        <p:nvSpPr>
+          <p:cNvPr id="5" name="Text 3"/>
+          <p:cNvSpPr txBox="1"/>
+          <p:nvPr/>
+        </p:nvSpPr>
+        <p:spPr>
+          <a:xfrm>
+            <a:off x="603504" y="640080"/>
+            <a:ext cx="10424160" cy="438912"/>
+          </a:xfrm>
+          <a:prstGeom prst="rect">
+            <a:avLst/>
+          </a:prstGeom>
+          <a:noFill/>
+          <a:ln/>
+        </p:spPr>
+        <p:txBody>
+          <a:bodyPr wrap="square" lIns="0" tIns="0" rIns="0" bIns="0" rtlCol="0" anchor="ctr">
+            <a:normAutofit/>
+          </a:bodyPr>
+          <a:lstStyle/>
+          <a:p>
+            <a:pPr marL="0" indent="0" algn="l">
+              <a:lnSpc>
+                <a:spcPct val="100000"/>
+              </a:lnSpc>
+              <a:buNone/>
+            </a:pPr>
+            <a:r>
+              <a:rPr lang="en-US" sz="2400" b="1" dirty="0">
+                <a:solidFill>
+                  <a:srgbClr val="122033"/>
+                </a:solidFill>
+                <a:latin typeface="Microsoft JhengHei" pitchFamily="34" charset="0"/>
+                <a:ea typeface="Microsoft JhengHei" pitchFamily="34" charset="-122"/>
+                <a:cs typeface="Microsoft JhengHei" pitchFamily="34" charset="-120"/>
+              </a:rPr>
+              <a:t>JWT 讓不同頁面共享同一個登入身分</a:t>
+            </a:r>
+            <a:endParaRPr lang="en-US" sz="2400" dirty="0"/>
+          </a:p>
+        </p:txBody>
+      </p:sp>
+      <p:sp>
+        <p:nvSpPr>
+          <p:cNvPr id="6" name="Text 4"/>
+          <p:cNvSpPr txBox="1"/>
+          <p:nvPr/>
+        </p:nvSpPr>
+        <p:spPr>
+          <a:xfrm>
+            <a:off x="612648" y="1143000"/>
+            <a:ext cx="10149840" cy="256032"/>
+          </a:xfrm>
+          <a:prstGeom prst="rect">
+            <a:avLst/>
+          </a:prstGeom>
+          <a:noFill/>
+          <a:ln/>
+        </p:spPr>
+        <p:txBody>
+          <a:bodyPr wrap="square" lIns="0" tIns="0" rIns="0" bIns="0" rtlCol="0" anchor="ctr">
+            <a:normAutofit/>
+          </a:bodyPr>
+          <a:lstStyle/>
+          <a:p>
+            <a:pPr marL="0" indent="0" algn="l">
+              <a:lnSpc>
+                <a:spcPct val="100000"/>
+              </a:lnSpc>
+              <a:buNone/>
+            </a:pPr>
+            <a:r>
+              <a:rPr lang="en-US" sz="1250" dirty="0">
+                <a:solidFill>
+                  <a:srgbClr val="5C6B82"/>
+                </a:solidFill>
+                <a:latin typeface="Microsoft JhengHei" pitchFamily="34" charset="0"/>
+                <a:ea typeface="Microsoft JhengHei" pitchFamily="34" charset="-122"/>
+                <a:cs typeface="Microsoft JhengHei" pitchFamily="34" charset="-120"/>
+              </a:rPr>
+              <a:t>前端保存登入結果；每次受保護請求仍由後端重新驗證 token 與帳號狀態。</a:t>
+            </a:r>
+            <a:endParaRPr lang="en-US" sz="1250" dirty="0"/>
+          </a:p>
+        </p:txBody>
+      </p:sp>
+      <p:sp>
+        <p:nvSpPr>
+          <p:cNvPr id="7" name="Shape 5"/>
+          <p:cNvSpPr/>
+          <p:nvPr/>
+        </p:nvSpPr>
+        <p:spPr>
+          <a:xfrm>
+            <a:off x="603504" y="1508760"/>
+            <a:ext cx="530352" cy="36576"/>
+          </a:xfrm>
+          <a:prstGeom prst="rect">
+            <a:avLst/>
+          </a:prstGeom>
+          <a:solidFill>
+            <a:srgbClr val="0891B2"/>
+          </a:solidFill>
+          <a:ln w="12700">
+            <a:solidFill>
+              <a:srgbClr val="0891B2"/>
+            </a:solidFill>
+            <a:prstDash val="solid"/>
+          </a:ln>
+        </p:spPr>
+      </p:sp>
+      <p:sp>
+        <p:nvSpPr>
+          <p:cNvPr id="8" name="Shape 6"/>
+          <p:cNvSpPr/>
+          <p:nvPr/>
+        </p:nvSpPr>
+        <p:spPr>
+          <a:xfrm>
+            <a:off x="603504" y="6419088"/>
+            <a:ext cx="10991088" cy="0"/>
+          </a:xfrm>
+          <a:prstGeom prst="line">
+            <a:avLst/>
+          </a:prstGeom>
+          <a:noFill/>
+          <a:ln w="8890">
+            <a:solidFill>
+              <a:srgbClr val="E7EDF5"/>
+            </a:solidFill>
+            <a:prstDash val="solid"/>
+          </a:ln>
+        </p:spPr>
+      </p:sp>
+      <p:sp>
+        <p:nvSpPr>
+          <p:cNvPr id="9" name="Text 7"/>
+          <p:cNvSpPr txBox="1"/>
+          <p:nvPr/>
+        </p:nvSpPr>
+        <p:spPr>
+          <a:xfrm>
+            <a:off x="603504" y="6519672"/>
+            <a:ext cx="4114800" cy="146304"/>
+          </a:xfrm>
+          <a:prstGeom prst="rect">
+            <a:avLst/>
+          </a:prstGeom>
+          <a:noFill/>
+          <a:ln/>
+        </p:spPr>
+        <p:txBody>
+          <a:bodyPr wrap="square" lIns="0" tIns="0" rIns="0" bIns="0" rtlCol="0" anchor="ctr">
+            <a:normAutofit/>
+          </a:bodyPr>
+          <a:lstStyle/>
+          <a:p>
+            <a:pPr marL="0" indent="0" algn="l">
+              <a:lnSpc>
+                <a:spcPct val="100000"/>
+              </a:lnSpc>
+              <a:buNone/>
+            </a:pPr>
+            <a:r>
+              <a:rPr lang="en-US" sz="850" b="1" dirty="0">
+                <a:solidFill>
+                  <a:srgbClr val="5C6B82"/>
+                </a:solidFill>
+                <a:latin typeface="Microsoft JhengHei" pitchFamily="34" charset="0"/>
+                <a:ea typeface="Microsoft JhengHei" pitchFamily="34" charset="-122"/>
+                <a:cs typeface="Microsoft JhengHei" pitchFamily="34" charset="-120"/>
+              </a:rPr>
+              <a:t>GAMEPLATFORM · 小組專題成果報告</a:t>
+            </a:r>
+            <a:endParaRPr lang="en-US" sz="850" dirty="0"/>
+          </a:p>
+        </p:txBody>
+      </p:sp>
+      <p:sp>
+        <p:nvSpPr>
+          <p:cNvPr id="11" name="Shape 9"/>
+          <p:cNvSpPr/>
+          <p:nvPr/>
+        </p:nvSpPr>
+        <p:spPr>
+          <a:xfrm>
+            <a:off x="621792" y="2011680"/>
+            <a:ext cx="1783080" cy="1316736"/>
+          </a:xfrm>
+          <a:prstGeom prst="roundRect">
+            <a:avLst>
+              <a:gd name="adj" fmla="val 8333"/>
+            </a:avLst>
+          </a:prstGeom>
+          <a:solidFill>
+            <a:srgbClr val="FFFFFF"/>
+          </a:solidFill>
+          <a:ln w="10160">
+            <a:solidFill>
+              <a:srgbClr val="2563EB"/>
+            </a:solidFill>
+            <a:prstDash val="solid"/>
+          </a:ln>
+        </p:spPr>
+      </p:sp>
+      <p:sp>
+        <p:nvSpPr>
+          <p:cNvPr id="12" name="Shape 10"/>
+          <p:cNvSpPr/>
+          <p:nvPr/>
+        </p:nvSpPr>
+        <p:spPr>
+          <a:xfrm>
+            <a:off x="1307592" y="2176272"/>
+            <a:ext cx="365760" cy="365760"/>
+          </a:xfrm>
+          <a:prstGeom prst="ellipse">
+            <a:avLst/>
+          </a:prstGeom>
+          <a:solidFill>
+            <a:srgbClr val="2563EB"/>
+          </a:solidFill>
+          <a:ln w="12700">
+            <a:solidFill>
+              <a:srgbClr val="2563EB"/>
+            </a:solidFill>
+            <a:prstDash val="solid"/>
+          </a:ln>
+        </p:spPr>
+      </p:sp>
+      <p:sp>
+        <p:nvSpPr>
+          <p:cNvPr id="13" name="Text 11"/>
+          <p:cNvSpPr txBox="1"/>
+          <p:nvPr/>
+        </p:nvSpPr>
+        <p:spPr>
+          <a:xfrm>
+            <a:off x="1307592" y="2176272"/>
+            <a:ext cx="365760" cy="365760"/>
+          </a:xfrm>
+          <a:prstGeom prst="rect">
+            <a:avLst/>
+          </a:prstGeom>
+          <a:noFill/>
+          <a:ln/>
+        </p:spPr>
+        <p:txBody>
+          <a:bodyPr wrap="square" lIns="0" tIns="0" rIns="0" bIns="0" rtlCol="0" anchor="ctr">
+            <a:normAutofit/>
+          </a:bodyPr>
+          <a:lstStyle/>
+          <a:p>
+            <a:pPr marL="0" indent="0" algn="ctr">
+              <a:lnSpc>
+                <a:spcPct val="100000"/>
+              </a:lnSpc>
+              <a:buNone/>
+            </a:pPr>
+            <a:r>
+              <a:rPr lang="en-US" sz="1300" b="1" dirty="0">
+                <a:solidFill>
+                  <a:srgbClr val="FFFFFF"/>
+                </a:solidFill>
+                <a:latin typeface="Microsoft JhengHei" pitchFamily="34" charset="0"/>
+                <a:ea typeface="Microsoft JhengHei" pitchFamily="34" charset="-122"/>
+                <a:cs typeface="Microsoft JhengHei" pitchFamily="34" charset="-120"/>
+              </a:rPr>
+              <a:t>1</a:t>
+            </a:r>
+            <a:endParaRPr lang="en-US" sz="1300" dirty="0"/>
+          </a:p>
+        </p:txBody>
+      </p:sp>
+      <p:sp>
+        <p:nvSpPr>
+          <p:cNvPr id="14" name="Text 12"/>
+          <p:cNvSpPr txBox="1"/>
+          <p:nvPr/>
+        </p:nvSpPr>
+        <p:spPr>
+          <a:xfrm>
+            <a:off x="731520" y="2660904"/>
+            <a:ext cx="1563624" cy="201168"/>
+          </a:xfrm>
+          <a:prstGeom prst="rect">
+            <a:avLst/>
+          </a:prstGeom>
+          <a:noFill/>
+          <a:ln/>
+        </p:spPr>
+        <p:txBody>
+          <a:bodyPr wrap="square" lIns="254" tIns="254" rIns="254" bIns="254" rtlCol="0" anchor="ctr">
+            <a:normAutofit/>
+          </a:bodyPr>
+          <a:lstStyle/>
+          <a:p>
+            <a:pPr marL="0" indent="0" algn="ctr">
+              <a:lnSpc>
+                <a:spcPct val="100000"/>
+              </a:lnSpc>
+              <a:buNone/>
+            </a:pPr>
+            <a:r>
+              <a:rPr lang="en-US" sz="1240" b="1" dirty="0">
+                <a:solidFill>
+                  <a:srgbClr val="122033"/>
+                </a:solidFill>
+                <a:latin typeface="Microsoft JhengHei" pitchFamily="34" charset="0"/>
+                <a:ea typeface="Microsoft JhengHei" pitchFamily="34" charset="-122"/>
+                <a:cs typeface="Microsoft JhengHei" pitchFamily="34" charset="-120"/>
+              </a:rPr>
+              <a:t>Login</a:t>
+            </a:r>
+            <a:endParaRPr lang="en-US" sz="1240" dirty="0"/>
+          </a:p>
+        </p:txBody>
+      </p:sp>
+      <p:sp>
+        <p:nvSpPr>
+          <p:cNvPr id="15" name="Text 13"/>
+          <p:cNvSpPr txBox="1"/>
+          <p:nvPr/>
+        </p:nvSpPr>
+        <p:spPr>
+          <a:xfrm>
+            <a:off x="731520" y="2944368"/>
+            <a:ext cx="1563624" cy="210312"/>
+          </a:xfrm>
+          <a:prstGeom prst="rect">
+            <a:avLst/>
+          </a:prstGeom>
+          <a:noFill/>
+          <a:ln/>
+        </p:spPr>
+        <p:txBody>
+          <a:bodyPr wrap="square" lIns="254" tIns="254" rIns="254" bIns="254" rtlCol="0" anchor="ctr">
+            <a:normAutofit/>
+          </a:bodyPr>
+          <a:lstStyle/>
+          <a:p>
+            <a:pPr marL="0" indent="0" algn="ctr">
+              <a:lnSpc>
+                <a:spcPct val="100000"/>
+              </a:lnSpc>
+              <a:buNone/>
+            </a:pPr>
+            <a:r>
+              <a:rPr lang="en-US" sz="880" dirty="0">
+                <a:solidFill>
+                  <a:srgbClr val="5C6B82"/>
+                </a:solidFill>
+                <a:latin typeface="Microsoft JhengHei" pitchFamily="34" charset="0"/>
+                <a:ea typeface="Microsoft JhengHei" pitchFamily="34" charset="-122"/>
+                <a:cs typeface="Microsoft JhengHei" pitchFamily="34" charset="-120"/>
+              </a:rPr>
+              <a:t>account + password</a:t>
+            </a:r>
+            <a:endParaRPr lang="en-US" sz="880" dirty="0"/>
+          </a:p>
+        </p:txBody>
+      </p:sp>
+      <p:sp>
+        <p:nvSpPr>
+          <p:cNvPr id="16" name="Shape 14"/>
+          <p:cNvSpPr/>
+          <p:nvPr/>
+        </p:nvSpPr>
+        <p:spPr>
+          <a:xfrm>
+            <a:off x="2487168" y="2606040"/>
+            <a:ext cx="237744" cy="91440"/>
+          </a:xfrm>
+          <a:prstGeom prst="rightArrow">
+            <a:avLst/>
+          </a:prstGeom>
+          <a:solidFill>
+            <a:srgbClr val="D7E0EB"/>
+          </a:solidFill>
+          <a:ln w="12700">
+            <a:solidFill>
+              <a:srgbClr val="D7E0EB"/>
+            </a:solidFill>
+            <a:prstDash val="solid"/>
+          </a:ln>
+        </p:spPr>
+      </p:sp>
+      <p:sp>
+        <p:nvSpPr>
+          <p:cNvPr id="17" name="Shape 15"/>
+          <p:cNvSpPr/>
+          <p:nvPr/>
+        </p:nvSpPr>
+        <p:spPr>
+          <a:xfrm>
+            <a:off x="2871216" y="2011680"/>
+            <a:ext cx="1783080" cy="1316736"/>
+          </a:xfrm>
+          <a:prstGeom prst="roundRect">
+            <a:avLst>
+              <a:gd name="adj" fmla="val 8333"/>
+            </a:avLst>
+          </a:prstGeom>
+          <a:solidFill>
+            <a:srgbClr val="FFFFFF"/>
+          </a:solidFill>
+          <a:ln w="10160">
+            <a:solidFill>
+              <a:srgbClr val="7C3AED"/>
+            </a:solidFill>
+            <a:prstDash val="solid"/>
+          </a:ln>
+        </p:spPr>
+      </p:sp>
+      <p:sp>
+        <p:nvSpPr>
+          <p:cNvPr id="18" name="Shape 16"/>
+          <p:cNvSpPr/>
+          <p:nvPr/>
+        </p:nvSpPr>
+        <p:spPr>
+          <a:xfrm>
+            <a:off x="3557016" y="2176272"/>
+            <a:ext cx="365760" cy="365760"/>
+          </a:xfrm>
+          <a:prstGeom prst="ellipse">
+            <a:avLst/>
+          </a:prstGeom>
+          <a:solidFill>
+            <a:srgbClr val="7C3AED"/>
+          </a:solidFill>
+          <a:ln w="12700">
+            <a:solidFill>
+              <a:srgbClr val="7C3AED"/>
+            </a:solidFill>
+            <a:prstDash val="solid"/>
+          </a:ln>
+        </p:spPr>
+      </p:sp>
+      <p:sp>
+        <p:nvSpPr>
+          <p:cNvPr id="19" name="Text 17"/>
+          <p:cNvSpPr txBox="1"/>
+          <p:nvPr/>
+        </p:nvSpPr>
+        <p:spPr>
+          <a:xfrm>
+            <a:off x="3557016" y="2176272"/>
+            <a:ext cx="365760" cy="365760"/>
+          </a:xfrm>
+          <a:prstGeom prst="rect">
+            <a:avLst/>
+          </a:prstGeom>
+          <a:noFill/>
+          <a:ln/>
+        </p:spPr>
+        <p:txBody>
+          <a:bodyPr wrap="square" lIns="0" tIns="0" rIns="0" bIns="0" rtlCol="0" anchor="ctr">
+            <a:normAutofit/>
+          </a:bodyPr>
+          <a:lstStyle/>
+          <a:p>
+            <a:pPr marL="0" indent="0" algn="ctr">
+              <a:lnSpc>
+                <a:spcPct val="100000"/>
+              </a:lnSpc>
+              <a:buNone/>
+            </a:pPr>
+            <a:r>
+              <a:rPr lang="en-US" sz="1300" b="1" dirty="0">
+                <a:solidFill>
+                  <a:srgbClr val="FFFFFF"/>
+                </a:solidFill>
+                <a:latin typeface="Microsoft JhengHei" pitchFamily="34" charset="0"/>
+                <a:ea typeface="Microsoft JhengHei" pitchFamily="34" charset="-122"/>
+                <a:cs typeface="Microsoft JhengHei" pitchFamily="34" charset="-120"/>
+              </a:rPr>
+              <a:t>2</a:t>
+            </a:r>
+            <a:endParaRPr lang="en-US" sz="1300" dirty="0"/>
+          </a:p>
+        </p:txBody>
+      </p:sp>
+      <p:sp>
+        <p:nvSpPr>
+          <p:cNvPr id="20" name="Text 18"/>
+          <p:cNvSpPr txBox="1"/>
+          <p:nvPr/>
+        </p:nvSpPr>
+        <p:spPr>
+          <a:xfrm>
+            <a:off x="2980944" y="2660904"/>
+            <a:ext cx="1563624" cy="201168"/>
+          </a:xfrm>
+          <a:prstGeom prst="rect">
+            <a:avLst/>
+          </a:prstGeom>
+          <a:noFill/>
+          <a:ln/>
+        </p:spPr>
+        <p:txBody>
+          <a:bodyPr wrap="square" lIns="254" tIns="254" rIns="254" bIns="254" rtlCol="0" anchor="ctr">
+            <a:normAutofit/>
+          </a:bodyPr>
+          <a:lstStyle/>
+          <a:p>
+            <a:pPr marL="0" indent="0" algn="ctr">
+              <a:lnSpc>
+                <a:spcPct val="100000"/>
+              </a:lnSpc>
+              <a:buNone/>
+            </a:pPr>
+            <a:r>
+              <a:rPr lang="en-US" sz="1240" b="1" dirty="0">
+                <a:solidFill>
+                  <a:srgbClr val="122033"/>
+                </a:solidFill>
+                <a:latin typeface="Microsoft JhengHei" pitchFamily="34" charset="0"/>
+                <a:ea typeface="Microsoft JhengHei" pitchFamily="34" charset="-122"/>
+                <a:cs typeface="Microsoft JhengHei" pitchFamily="34" charset="-120"/>
+              </a:rPr>
+              <a:t>JWT</a:t>
+            </a:r>
+            <a:endParaRPr lang="en-US" sz="1240" dirty="0"/>
+          </a:p>
+        </p:txBody>
+      </p:sp>
+      <p:sp>
+        <p:nvSpPr>
+          <p:cNvPr id="21" name="Text 19"/>
+          <p:cNvSpPr txBox="1"/>
+          <p:nvPr/>
+        </p:nvSpPr>
+        <p:spPr>
+          <a:xfrm>
+            <a:off x="2980944" y="2944368"/>
+            <a:ext cx="1563624" cy="210312"/>
+          </a:xfrm>
+          <a:prstGeom prst="rect">
+            <a:avLst/>
+          </a:prstGeom>
+          <a:noFill/>
+          <a:ln/>
+        </p:spPr>
+        <p:txBody>
+          <a:bodyPr wrap="square" lIns="254" tIns="254" rIns="254" bIns="254" rtlCol="0" anchor="ctr">
+            <a:normAutofit/>
+          </a:bodyPr>
+          <a:lstStyle/>
+          <a:p>
+            <a:pPr marL="0" indent="0" algn="ctr">
+              <a:lnSpc>
+                <a:spcPct val="100000"/>
+              </a:lnSpc>
+              <a:buNone/>
+            </a:pPr>
+            <a:r>
+              <a:rPr lang="en-US" sz="880" dirty="0">
+                <a:solidFill>
+                  <a:srgbClr val="5C6B82"/>
+                </a:solidFill>
+                <a:latin typeface="Microsoft JhengHei" pitchFamily="34" charset="0"/>
+                <a:ea typeface="Microsoft JhengHei" pitchFamily="34" charset="-122"/>
+                <a:cs typeface="Microsoft JhengHei" pitchFamily="34" charset="-120"/>
+              </a:rPr>
+              <a:t>userId · account · role</a:t>
+            </a:r>
+            <a:endParaRPr lang="en-US" sz="880" dirty="0"/>
+          </a:p>
+        </p:txBody>
+      </p:sp>
+      <p:sp>
+        <p:nvSpPr>
+          <p:cNvPr id="22" name="Shape 20"/>
+          <p:cNvSpPr/>
+          <p:nvPr/>
+        </p:nvSpPr>
+        <p:spPr>
+          <a:xfrm>
+            <a:off x="4736592" y="2606040"/>
+            <a:ext cx="237744" cy="91440"/>
+          </a:xfrm>
+          <a:prstGeom prst="rightArrow">
+            <a:avLst/>
+          </a:prstGeom>
+          <a:solidFill>
+            <a:srgbClr val="D7E0EB"/>
+          </a:solidFill>
+          <a:ln w="12700">
+            <a:solidFill>
+              <a:srgbClr val="D7E0EB"/>
+            </a:solidFill>
+            <a:prstDash val="solid"/>
+          </a:ln>
+        </p:spPr>
+      </p:sp>
+      <p:sp>
+        <p:nvSpPr>
+          <p:cNvPr id="23" name="Shape 21"/>
+          <p:cNvSpPr/>
+          <p:nvPr/>
+        </p:nvSpPr>
+        <p:spPr>
+          <a:xfrm>
+            <a:off x="5120640" y="2011680"/>
+            <a:ext cx="1783080" cy="1316736"/>
+          </a:xfrm>
+          <a:prstGeom prst="roundRect">
+            <a:avLst>
+              <a:gd name="adj" fmla="val 8333"/>
+            </a:avLst>
+          </a:prstGeom>
+          <a:solidFill>
+            <a:srgbClr val="FFFFFF"/>
+          </a:solidFill>
+          <a:ln w="10160">
+            <a:solidFill>
+              <a:srgbClr val="0891B2"/>
+            </a:solidFill>
+            <a:prstDash val="solid"/>
+          </a:ln>
+        </p:spPr>
+      </p:sp>
+      <p:sp>
+        <p:nvSpPr>
+          <p:cNvPr id="24" name="Shape 22"/>
+          <p:cNvSpPr/>
+          <p:nvPr/>
+        </p:nvSpPr>
+        <p:spPr>
+          <a:xfrm>
+            <a:off x="5806440" y="2176272"/>
+            <a:ext cx="365760" cy="365760"/>
+          </a:xfrm>
+          <a:prstGeom prst="ellipse">
+            <a:avLst/>
+          </a:prstGeom>
+          <a:solidFill>
+            <a:srgbClr val="0891B2"/>
+          </a:solidFill>
+          <a:ln w="12700">
+            <a:solidFill>
+              <a:srgbClr val="0891B2"/>
+            </a:solidFill>
+            <a:prstDash val="solid"/>
+          </a:ln>
+        </p:spPr>
+      </p:sp>
+      <p:sp>
+        <p:nvSpPr>
+          <p:cNvPr id="25" name="Text 23"/>
+          <p:cNvSpPr txBox="1"/>
+          <p:nvPr/>
+        </p:nvSpPr>
+        <p:spPr>
+          <a:xfrm>
+            <a:off x="5806440" y="2176272"/>
+            <a:ext cx="365760" cy="365760"/>
+          </a:xfrm>
+          <a:prstGeom prst="rect">
+            <a:avLst/>
+          </a:prstGeom>
+          <a:noFill/>
+          <a:ln/>
+        </p:spPr>
+        <p:txBody>
+          <a:bodyPr wrap="square" lIns="0" tIns="0" rIns="0" bIns="0" rtlCol="0" anchor="ctr">
+            <a:normAutofit/>
+          </a:bodyPr>
+          <a:lstStyle/>
+          <a:p>
+            <a:pPr marL="0" indent="0" algn="ctr">
+              <a:lnSpc>
+                <a:spcPct val="100000"/>
+              </a:lnSpc>
+              <a:buNone/>
+            </a:pPr>
+            <a:r>
+              <a:rPr lang="en-US" sz="1300" b="1" dirty="0">
+                <a:solidFill>
+                  <a:srgbClr val="FFFFFF"/>
+                </a:solidFill>
+                <a:latin typeface="Microsoft JhengHei" pitchFamily="34" charset="0"/>
+                <a:ea typeface="Microsoft JhengHei" pitchFamily="34" charset="-122"/>
+                <a:cs typeface="Microsoft JhengHei" pitchFamily="34" charset="-120"/>
+              </a:rPr>
+              <a:t>3</a:t>
+            </a:r>
+            <a:endParaRPr lang="en-US" sz="1300" dirty="0"/>
+          </a:p>
+        </p:txBody>
+      </p:sp>
+      <p:sp>
+        <p:nvSpPr>
+          <p:cNvPr id="26" name="Text 24"/>
+          <p:cNvSpPr txBox="1"/>
+          <p:nvPr/>
+        </p:nvSpPr>
+        <p:spPr>
+          <a:xfrm>
+            <a:off x="5230368" y="2660904"/>
+            <a:ext cx="1563624" cy="201168"/>
+          </a:xfrm>
+          <a:prstGeom prst="rect">
+            <a:avLst/>
+          </a:prstGeom>
+          <a:noFill/>
+          <a:ln/>
+        </p:spPr>
+        <p:txBody>
+          <a:bodyPr wrap="square" lIns="254" tIns="254" rIns="254" bIns="254" rtlCol="0" anchor="ctr">
+            <a:normAutofit/>
+          </a:bodyPr>
+          <a:lstStyle/>
+          <a:p>
+            <a:pPr marL="0" indent="0" algn="ctr">
+              <a:lnSpc>
+                <a:spcPct val="100000"/>
+              </a:lnSpc>
+              <a:buNone/>
+            </a:pPr>
+            <a:r>
+              <a:rPr lang="en-US" sz="1240" b="1" dirty="0">
+                <a:solidFill>
+                  <a:srgbClr val="122033"/>
+                </a:solidFill>
+                <a:latin typeface="Microsoft JhengHei" pitchFamily="34" charset="0"/>
+                <a:ea typeface="Microsoft JhengHei" pitchFamily="34" charset="-122"/>
+                <a:cs typeface="Microsoft JhengHei" pitchFamily="34" charset="-120"/>
+              </a:rPr>
+              <a:t>Authorization</a:t>
+            </a:r>
+            <a:endParaRPr lang="en-US" sz="1240" dirty="0"/>
+          </a:p>
+        </p:txBody>
+      </p:sp>
+      <p:sp>
+        <p:nvSpPr>
+          <p:cNvPr id="27" name="Text 25"/>
+          <p:cNvSpPr txBox="1"/>
+          <p:nvPr/>
+        </p:nvSpPr>
+        <p:spPr>
+          <a:xfrm>
+            <a:off x="5230368" y="2944368"/>
+            <a:ext cx="1563624" cy="210312"/>
+          </a:xfrm>
+          <a:prstGeom prst="rect">
+            <a:avLst/>
+          </a:prstGeom>
+          <a:noFill/>
+          <a:ln/>
+        </p:spPr>
+        <p:txBody>
+          <a:bodyPr wrap="square" lIns="254" tIns="254" rIns="254" bIns="254" rtlCol="0" anchor="ctr">
+            <a:normAutofit/>
+          </a:bodyPr>
+          <a:lstStyle/>
+          <a:p>
+            <a:pPr marL="0" indent="0" algn="ctr">
+              <a:lnSpc>
+                <a:spcPct val="100000"/>
+              </a:lnSpc>
+              <a:buNone/>
+            </a:pPr>
+            <a:r>
+              <a:rPr lang="en-US" sz="880" dirty="0">
+                <a:solidFill>
+                  <a:srgbClr val="5C6B82"/>
+                </a:solidFill>
+                <a:latin typeface="Microsoft JhengHei" pitchFamily="34" charset="0"/>
+                <a:ea typeface="Microsoft JhengHei" pitchFamily="34" charset="-122"/>
+                <a:cs typeface="Microsoft JhengHei" pitchFamily="34" charset="-120"/>
+              </a:rPr>
+              <a:t>Bearer token</a:t>
+            </a:r>
+            <a:endParaRPr lang="en-US" sz="880" dirty="0"/>
+          </a:p>
+        </p:txBody>
+      </p:sp>
+      <p:sp>
+        <p:nvSpPr>
+          <p:cNvPr id="28" name="Shape 26"/>
+          <p:cNvSpPr/>
+          <p:nvPr/>
+        </p:nvSpPr>
+        <p:spPr>
+          <a:xfrm>
+            <a:off x="6986016" y="2606040"/>
+            <a:ext cx="237744" cy="91440"/>
+          </a:xfrm>
+          <a:prstGeom prst="rightArrow">
+            <a:avLst/>
+          </a:prstGeom>
+          <a:solidFill>
+            <a:srgbClr val="D7E0EB"/>
+          </a:solidFill>
+          <a:ln w="12700">
+            <a:solidFill>
+              <a:srgbClr val="D7E0EB"/>
+            </a:solidFill>
+            <a:prstDash val="solid"/>
+          </a:ln>
+        </p:spPr>
+      </p:sp>
+      <p:sp>
+        <p:nvSpPr>
+          <p:cNvPr id="29" name="Shape 27"/>
+          <p:cNvSpPr/>
+          <p:nvPr/>
+        </p:nvSpPr>
+        <p:spPr>
+          <a:xfrm>
+            <a:off x="7370064" y="2011680"/>
+            <a:ext cx="1783080" cy="1316736"/>
+          </a:xfrm>
+          <a:prstGeom prst="roundRect">
+            <a:avLst>
+              <a:gd name="adj" fmla="val 8333"/>
+            </a:avLst>
+          </a:prstGeom>
+          <a:solidFill>
+            <a:srgbClr val="FFFFFF"/>
+          </a:solidFill>
+          <a:ln w="10160">
+            <a:solidFill>
+              <a:srgbClr val="D97706"/>
+            </a:solidFill>
+            <a:prstDash val="solid"/>
+          </a:ln>
+        </p:spPr>
+      </p:sp>
+      <p:sp>
+        <p:nvSpPr>
+          <p:cNvPr id="30" name="Shape 28"/>
+          <p:cNvSpPr/>
+          <p:nvPr/>
+        </p:nvSpPr>
+        <p:spPr>
+          <a:xfrm>
+            <a:off x="8055864" y="2176272"/>
+            <a:ext cx="365760" cy="365760"/>
+          </a:xfrm>
+          <a:prstGeom prst="ellipse">
+            <a:avLst/>
+          </a:prstGeom>
+          <a:solidFill>
+            <a:srgbClr val="D97706"/>
+          </a:solidFill>
+          <a:ln w="12700">
+            <a:solidFill>
+              <a:srgbClr val="D97706"/>
+            </a:solidFill>
+            <a:prstDash val="solid"/>
+          </a:ln>
+        </p:spPr>
+      </p:sp>
+      <p:sp>
+        <p:nvSpPr>
+          <p:cNvPr id="31" name="Text 29"/>
+          <p:cNvSpPr txBox="1"/>
+          <p:nvPr/>
+        </p:nvSpPr>
+        <p:spPr>
+          <a:xfrm>
+            <a:off x="8055864" y="2176272"/>
+            <a:ext cx="365760" cy="365760"/>
+          </a:xfrm>
+          <a:prstGeom prst="rect">
+            <a:avLst/>
+          </a:prstGeom>
+          <a:noFill/>
+          <a:ln/>
+        </p:spPr>
+        <p:txBody>
+          <a:bodyPr wrap="square" lIns="0" tIns="0" rIns="0" bIns="0" rtlCol="0" anchor="ctr">
+            <a:normAutofit/>
+          </a:bodyPr>
+          <a:lstStyle/>
+          <a:p>
+            <a:pPr marL="0" indent="0" algn="ctr">
+              <a:lnSpc>
+                <a:spcPct val="100000"/>
+              </a:lnSpc>
+              <a:buNone/>
+            </a:pPr>
+            <a:r>
+              <a:rPr lang="en-US" sz="1300" b="1" dirty="0">
+                <a:solidFill>
+                  <a:srgbClr val="FFFFFF"/>
+                </a:solidFill>
+                <a:latin typeface="Microsoft JhengHei" pitchFamily="34" charset="0"/>
+                <a:ea typeface="Microsoft JhengHei" pitchFamily="34" charset="-122"/>
+                <a:cs typeface="Microsoft JhengHei" pitchFamily="34" charset="-120"/>
+              </a:rPr>
+              <a:t>4</a:t>
+            </a:r>
+            <a:endParaRPr lang="en-US" sz="1300" dirty="0"/>
+          </a:p>
+        </p:txBody>
+      </p:sp>
+      <p:sp>
+        <p:nvSpPr>
+          <p:cNvPr id="32" name="Text 30"/>
+          <p:cNvSpPr txBox="1"/>
+          <p:nvPr/>
+        </p:nvSpPr>
+        <p:spPr>
+          <a:xfrm>
+            <a:off x="7479792" y="2660904"/>
+            <a:ext cx="1563624" cy="201168"/>
+          </a:xfrm>
+          <a:prstGeom prst="rect">
+            <a:avLst/>
+          </a:prstGeom>
+          <a:noFill/>
+          <a:ln/>
+        </p:spPr>
+        <p:txBody>
+          <a:bodyPr wrap="square" lIns="254" tIns="254" rIns="254" bIns="254" rtlCol="0" anchor="ctr">
+            <a:normAutofit/>
+          </a:bodyPr>
+          <a:lstStyle/>
+          <a:p>
+            <a:pPr marL="0" indent="0" algn="ctr">
+              <a:lnSpc>
+                <a:spcPct val="100000"/>
+              </a:lnSpc>
+              <a:buNone/>
+            </a:pPr>
+            <a:r>
+              <a:rPr lang="en-US" sz="1240" b="1" dirty="0">
+                <a:solidFill>
+                  <a:srgbClr val="122033"/>
+                </a:solidFill>
+                <a:latin typeface="Microsoft JhengHei" pitchFamily="34" charset="0"/>
+                <a:ea typeface="Microsoft JhengHei" pitchFamily="34" charset="-122"/>
+                <a:cs typeface="Microsoft JhengHei" pitchFamily="34" charset="-120"/>
+              </a:rPr>
+              <a:t>Security Filter</a:t>
+            </a:r>
+            <a:endParaRPr lang="en-US" sz="1240" dirty="0"/>
+          </a:p>
+        </p:txBody>
+      </p:sp>
+      <p:sp>
+        <p:nvSpPr>
+          <p:cNvPr id="33" name="Text 31"/>
+          <p:cNvSpPr txBox="1"/>
+          <p:nvPr/>
+        </p:nvSpPr>
+        <p:spPr>
+          <a:xfrm>
+            <a:off x="7479792" y="2944368"/>
+            <a:ext cx="1563624" cy="210312"/>
+          </a:xfrm>
+          <a:prstGeom prst="rect">
+            <a:avLst/>
+          </a:prstGeom>
+          <a:noFill/>
+          <a:ln/>
+        </p:spPr>
+        <p:txBody>
+          <a:bodyPr wrap="square" lIns="254" tIns="254" rIns="254" bIns="254" rtlCol="0" anchor="ctr">
+            <a:normAutofit/>
+          </a:bodyPr>
+          <a:lstStyle/>
+          <a:p>
+            <a:pPr marL="0" indent="0" algn="ctr">
+              <a:lnSpc>
+                <a:spcPct val="100000"/>
+              </a:lnSpc>
+              <a:buNone/>
+            </a:pPr>
+            <a:r>
+              <a:rPr lang="en-US" sz="880" dirty="0">
+                <a:solidFill>
+                  <a:srgbClr val="5C6B82"/>
+                </a:solidFill>
+                <a:latin typeface="Microsoft JhengHei" pitchFamily="34" charset="0"/>
+                <a:ea typeface="Microsoft JhengHei" pitchFamily="34" charset="-122"/>
+                <a:cs typeface="Microsoft JhengHei" pitchFamily="34" charset="-120"/>
+              </a:rPr>
+              <a:t>驗簽 · 到期 · 狀態</a:t>
+            </a:r>
+            <a:endParaRPr lang="en-US" sz="880" dirty="0"/>
+          </a:p>
+        </p:txBody>
+      </p:sp>
+      <p:sp>
+        <p:nvSpPr>
+          <p:cNvPr id="34" name="Shape 32"/>
+          <p:cNvSpPr/>
+          <p:nvPr/>
+        </p:nvSpPr>
+        <p:spPr>
+          <a:xfrm>
+            <a:off x="9235440" y="2606040"/>
+            <a:ext cx="237744" cy="91440"/>
+          </a:xfrm>
+          <a:prstGeom prst="rightArrow">
+            <a:avLst/>
+          </a:prstGeom>
+          <a:solidFill>
+            <a:srgbClr val="D7E0EB"/>
+          </a:solidFill>
+          <a:ln w="12700">
+            <a:solidFill>
+              <a:srgbClr val="D7E0EB"/>
+            </a:solidFill>
+            <a:prstDash val="solid"/>
+          </a:ln>
+        </p:spPr>
+      </p:sp>
+      <p:sp>
+        <p:nvSpPr>
+          <p:cNvPr id="35" name="Shape 33"/>
+          <p:cNvSpPr/>
+          <p:nvPr/>
+        </p:nvSpPr>
+        <p:spPr>
+          <a:xfrm>
+            <a:off x="9619488" y="2011680"/>
+            <a:ext cx="1783080" cy="1316736"/>
+          </a:xfrm>
+          <a:prstGeom prst="roundRect">
+            <a:avLst>
+              <a:gd name="adj" fmla="val 8333"/>
+            </a:avLst>
+          </a:prstGeom>
+          <a:solidFill>
+            <a:srgbClr val="FFFFFF"/>
+          </a:solidFill>
+          <a:ln w="10160">
+            <a:solidFill>
+              <a:srgbClr val="059669"/>
+            </a:solidFill>
+            <a:prstDash val="solid"/>
+          </a:ln>
+        </p:spPr>
+      </p:sp>
+      <p:sp>
+        <p:nvSpPr>
+          <p:cNvPr id="36" name="Shape 34"/>
+          <p:cNvSpPr/>
+          <p:nvPr/>
+        </p:nvSpPr>
+        <p:spPr>
+          <a:xfrm>
+            <a:off x="10305288" y="2176272"/>
+            <a:ext cx="365760" cy="365760"/>
+          </a:xfrm>
+          <a:prstGeom prst="ellipse">
+            <a:avLst/>
+          </a:prstGeom>
+          <a:solidFill>
+            <a:srgbClr val="059669"/>
+          </a:solidFill>
+          <a:ln w="12700">
+            <a:solidFill>
+              <a:srgbClr val="059669"/>
+            </a:solidFill>
+            <a:prstDash val="solid"/>
+          </a:ln>
+        </p:spPr>
+      </p:sp>
+      <p:sp>
+        <p:nvSpPr>
+          <p:cNvPr id="37" name="Text 35"/>
+          <p:cNvSpPr txBox="1"/>
+          <p:nvPr/>
+        </p:nvSpPr>
+        <p:spPr>
+          <a:xfrm>
+            <a:off x="10305288" y="2176272"/>
+            <a:ext cx="365760" cy="365760"/>
+          </a:xfrm>
+          <a:prstGeom prst="rect">
+            <a:avLst/>
+          </a:prstGeom>
+          <a:noFill/>
+          <a:ln/>
+        </p:spPr>
+        <p:txBody>
+          <a:bodyPr wrap="square" lIns="0" tIns="0" rIns="0" bIns="0" rtlCol="0" anchor="ctr">
+            <a:normAutofit/>
+          </a:bodyPr>
+          <a:lstStyle/>
+          <a:p>
+            <a:pPr marL="0" indent="0" algn="ctr">
+              <a:lnSpc>
+                <a:spcPct val="100000"/>
+              </a:lnSpc>
+              <a:buNone/>
+            </a:pPr>
+            <a:r>
+              <a:rPr lang="en-US" sz="1300" b="1" dirty="0">
+                <a:solidFill>
+                  <a:srgbClr val="FFFFFF"/>
+                </a:solidFill>
+                <a:latin typeface="Microsoft JhengHei" pitchFamily="34" charset="0"/>
+                <a:ea typeface="Microsoft JhengHei" pitchFamily="34" charset="-122"/>
+                <a:cs typeface="Microsoft JhengHei" pitchFamily="34" charset="-120"/>
+              </a:rPr>
+              <a:t>5</a:t>
+            </a:r>
+            <a:endParaRPr lang="en-US" sz="1300" dirty="0"/>
+          </a:p>
+        </p:txBody>
+      </p:sp>
+      <p:sp>
+        <p:nvSpPr>
+          <p:cNvPr id="38" name="Text 36"/>
+          <p:cNvSpPr txBox="1"/>
+          <p:nvPr/>
+        </p:nvSpPr>
+        <p:spPr>
+          <a:xfrm>
+            <a:off x="9729216" y="2660904"/>
+            <a:ext cx="1563624" cy="201168"/>
+          </a:xfrm>
+          <a:prstGeom prst="rect">
+            <a:avLst/>
+          </a:prstGeom>
+          <a:noFill/>
+          <a:ln/>
+        </p:spPr>
+        <p:txBody>
+          <a:bodyPr wrap="square" lIns="254" tIns="254" rIns="254" bIns="254" rtlCol="0" anchor="ctr">
+            <a:normAutofit/>
+          </a:bodyPr>
+          <a:lstStyle/>
+          <a:p>
+            <a:pPr marL="0" indent="0" algn="ctr">
+              <a:lnSpc>
+                <a:spcPct val="100000"/>
+              </a:lnSpc>
+              <a:buNone/>
+            </a:pPr>
+            <a:r>
+              <a:rPr lang="en-US" sz="1240" b="1" dirty="0">
+                <a:solidFill>
+                  <a:srgbClr val="122033"/>
+                </a:solidFill>
+                <a:latin typeface="Microsoft JhengHei" pitchFamily="34" charset="0"/>
+                <a:ea typeface="Microsoft JhengHei" pitchFamily="34" charset="-122"/>
+                <a:cs typeface="Microsoft JhengHei" pitchFamily="34" charset="-120"/>
+              </a:rPr>
+              <a:t>Platform Modules</a:t>
+            </a:r>
+            <a:endParaRPr lang="en-US" sz="1240" dirty="0"/>
+          </a:p>
+        </p:txBody>
+      </p:sp>
+      <p:sp>
+        <p:nvSpPr>
+          <p:cNvPr id="39" name="Text 37"/>
+          <p:cNvSpPr txBox="1"/>
+          <p:nvPr/>
+        </p:nvSpPr>
+        <p:spPr>
+          <a:xfrm>
+            <a:off x="9729216" y="2944368"/>
+            <a:ext cx="1563624" cy="210312"/>
+          </a:xfrm>
+          <a:prstGeom prst="rect">
+            <a:avLst/>
+          </a:prstGeom>
+          <a:noFill/>
+          <a:ln/>
+        </p:spPr>
+        <p:txBody>
+          <a:bodyPr wrap="square" lIns="254" tIns="254" rIns="254" bIns="254" rtlCol="0" anchor="ctr">
+            <a:normAutofit/>
+          </a:bodyPr>
+          <a:lstStyle/>
+          <a:p>
+            <a:pPr marL="0" indent="0" algn="ctr">
+              <a:lnSpc>
+                <a:spcPct val="100000"/>
+              </a:lnSpc>
+              <a:buNone/>
+            </a:pPr>
+            <a:r>
+              <a:rPr lang="en-US" sz="880" dirty="0">
+                <a:solidFill>
+                  <a:srgbClr val="5C6B82"/>
+                </a:solidFill>
+                <a:latin typeface="Microsoft JhengHei" pitchFamily="34" charset="0"/>
+                <a:ea typeface="Microsoft JhengHei" pitchFamily="34" charset="-122"/>
+                <a:cs typeface="Microsoft JhengHei" pitchFamily="34" charset="-120"/>
+              </a:rPr>
+              <a:t>User · Board · Lobby · Games</a:t>
+            </a:r>
+            <a:endParaRPr lang="en-US" sz="880" dirty="0"/>
+          </a:p>
+        </p:txBody>
+      </p:sp>
+      <p:sp>
+        <p:nvSpPr>
+          <p:cNvPr id="40" name="Shape 38"/>
+          <p:cNvSpPr/>
+          <p:nvPr/>
+        </p:nvSpPr>
+        <p:spPr>
+          <a:xfrm>
+            <a:off x="1591056" y="4526280"/>
+            <a:ext cx="9006840" cy="731520"/>
+          </a:xfrm>
+          <a:prstGeom prst="roundRect">
+            <a:avLst>
+              <a:gd name="adj" fmla="val 15000"/>
+            </a:avLst>
+          </a:prstGeom>
+          <a:solidFill>
+            <a:srgbClr val="FBFDFF"/>
+          </a:solidFill>
+          <a:ln w="13970">
+            <a:solidFill>
+              <a:srgbClr val="0891B2"/>
+            </a:solidFill>
+            <a:prstDash val="solid"/>
+          </a:ln>
+        </p:spPr>
+      </p:sp>
+      <p:sp>
+        <p:nvSpPr>
+          <p:cNvPr id="41" name="Shape 39"/>
+          <p:cNvSpPr/>
+          <p:nvPr/>
+        </p:nvSpPr>
+        <p:spPr>
+          <a:xfrm>
+            <a:off x="1591056" y="4526280"/>
+            <a:ext cx="73152" cy="731520"/>
+          </a:xfrm>
+          <a:prstGeom prst="rect">
+            <a:avLst/>
+          </a:prstGeom>
+          <a:solidFill>
+            <a:srgbClr val="0891B2"/>
+          </a:solidFill>
+          <a:ln w="12700">
+            <a:solidFill>
+              <a:srgbClr val="0891B2"/>
+            </a:solidFill>
+            <a:prstDash val="solid"/>
+          </a:ln>
+        </p:spPr>
+      </p:sp>
+      <p:sp>
+        <p:nvSpPr>
+          <p:cNvPr id="42" name="Text 40"/>
+          <p:cNvSpPr txBox="1"/>
+          <p:nvPr/>
+        </p:nvSpPr>
+        <p:spPr>
+          <a:xfrm>
+            <a:off x="1819656" y="4654296"/>
+            <a:ext cx="8641080" cy="502920"/>
+          </a:xfrm>
+          <a:prstGeom prst="rect">
+            <a:avLst/>
+          </a:prstGeom>
+          <a:noFill/>
+          <a:ln/>
+        </p:spPr>
+        <p:txBody>
+          <a:bodyPr wrap="square" lIns="254" tIns="254" rIns="254" bIns="254" rtlCol="0" anchor="ctr">
+            <a:normAutofit/>
+          </a:bodyPr>
+          <a:lstStyle/>
+          <a:p>
+            <a:pPr marL="0" indent="0" algn="l">
+              <a:lnSpc>
+                <a:spcPct val="100000"/>
+              </a:lnSpc>
+              <a:buNone/>
+            </a:pPr>
+            <a:r>
+              <a:rPr lang="en-US" sz="1250" b="1" dirty="0">
+                <a:solidFill>
+                  <a:srgbClr val="122033"/>
+                </a:solidFill>
+                <a:latin typeface="Microsoft JhengHei" pitchFamily="34" charset="0"/>
+                <a:ea typeface="Microsoft JhengHei" pitchFamily="34" charset="-122"/>
+                <a:cs typeface="Microsoft JhengHei" pitchFamily="34" charset="-120"/>
+              </a:rPr>
+              <a:t>localStorage 只保存資料；真正能不能操作，仍以後端驗證結果為準。</a:t>
+            </a:r>
+            <a:endParaRPr lang="en-US" sz="1250" dirty="0"/>
+          </a:p>
+        </p:txBody>
+      </p:sp>
+      <p:sp>
+        <p:nvSpPr>
+          <p:cNvPr id="43" name="Text 8"/>
+          <p:cNvSpPr txBox="1"/>
+          <p:nvPr/>
+        </p:nvSpPr>
+        <p:spPr>
+          <a:xfrm>
+            <a:off x="11201400" y="6492240"/>
+            <a:ext cx="411480" cy="182880"/>
+          </a:xfrm>
+          <a:prstGeom prst="rect">
+            <a:avLst/>
+          </a:prstGeom>
+          <a:noFill/>
+          <a:ln/>
+        </p:spPr>
+        <p:txBody>
+          <a:bodyPr wrap="square" lIns="0" tIns="0" rIns="0" bIns="0" rtlCol="0" anchor="ctr">
+            <a:normAutofit/>
+          </a:bodyPr>
+          <a:lstStyle/>
+          <a:p>
+            <a:pPr marL="0" indent="0" algn="r">
+              <a:lnSpc>
+                <a:spcPct val="100000"/>
+              </a:lnSpc>
+              <a:buNone/>
+            </a:pPr>
+            <a:r>
+              <a:rPr lang="en-US" sz="900" dirty="0" smtClean="0"/>
+              <a:t>12</a:t>
+            </a:r>
+            <a:endParaRPr lang="en-US" sz="900" dirty="0"/>
+          </a:p>
+        </p:txBody>
+      </p:sp>
+    </p:spTree>
+  </p:cSld>
+  <p:clrMapOvr>
+    <a:masterClrMapping/>
+  </p:clrMapOvr>
+</p:sld>
+</file>
+
+<file path=ppt/slides/slide9.xml><?xml version="1.0" encoding="utf-8"?>
 <p:sld xmlns:a="http://schemas.openxmlformats.org/drawingml/2006/main" xmlns:r="http://schemas.openxmlformats.org/officeDocument/2006/relationships" xmlns:p="http://schemas.openxmlformats.org/presentationml/2006/main">
   <p:cSld name="Slide 6">
     <p:bg>
@@ -26260,2163 +28373,6 @@
               <a:t>房間只依 gameId / modeId 查規則，不需要把 Poker 或 Quiz 的特殊玩法寫死在通用房間模組。</a:t>
             </a:r>
             <a:endParaRPr lang="en-US" sz="1250" dirty="0"/>
-          </a:p>
-        </p:txBody>
-      </p:sp>
-    </p:spTree>
-  </p:cSld>
-  <p:clrMapOvr>
-    <a:masterClrMapping/>
-  </p:clrMapOvr>
-</p:sld>
-</file>
-
-<file path=ppt/slides/slide9.xml><?xml version="1.0" encoding="utf-8"?>
-<p:sld xmlns:a="http://schemas.openxmlformats.org/drawingml/2006/main" xmlns:r="http://schemas.openxmlformats.org/officeDocument/2006/relationships" xmlns:p="http://schemas.openxmlformats.org/presentationml/2006/main">
-  <p:cSld name="Slide 7">
-    <p:bg>
-      <p:bgPr>
-        <a:solidFill>
-          <a:srgbClr val="F7F9FC"/>
-        </a:solidFill>
-        <a:effectLst/>
-      </p:bgPr>
-    </p:bg>
-    <p:spTree>
-      <p:nvGrpSpPr>
-        <p:cNvPr id="1" name=""/>
-        <p:cNvGrpSpPr/>
-        <p:nvPr/>
-      </p:nvGrpSpPr>
-      <p:grpSpPr>
-        <a:xfrm>
-          <a:off x="0" y="0"/>
-          <a:ext cx="0" cy="0"/>
-          <a:chOff x="0" y="0"/>
-          <a:chExt cx="0" cy="0"/>
-        </a:xfrm>
-      </p:grpSpPr>
-      <p:sp>
-        <p:nvSpPr>
-          <p:cNvPr id="2" name="Shape 0"/>
-          <p:cNvSpPr/>
-          <p:nvPr/>
-        </p:nvSpPr>
-        <p:spPr>
-          <a:xfrm>
-            <a:off x="10012680" y="0"/>
-            <a:ext cx="2176272" cy="6858000"/>
-          </a:xfrm>
-          <a:prstGeom prst="rect">
-            <a:avLst/>
-          </a:prstGeom>
-          <a:solidFill>
-            <a:srgbClr val="EEF4FF"/>
-          </a:solidFill>
-          <a:ln w="12700">
-            <a:solidFill>
-              <a:srgbClr val="EEF4FF"/>
-            </a:solidFill>
-            <a:prstDash val="solid"/>
-          </a:ln>
-        </p:spPr>
-      </p:sp>
-      <p:sp>
-        <p:nvSpPr>
-          <p:cNvPr id="3" name="Shape 1"/>
-          <p:cNvSpPr/>
-          <p:nvPr/>
-        </p:nvSpPr>
-        <p:spPr>
-          <a:xfrm>
-            <a:off x="10533888" y="0"/>
-            <a:ext cx="1655064" cy="6858000"/>
-          </a:xfrm>
-          <a:prstGeom prst="rect">
-            <a:avLst/>
-          </a:prstGeom>
-          <a:solidFill>
-            <a:srgbClr val="E8FAFF">
-              <a:alpha val="90000"/>
-            </a:srgbClr>
-          </a:solidFill>
-          <a:ln w="12700">
-            <a:solidFill>
-              <a:srgbClr val="E8FAFF"/>
-            </a:solidFill>
-            <a:prstDash val="solid"/>
-          </a:ln>
-        </p:spPr>
-      </p:sp>
-      <p:sp>
-        <p:nvSpPr>
-          <p:cNvPr id="4" name="Text 2"/>
-          <p:cNvSpPr txBox="1"/>
-          <p:nvPr/>
-        </p:nvSpPr>
-        <p:spPr>
-          <a:xfrm>
-            <a:off x="603504" y="347472"/>
-            <a:ext cx="4572000" cy="182880"/>
-          </a:xfrm>
-          <a:prstGeom prst="rect">
-            <a:avLst/>
-          </a:prstGeom>
-          <a:noFill/>
-          <a:ln/>
-        </p:spPr>
-        <p:txBody>
-          <a:bodyPr wrap="square" lIns="0" tIns="0" rIns="0" bIns="0" rtlCol="0" anchor="ctr">
-            <a:normAutofit/>
-          </a:bodyPr>
-          <a:lstStyle/>
-          <a:p>
-            <a:pPr marL="0" indent="0" algn="l">
-              <a:lnSpc>
-                <a:spcPct val="100000"/>
-              </a:lnSpc>
-              <a:buNone/>
-            </a:pPr>
-            <a:r>
-              <a:rPr lang="en-US" sz="950" b="1" dirty="0">
-                <a:solidFill>
-                  <a:srgbClr val="0891B2"/>
-                </a:solidFill>
-                <a:latin typeface="Microsoft JhengHei" pitchFamily="34" charset="0"/>
-                <a:ea typeface="Microsoft JhengHei" pitchFamily="34" charset="-122"/>
-                <a:cs typeface="Microsoft JhengHei" pitchFamily="34" charset="-120"/>
-              </a:rPr>
-              <a:t>ER MODEL · CORE</a:t>
-            </a:r>
-            <a:endParaRPr lang="en-US" sz="950" dirty="0"/>
-          </a:p>
-        </p:txBody>
-      </p:sp>
-      <p:sp>
-        <p:nvSpPr>
-          <p:cNvPr id="5" name="Text 3"/>
-          <p:cNvSpPr txBox="1"/>
-          <p:nvPr/>
-        </p:nvSpPr>
-        <p:spPr>
-          <a:xfrm>
-            <a:off x="603504" y="640080"/>
-            <a:ext cx="10424160" cy="438912"/>
-          </a:xfrm>
-          <a:prstGeom prst="rect">
-            <a:avLst/>
-          </a:prstGeom>
-          <a:noFill/>
-          <a:ln/>
-        </p:spPr>
-        <p:txBody>
-          <a:bodyPr wrap="square" lIns="0" tIns="0" rIns="0" bIns="0" rtlCol="0" anchor="ctr">
-            <a:normAutofit/>
-          </a:bodyPr>
-          <a:lstStyle/>
-          <a:p>
-            <a:pPr marL="0" indent="0" algn="l">
-              <a:lnSpc>
-                <a:spcPct val="100000"/>
-              </a:lnSpc>
-              <a:buNone/>
-            </a:pPr>
-            <a:r>
-              <a:rPr lang="en-US" sz="2400" b="1" dirty="0">
-                <a:solidFill>
-                  <a:srgbClr val="122033"/>
-                </a:solidFill>
-                <a:latin typeface="Microsoft JhengHei" pitchFamily="34" charset="0"/>
-                <a:ea typeface="Microsoft JhengHei" pitchFamily="34" charset="-122"/>
-                <a:cs typeface="Microsoft JhengHei" pitchFamily="34" charset="-120"/>
-              </a:rPr>
-              <a:t>核心 ER Model：會員、遊戲目錄與房間</a:t>
-            </a:r>
-            <a:endParaRPr lang="en-US" sz="2400" dirty="0"/>
-          </a:p>
-        </p:txBody>
-      </p:sp>
-      <p:sp>
-        <p:nvSpPr>
-          <p:cNvPr id="6" name="Text 4"/>
-          <p:cNvSpPr txBox="1"/>
-          <p:nvPr/>
-        </p:nvSpPr>
-        <p:spPr>
-          <a:xfrm>
-            <a:off x="612648" y="1143000"/>
-            <a:ext cx="10149840" cy="256032"/>
-          </a:xfrm>
-          <a:prstGeom prst="rect">
-            <a:avLst/>
-          </a:prstGeom>
-          <a:noFill/>
-          <a:ln/>
-        </p:spPr>
-        <p:txBody>
-          <a:bodyPr wrap="square" lIns="0" tIns="0" rIns="0" bIns="0" rtlCol="0" anchor="ctr">
-            <a:normAutofit/>
-          </a:bodyPr>
-          <a:lstStyle/>
-          <a:p>
-            <a:pPr marL="0" indent="0" algn="l">
-              <a:lnSpc>
-                <a:spcPct val="100000"/>
-              </a:lnSpc>
-              <a:buNone/>
-            </a:pPr>
-            <a:r>
-              <a:rPr lang="en-US" sz="1250" dirty="0">
-                <a:solidFill>
-                  <a:srgbClr val="5C6B82"/>
-                </a:solidFill>
-                <a:latin typeface="Microsoft JhengHei" pitchFamily="34" charset="0"/>
-                <a:ea typeface="Microsoft JhengHei" pitchFamily="34" charset="-122"/>
-                <a:cs typeface="Microsoft JhengHei" pitchFamily="34" charset="-120"/>
-              </a:rPr>
-              <a:t>先看會直接影響「登入 → 選遊戲 → 建房 → 進遊戲」的資料表。</a:t>
-            </a:r>
-            <a:endParaRPr lang="en-US" sz="1250" dirty="0"/>
-          </a:p>
-        </p:txBody>
-      </p:sp>
-      <p:sp>
-        <p:nvSpPr>
-          <p:cNvPr id="7" name="Shape 5"/>
-          <p:cNvSpPr/>
-          <p:nvPr/>
-        </p:nvSpPr>
-        <p:spPr>
-          <a:xfrm>
-            <a:off x="603504" y="1508760"/>
-            <a:ext cx="530352" cy="36576"/>
-          </a:xfrm>
-          <a:prstGeom prst="rect">
-            <a:avLst/>
-          </a:prstGeom>
-          <a:solidFill>
-            <a:srgbClr val="0891B2"/>
-          </a:solidFill>
-          <a:ln w="12700">
-            <a:solidFill>
-              <a:srgbClr val="0891B2"/>
-            </a:solidFill>
-            <a:prstDash val="solid"/>
-          </a:ln>
-        </p:spPr>
-      </p:sp>
-      <p:sp>
-        <p:nvSpPr>
-          <p:cNvPr id="8" name="Shape 6"/>
-          <p:cNvSpPr/>
-          <p:nvPr/>
-        </p:nvSpPr>
-        <p:spPr>
-          <a:xfrm>
-            <a:off x="603504" y="6419088"/>
-            <a:ext cx="10991088" cy="0"/>
-          </a:xfrm>
-          <a:prstGeom prst="line">
-            <a:avLst/>
-          </a:prstGeom>
-          <a:noFill/>
-          <a:ln w="8890">
-            <a:solidFill>
-              <a:srgbClr val="E7EDF5"/>
-            </a:solidFill>
-            <a:prstDash val="solid"/>
-          </a:ln>
-        </p:spPr>
-      </p:sp>
-      <p:sp>
-        <p:nvSpPr>
-          <p:cNvPr id="9" name="Text 7"/>
-          <p:cNvSpPr txBox="1"/>
-          <p:nvPr/>
-        </p:nvSpPr>
-        <p:spPr>
-          <a:xfrm>
-            <a:off x="603504" y="6519672"/>
-            <a:ext cx="4114800" cy="146304"/>
-          </a:xfrm>
-          <a:prstGeom prst="rect">
-            <a:avLst/>
-          </a:prstGeom>
-          <a:noFill/>
-          <a:ln/>
-        </p:spPr>
-        <p:txBody>
-          <a:bodyPr wrap="square" lIns="0" tIns="0" rIns="0" bIns="0" rtlCol="0" anchor="ctr">
-            <a:normAutofit/>
-          </a:bodyPr>
-          <a:lstStyle/>
-          <a:p>
-            <a:pPr marL="0" indent="0" algn="l">
-              <a:lnSpc>
-                <a:spcPct val="100000"/>
-              </a:lnSpc>
-              <a:buNone/>
-            </a:pPr>
-            <a:r>
-              <a:rPr lang="en-US" sz="850" b="1" dirty="0">
-                <a:solidFill>
-                  <a:srgbClr val="5C6B82"/>
-                </a:solidFill>
-                <a:latin typeface="Microsoft JhengHei" pitchFamily="34" charset="0"/>
-                <a:ea typeface="Microsoft JhengHei" pitchFamily="34" charset="-122"/>
-                <a:cs typeface="Microsoft JhengHei" pitchFamily="34" charset="-120"/>
-              </a:rPr>
-              <a:t>GAMEPLATFORM · 小組專題成果報告</a:t>
-            </a:r>
-            <a:endParaRPr lang="en-US" sz="850" dirty="0"/>
-          </a:p>
-        </p:txBody>
-      </p:sp>
-      <p:sp>
-        <p:nvSpPr>
-          <p:cNvPr id="10" name="Text 8"/>
-          <p:cNvSpPr txBox="1"/>
-          <p:nvPr/>
-        </p:nvSpPr>
-        <p:spPr>
-          <a:xfrm>
-            <a:off x="11201400" y="6492240"/>
-            <a:ext cx="411480" cy="182880"/>
-          </a:xfrm>
-          <a:prstGeom prst="rect">
-            <a:avLst/>
-          </a:prstGeom>
-          <a:noFill/>
-          <a:ln/>
-        </p:spPr>
-        <p:txBody>
-          <a:bodyPr wrap="square" lIns="0" tIns="0" rIns="0" bIns="0" rtlCol="0" anchor="ctr">
-            <a:normAutofit/>
-          </a:bodyPr>
-          <a:lstStyle/>
-          <a:p>
-            <a:pPr marL="0" indent="0" algn="r">
-              <a:lnSpc>
-                <a:spcPct val="100000"/>
-              </a:lnSpc>
-              <a:buNone/>
-            </a:pPr>
-            <a:r>
-              <a:rPr lang="en-US" sz="900" b="1" dirty="0" smtClean="0">
-                <a:solidFill>
-                  <a:srgbClr val="5C6B82"/>
-                </a:solidFill>
-                <a:latin typeface="Microsoft JhengHei" pitchFamily="34" charset="0"/>
-                <a:ea typeface="Microsoft JhengHei" pitchFamily="34" charset="-122"/>
-                <a:cs typeface="Microsoft JhengHei" pitchFamily="34" charset="-120"/>
-              </a:rPr>
-              <a:t>09</a:t>
-            </a:r>
-            <a:endParaRPr lang="en-US" sz="900" dirty="0"/>
-          </a:p>
-        </p:txBody>
-      </p:sp>
-      <p:sp>
-        <p:nvSpPr>
-          <p:cNvPr id="11" name="Shape 9"/>
-          <p:cNvSpPr/>
-          <p:nvPr/>
-        </p:nvSpPr>
-        <p:spPr>
-          <a:xfrm>
-            <a:off x="640080" y="1938528"/>
-            <a:ext cx="1280160" cy="1024128"/>
-          </a:xfrm>
-          <a:prstGeom prst="roundRect">
-            <a:avLst>
-              <a:gd name="adj" fmla="val 10714"/>
-            </a:avLst>
-          </a:prstGeom>
-          <a:solidFill>
-            <a:srgbClr val="FFFFFF"/>
-          </a:solidFill>
-          <a:ln w="12700">
-            <a:solidFill>
-              <a:srgbClr val="0891B2"/>
-            </a:solidFill>
-            <a:prstDash val="solid"/>
-          </a:ln>
-        </p:spPr>
-      </p:sp>
-      <p:sp>
-        <p:nvSpPr>
-          <p:cNvPr id="12" name="Shape 10"/>
-          <p:cNvSpPr/>
-          <p:nvPr/>
-        </p:nvSpPr>
-        <p:spPr>
-          <a:xfrm>
-            <a:off x="640080" y="1938528"/>
-            <a:ext cx="1280160" cy="329184"/>
-          </a:xfrm>
-          <a:prstGeom prst="rect">
-            <a:avLst/>
-          </a:prstGeom>
-          <a:solidFill>
-            <a:srgbClr val="0891B2"/>
-          </a:solidFill>
-          <a:ln w="12700">
-            <a:solidFill>
-              <a:srgbClr val="0891B2"/>
-            </a:solidFill>
-            <a:prstDash val="solid"/>
-          </a:ln>
-        </p:spPr>
-      </p:sp>
-      <p:sp>
-        <p:nvSpPr>
-          <p:cNvPr id="13" name="Text 11"/>
-          <p:cNvSpPr txBox="1"/>
-          <p:nvPr/>
-        </p:nvSpPr>
-        <p:spPr>
-          <a:xfrm>
-            <a:off x="758952" y="2020824"/>
-            <a:ext cx="1042416" cy="164592"/>
-          </a:xfrm>
-          <a:prstGeom prst="rect">
-            <a:avLst/>
-          </a:prstGeom>
-          <a:noFill/>
-          <a:ln/>
-        </p:spPr>
-        <p:txBody>
-          <a:bodyPr wrap="square" lIns="0" tIns="0" rIns="0" bIns="0" rtlCol="0" anchor="ctr">
-            <a:normAutofit/>
-          </a:bodyPr>
-          <a:lstStyle/>
-          <a:p>
-            <a:pPr marL="0" indent="0" algn="l">
-              <a:lnSpc>
-                <a:spcPct val="100000"/>
-              </a:lnSpc>
-              <a:buNone/>
-            </a:pPr>
-            <a:r>
-              <a:rPr lang="en-US" sz="1050" b="1" dirty="0">
-                <a:solidFill>
-                  <a:srgbClr val="FFFFFF"/>
-                </a:solidFill>
-                <a:latin typeface="Microsoft JhengHei" pitchFamily="34" charset="0"/>
-                <a:ea typeface="Microsoft JhengHei" pitchFamily="34" charset="-122"/>
-                <a:cs typeface="Microsoft JhengHei" pitchFamily="34" charset="-120"/>
-              </a:rPr>
-              <a:t>roles</a:t>
-            </a:r>
-            <a:endParaRPr lang="en-US" sz="1050" dirty="0"/>
-          </a:p>
-        </p:txBody>
-      </p:sp>
-      <p:sp>
-        <p:nvSpPr>
-          <p:cNvPr id="14" name="Text 12"/>
-          <p:cNvSpPr txBox="1"/>
-          <p:nvPr/>
-        </p:nvSpPr>
-        <p:spPr>
-          <a:xfrm>
-            <a:off x="768096" y="2377440"/>
-            <a:ext cx="1024128" cy="548640"/>
-          </a:xfrm>
-          <a:prstGeom prst="rect">
-            <a:avLst/>
-          </a:prstGeom>
-          <a:noFill/>
-          <a:ln/>
-        </p:spPr>
-        <p:txBody>
-          <a:bodyPr wrap="square" lIns="0" tIns="0" rIns="0" bIns="0" rtlCol="0" anchor="t">
-            <a:normAutofit/>
-          </a:bodyPr>
-          <a:lstStyle/>
-          <a:p>
-            <a:pPr marL="0" indent="0" algn="l">
-              <a:lnSpc>
-                <a:spcPct val="100000"/>
-              </a:lnSpc>
-              <a:buNone/>
-            </a:pPr>
-            <a:r>
-              <a:rPr lang="en-US" sz="850" dirty="0">
-                <a:solidFill>
-                  <a:srgbClr val="334155"/>
-                </a:solidFill>
-                <a:latin typeface="Microsoft JhengHei" pitchFamily="34" charset="0"/>
-                <a:ea typeface="Microsoft JhengHei" pitchFamily="34" charset="-122"/>
-                <a:cs typeface="Microsoft JhengHei" pitchFamily="34" charset="-120"/>
-              </a:rPr>
-              <a:t>PK id</a:t>
-            </a:r>
-            <a:endParaRPr lang="en-US" sz="850" dirty="0"/>
-          </a:p>
-          <a:p>
-            <a:pPr marL="0" indent="0" algn="l">
-              <a:lnSpc>
-                <a:spcPct val="100000"/>
-              </a:lnSpc>
-              <a:buNone/>
-            </a:pPr>
-            <a:r>
-              <a:rPr lang="en-US" sz="850" dirty="0">
-                <a:solidFill>
-                  <a:srgbClr val="334155"/>
-                </a:solidFill>
-                <a:latin typeface="Microsoft JhengHei" pitchFamily="34" charset="0"/>
-                <a:ea typeface="Microsoft JhengHei" pitchFamily="34" charset="-122"/>
-                <a:cs typeface="Microsoft JhengHei" pitchFamily="34" charset="-120"/>
-              </a:rPr>
-              <a:t>role_name</a:t>
-            </a:r>
-            <a:endParaRPr lang="en-US" sz="850" dirty="0"/>
-          </a:p>
-        </p:txBody>
-      </p:sp>
-      <p:sp>
-        <p:nvSpPr>
-          <p:cNvPr id="15" name="Shape 13"/>
-          <p:cNvSpPr/>
-          <p:nvPr/>
-        </p:nvSpPr>
-        <p:spPr>
-          <a:xfrm>
-            <a:off x="640080" y="3840480"/>
-            <a:ext cx="1280160" cy="1024128"/>
-          </a:xfrm>
-          <a:prstGeom prst="roundRect">
-            <a:avLst>
-              <a:gd name="adj" fmla="val 10714"/>
-            </a:avLst>
-          </a:prstGeom>
-          <a:solidFill>
-            <a:srgbClr val="FFFFFF"/>
-          </a:solidFill>
-          <a:ln w="12700">
-            <a:solidFill>
-              <a:srgbClr val="0891B2"/>
-            </a:solidFill>
-            <a:prstDash val="solid"/>
-          </a:ln>
-        </p:spPr>
-      </p:sp>
-      <p:sp>
-        <p:nvSpPr>
-          <p:cNvPr id="16" name="Shape 14"/>
-          <p:cNvSpPr/>
-          <p:nvPr/>
-        </p:nvSpPr>
-        <p:spPr>
-          <a:xfrm>
-            <a:off x="640080" y="3840480"/>
-            <a:ext cx="1280160" cy="329184"/>
-          </a:xfrm>
-          <a:prstGeom prst="rect">
-            <a:avLst/>
-          </a:prstGeom>
-          <a:solidFill>
-            <a:srgbClr val="0891B2"/>
-          </a:solidFill>
-          <a:ln w="12700">
-            <a:solidFill>
-              <a:srgbClr val="0891B2"/>
-            </a:solidFill>
-            <a:prstDash val="solid"/>
-          </a:ln>
-        </p:spPr>
-      </p:sp>
-      <p:sp>
-        <p:nvSpPr>
-          <p:cNvPr id="17" name="Text 15"/>
-          <p:cNvSpPr txBox="1"/>
-          <p:nvPr/>
-        </p:nvSpPr>
-        <p:spPr>
-          <a:xfrm>
-            <a:off x="758952" y="3922776"/>
-            <a:ext cx="1042416" cy="164592"/>
-          </a:xfrm>
-          <a:prstGeom prst="rect">
-            <a:avLst/>
-          </a:prstGeom>
-          <a:noFill/>
-          <a:ln/>
-        </p:spPr>
-        <p:txBody>
-          <a:bodyPr wrap="square" lIns="0" tIns="0" rIns="0" bIns="0" rtlCol="0" anchor="ctr">
-            <a:normAutofit/>
-          </a:bodyPr>
-          <a:lstStyle/>
-          <a:p>
-            <a:pPr marL="0" indent="0" algn="l">
-              <a:lnSpc>
-                <a:spcPct val="100000"/>
-              </a:lnSpc>
-              <a:buNone/>
-            </a:pPr>
-            <a:r>
-              <a:rPr lang="en-US" sz="1050" b="1" dirty="0">
-                <a:solidFill>
-                  <a:srgbClr val="FFFFFF"/>
-                </a:solidFill>
-                <a:latin typeface="Microsoft JhengHei" pitchFamily="34" charset="0"/>
-                <a:ea typeface="Microsoft JhengHei" pitchFamily="34" charset="-122"/>
-                <a:cs typeface="Microsoft JhengHei" pitchFamily="34" charset="-120"/>
-              </a:rPr>
-              <a:t>statuses</a:t>
-            </a:r>
-            <a:endParaRPr lang="en-US" sz="1050" dirty="0"/>
-          </a:p>
-        </p:txBody>
-      </p:sp>
-      <p:sp>
-        <p:nvSpPr>
-          <p:cNvPr id="18" name="Text 16"/>
-          <p:cNvSpPr txBox="1"/>
-          <p:nvPr/>
-        </p:nvSpPr>
-        <p:spPr>
-          <a:xfrm>
-            <a:off x="768096" y="4279392"/>
-            <a:ext cx="1024128" cy="548640"/>
-          </a:xfrm>
-          <a:prstGeom prst="rect">
-            <a:avLst/>
-          </a:prstGeom>
-          <a:noFill/>
-          <a:ln/>
-        </p:spPr>
-        <p:txBody>
-          <a:bodyPr wrap="square" lIns="0" tIns="0" rIns="0" bIns="0" rtlCol="0" anchor="t">
-            <a:normAutofit/>
-          </a:bodyPr>
-          <a:lstStyle/>
-          <a:p>
-            <a:pPr marL="0" indent="0" algn="l">
-              <a:lnSpc>
-                <a:spcPct val="100000"/>
-              </a:lnSpc>
-              <a:buNone/>
-            </a:pPr>
-            <a:r>
-              <a:rPr lang="en-US" sz="850" dirty="0">
-                <a:solidFill>
-                  <a:srgbClr val="334155"/>
-                </a:solidFill>
-                <a:latin typeface="Microsoft JhengHei" pitchFamily="34" charset="0"/>
-                <a:ea typeface="Microsoft JhengHei" pitchFamily="34" charset="-122"/>
-                <a:cs typeface="Microsoft JhengHei" pitchFamily="34" charset="-120"/>
-              </a:rPr>
-              <a:t>PK id</a:t>
-            </a:r>
-            <a:endParaRPr lang="en-US" sz="850" dirty="0"/>
-          </a:p>
-          <a:p>
-            <a:pPr marL="0" indent="0" algn="l">
-              <a:lnSpc>
-                <a:spcPct val="100000"/>
-              </a:lnSpc>
-              <a:buNone/>
-            </a:pPr>
-            <a:r>
-              <a:rPr lang="en-US" sz="850" dirty="0">
-                <a:solidFill>
-                  <a:srgbClr val="334155"/>
-                </a:solidFill>
-                <a:latin typeface="Microsoft JhengHei" pitchFamily="34" charset="0"/>
-                <a:ea typeface="Microsoft JhengHei" pitchFamily="34" charset="-122"/>
-                <a:cs typeface="Microsoft JhengHei" pitchFamily="34" charset="-120"/>
-              </a:rPr>
-              <a:t>status_name</a:t>
-            </a:r>
-            <a:endParaRPr lang="en-US" sz="850" dirty="0"/>
-          </a:p>
-        </p:txBody>
-      </p:sp>
-      <p:sp>
-        <p:nvSpPr>
-          <p:cNvPr id="19" name="Shape 17"/>
-          <p:cNvSpPr/>
-          <p:nvPr/>
-        </p:nvSpPr>
-        <p:spPr>
-          <a:xfrm>
-            <a:off x="2487168" y="2423160"/>
-            <a:ext cx="1828800" cy="1536192"/>
-          </a:xfrm>
-          <a:prstGeom prst="roundRect">
-            <a:avLst>
-              <a:gd name="adj" fmla="val 7143"/>
-            </a:avLst>
-          </a:prstGeom>
-          <a:solidFill>
-            <a:srgbClr val="FFFFFF"/>
-          </a:solidFill>
-          <a:ln w="12700">
-            <a:solidFill>
-              <a:srgbClr val="0891B2"/>
-            </a:solidFill>
-            <a:prstDash val="solid"/>
-          </a:ln>
-        </p:spPr>
-      </p:sp>
-      <p:sp>
-        <p:nvSpPr>
-          <p:cNvPr id="20" name="Shape 18"/>
-          <p:cNvSpPr/>
-          <p:nvPr/>
-        </p:nvSpPr>
-        <p:spPr>
-          <a:xfrm>
-            <a:off x="2487168" y="2423160"/>
-            <a:ext cx="1828800" cy="329184"/>
-          </a:xfrm>
-          <a:prstGeom prst="rect">
-            <a:avLst/>
-          </a:prstGeom>
-          <a:solidFill>
-            <a:srgbClr val="0891B2"/>
-          </a:solidFill>
-          <a:ln w="12700">
-            <a:solidFill>
-              <a:srgbClr val="0891B2"/>
-            </a:solidFill>
-            <a:prstDash val="solid"/>
-          </a:ln>
-        </p:spPr>
-      </p:sp>
-      <p:sp>
-        <p:nvSpPr>
-          <p:cNvPr id="21" name="Text 19"/>
-          <p:cNvSpPr txBox="1"/>
-          <p:nvPr/>
-        </p:nvSpPr>
-        <p:spPr>
-          <a:xfrm>
-            <a:off x="2606040" y="2505456"/>
-            <a:ext cx="1591056" cy="164592"/>
-          </a:xfrm>
-          <a:prstGeom prst="rect">
-            <a:avLst/>
-          </a:prstGeom>
-          <a:noFill/>
-          <a:ln/>
-        </p:spPr>
-        <p:txBody>
-          <a:bodyPr wrap="square" lIns="0" tIns="0" rIns="0" bIns="0" rtlCol="0" anchor="ctr">
-            <a:normAutofit/>
-          </a:bodyPr>
-          <a:lstStyle/>
-          <a:p>
-            <a:pPr marL="0" indent="0" algn="l">
-              <a:lnSpc>
-                <a:spcPct val="100000"/>
-              </a:lnSpc>
-              <a:buNone/>
-            </a:pPr>
-            <a:r>
-              <a:rPr lang="en-US" sz="1050" b="1" dirty="0">
-                <a:solidFill>
-                  <a:srgbClr val="FFFFFF"/>
-                </a:solidFill>
-                <a:latin typeface="Microsoft JhengHei" pitchFamily="34" charset="0"/>
-                <a:ea typeface="Microsoft JhengHei" pitchFamily="34" charset="-122"/>
-                <a:cs typeface="Microsoft JhengHei" pitchFamily="34" charset="-120"/>
-              </a:rPr>
-              <a:t>users</a:t>
-            </a:r>
-            <a:endParaRPr lang="en-US" sz="1050" dirty="0"/>
-          </a:p>
-        </p:txBody>
-      </p:sp>
-      <p:sp>
-        <p:nvSpPr>
-          <p:cNvPr id="22" name="Text 20"/>
-          <p:cNvSpPr txBox="1"/>
-          <p:nvPr/>
-        </p:nvSpPr>
-        <p:spPr>
-          <a:xfrm>
-            <a:off x="2615184" y="2862072"/>
-            <a:ext cx="1572768" cy="1060704"/>
-          </a:xfrm>
-          <a:prstGeom prst="rect">
-            <a:avLst/>
-          </a:prstGeom>
-          <a:noFill/>
-          <a:ln/>
-        </p:spPr>
-        <p:txBody>
-          <a:bodyPr wrap="square" lIns="0" tIns="0" rIns="0" bIns="0" rtlCol="0" anchor="t">
-            <a:normAutofit/>
-          </a:bodyPr>
-          <a:lstStyle/>
-          <a:p>
-            <a:pPr marL="0" indent="0" algn="l">
-              <a:lnSpc>
-                <a:spcPct val="100000"/>
-              </a:lnSpc>
-              <a:buNone/>
-            </a:pPr>
-            <a:r>
-              <a:rPr lang="en-US" sz="850" dirty="0">
-                <a:solidFill>
-                  <a:srgbClr val="334155"/>
-                </a:solidFill>
-                <a:latin typeface="Microsoft JhengHei" pitchFamily="34" charset="0"/>
-                <a:ea typeface="Microsoft JhengHei" pitchFamily="34" charset="-122"/>
-                <a:cs typeface="Microsoft JhengHei" pitchFamily="34" charset="-120"/>
-              </a:rPr>
-              <a:t>PK id</a:t>
-            </a:r>
-            <a:endParaRPr lang="en-US" sz="850" dirty="0"/>
-          </a:p>
-          <a:p>
-            <a:pPr marL="0" indent="0" algn="l">
-              <a:lnSpc>
-                <a:spcPct val="100000"/>
-              </a:lnSpc>
-              <a:buNone/>
-            </a:pPr>
-            <a:r>
-              <a:rPr lang="en-US" sz="850" dirty="0">
-                <a:solidFill>
-                  <a:srgbClr val="334155"/>
-                </a:solidFill>
-                <a:latin typeface="Microsoft JhengHei" pitchFamily="34" charset="0"/>
-                <a:ea typeface="Microsoft JhengHei" pitchFamily="34" charset="-122"/>
-                <a:cs typeface="Microsoft JhengHei" pitchFamily="34" charset="-120"/>
-              </a:rPr>
-              <a:t>account (UQ)</a:t>
-            </a:r>
-            <a:endParaRPr lang="en-US" sz="850" dirty="0"/>
-          </a:p>
-          <a:p>
-            <a:pPr marL="0" indent="0" algn="l">
-              <a:lnSpc>
-                <a:spcPct val="100000"/>
-              </a:lnSpc>
-              <a:buNone/>
-            </a:pPr>
-            <a:r>
-              <a:rPr lang="en-US" sz="850" dirty="0">
-                <a:solidFill>
-                  <a:srgbClr val="334155"/>
-                </a:solidFill>
-                <a:latin typeface="Microsoft JhengHei" pitchFamily="34" charset="0"/>
-                <a:ea typeface="Microsoft JhengHei" pitchFamily="34" charset="-122"/>
-                <a:cs typeface="Microsoft JhengHei" pitchFamily="34" charset="-120"/>
-              </a:rPr>
-              <a:t>username</a:t>
-            </a:r>
-            <a:endParaRPr lang="en-US" sz="850" dirty="0"/>
-          </a:p>
-          <a:p>
-            <a:pPr marL="0" indent="0" algn="l">
-              <a:lnSpc>
-                <a:spcPct val="100000"/>
-              </a:lnSpc>
-              <a:buNone/>
-            </a:pPr>
-            <a:r>
-              <a:rPr lang="en-US" sz="850" dirty="0">
-                <a:solidFill>
-                  <a:srgbClr val="334155"/>
-                </a:solidFill>
-                <a:latin typeface="Microsoft JhengHei" pitchFamily="34" charset="0"/>
-                <a:ea typeface="Microsoft JhengHei" pitchFamily="34" charset="-122"/>
-                <a:cs typeface="Microsoft JhengHei" pitchFamily="34" charset="-120"/>
-              </a:rPr>
-              <a:t>role_id · status_id</a:t>
-            </a:r>
-            <a:endParaRPr lang="en-US" sz="850" dirty="0"/>
-          </a:p>
-        </p:txBody>
-      </p:sp>
-      <p:sp>
-        <p:nvSpPr>
-          <p:cNvPr id="23" name="Shape 21"/>
-          <p:cNvSpPr/>
-          <p:nvPr/>
-        </p:nvSpPr>
-        <p:spPr>
-          <a:xfrm>
-            <a:off x="4892040" y="1938528"/>
-            <a:ext cx="1572768" cy="1371600"/>
-          </a:xfrm>
-          <a:prstGeom prst="roundRect">
-            <a:avLst>
-              <a:gd name="adj" fmla="val 8000"/>
-            </a:avLst>
-          </a:prstGeom>
-          <a:solidFill>
-            <a:srgbClr val="FFFFFF"/>
-          </a:solidFill>
-          <a:ln w="12700">
-            <a:solidFill>
-              <a:srgbClr val="7C3AED"/>
-            </a:solidFill>
-            <a:prstDash val="solid"/>
-          </a:ln>
-        </p:spPr>
-      </p:sp>
-      <p:sp>
-        <p:nvSpPr>
-          <p:cNvPr id="24" name="Shape 22"/>
-          <p:cNvSpPr/>
-          <p:nvPr/>
-        </p:nvSpPr>
-        <p:spPr>
-          <a:xfrm>
-            <a:off x="4892040" y="1938528"/>
-            <a:ext cx="1572768" cy="329184"/>
-          </a:xfrm>
-          <a:prstGeom prst="rect">
-            <a:avLst/>
-          </a:prstGeom>
-          <a:solidFill>
-            <a:srgbClr val="7C3AED"/>
-          </a:solidFill>
-          <a:ln w="12700">
-            <a:solidFill>
-              <a:srgbClr val="7C3AED"/>
-            </a:solidFill>
-            <a:prstDash val="solid"/>
-          </a:ln>
-        </p:spPr>
-      </p:sp>
-      <p:sp>
-        <p:nvSpPr>
-          <p:cNvPr id="25" name="Text 23"/>
-          <p:cNvSpPr txBox="1"/>
-          <p:nvPr/>
-        </p:nvSpPr>
-        <p:spPr>
-          <a:xfrm>
-            <a:off x="5010912" y="2020824"/>
-            <a:ext cx="1335024" cy="164592"/>
-          </a:xfrm>
-          <a:prstGeom prst="rect">
-            <a:avLst/>
-          </a:prstGeom>
-          <a:noFill/>
-          <a:ln/>
-        </p:spPr>
-        <p:txBody>
-          <a:bodyPr wrap="square" lIns="0" tIns="0" rIns="0" bIns="0" rtlCol="0" anchor="ctr">
-            <a:normAutofit/>
-          </a:bodyPr>
-          <a:lstStyle/>
-          <a:p>
-            <a:pPr marL="0" indent="0" algn="l">
-              <a:lnSpc>
-                <a:spcPct val="100000"/>
-              </a:lnSpc>
-              <a:buNone/>
-            </a:pPr>
-            <a:r>
-              <a:rPr lang="en-US" sz="1050" b="1" dirty="0">
-                <a:solidFill>
-                  <a:srgbClr val="FFFFFF"/>
-                </a:solidFill>
-                <a:latin typeface="Microsoft JhengHei" pitchFamily="34" charset="0"/>
-                <a:ea typeface="Microsoft JhengHei" pitchFamily="34" charset="-122"/>
-                <a:cs typeface="Microsoft JhengHei" pitchFamily="34" charset="-120"/>
-              </a:rPr>
-              <a:t>games</a:t>
-            </a:r>
-            <a:endParaRPr lang="en-US" sz="1050" dirty="0"/>
-          </a:p>
-        </p:txBody>
-      </p:sp>
-      <p:sp>
-        <p:nvSpPr>
-          <p:cNvPr id="26" name="Text 24"/>
-          <p:cNvSpPr txBox="1"/>
-          <p:nvPr/>
-        </p:nvSpPr>
-        <p:spPr>
-          <a:xfrm>
-            <a:off x="5020056" y="2377440"/>
-            <a:ext cx="1316736" cy="896112"/>
-          </a:xfrm>
-          <a:prstGeom prst="rect">
-            <a:avLst/>
-          </a:prstGeom>
-          <a:noFill/>
-          <a:ln/>
-        </p:spPr>
-        <p:txBody>
-          <a:bodyPr wrap="square" lIns="0" tIns="0" rIns="0" bIns="0" rtlCol="0" anchor="t">
-            <a:normAutofit/>
-          </a:bodyPr>
-          <a:lstStyle/>
-          <a:p>
-            <a:pPr marL="0" indent="0" algn="l">
-              <a:lnSpc>
-                <a:spcPct val="100000"/>
-              </a:lnSpc>
-              <a:buNone/>
-            </a:pPr>
-            <a:r>
-              <a:rPr lang="en-US" sz="850" dirty="0">
-                <a:solidFill>
-                  <a:srgbClr val="334155"/>
-                </a:solidFill>
-                <a:latin typeface="Microsoft JhengHei" pitchFamily="34" charset="0"/>
-                <a:ea typeface="Microsoft JhengHei" pitchFamily="34" charset="-122"/>
-                <a:cs typeface="Microsoft JhengHei" pitchFamily="34" charset="-120"/>
-              </a:rPr>
-              <a:t>PK game_id</a:t>
-            </a:r>
-            <a:endParaRPr lang="en-US" sz="850" dirty="0"/>
-          </a:p>
-          <a:p>
-            <a:pPr marL="0" indent="0" algn="l">
-              <a:lnSpc>
-                <a:spcPct val="100000"/>
-              </a:lnSpc>
-              <a:buNone/>
-            </a:pPr>
-            <a:r>
-              <a:rPr lang="en-US" sz="850" dirty="0">
-                <a:solidFill>
-                  <a:srgbClr val="334155"/>
-                </a:solidFill>
-                <a:latin typeface="Microsoft JhengHei" pitchFamily="34" charset="0"/>
-                <a:ea typeface="Microsoft JhengHei" pitchFamily="34" charset="-122"/>
-                <a:cs typeface="Microsoft JhengHei" pitchFamily="34" charset="-120"/>
-              </a:rPr>
-              <a:t>game_code (UQ)</a:t>
-            </a:r>
-            <a:endParaRPr lang="en-US" sz="850" dirty="0"/>
-          </a:p>
-          <a:p>
-            <a:pPr marL="0" indent="0" algn="l">
-              <a:lnSpc>
-                <a:spcPct val="100000"/>
-              </a:lnSpc>
-              <a:buNone/>
-            </a:pPr>
-            <a:r>
-              <a:rPr lang="en-US" sz="850" dirty="0">
-                <a:solidFill>
-                  <a:srgbClr val="334155"/>
-                </a:solidFill>
-                <a:latin typeface="Microsoft JhengHei" pitchFamily="34" charset="0"/>
-                <a:ea typeface="Microsoft JhengHei" pitchFamily="34" charset="-122"/>
-                <a:cs typeface="Microsoft JhengHei" pitchFamily="34" charset="-120"/>
-              </a:rPr>
-              <a:t>frontend_path</a:t>
-            </a:r>
-            <a:endParaRPr lang="en-US" sz="850" dirty="0"/>
-          </a:p>
-          <a:p>
-            <a:pPr marL="0" indent="0" algn="l">
-              <a:lnSpc>
-                <a:spcPct val="100000"/>
-              </a:lnSpc>
-              <a:buNone/>
-            </a:pPr>
-            <a:r>
-              <a:rPr lang="en-US" sz="850" dirty="0">
-                <a:solidFill>
-                  <a:srgbClr val="334155"/>
-                </a:solidFill>
-                <a:latin typeface="Microsoft JhengHei" pitchFamily="34" charset="0"/>
-                <a:ea typeface="Microsoft JhengHei" pitchFamily="34" charset="-122"/>
-                <a:cs typeface="Microsoft JhengHei" pitchFamily="34" charset="-120"/>
-              </a:rPr>
-              <a:t>backend_path</a:t>
-            </a:r>
-            <a:endParaRPr lang="en-US" sz="850" dirty="0"/>
-          </a:p>
-        </p:txBody>
-      </p:sp>
-      <p:sp>
-        <p:nvSpPr>
-          <p:cNvPr id="27" name="Shape 25"/>
-          <p:cNvSpPr/>
-          <p:nvPr/>
-        </p:nvSpPr>
-        <p:spPr>
-          <a:xfrm>
-            <a:off x="4892040" y="3840480"/>
-            <a:ext cx="1755648" cy="1371600"/>
-          </a:xfrm>
-          <a:prstGeom prst="roundRect">
-            <a:avLst>
-              <a:gd name="adj" fmla="val 8000"/>
-            </a:avLst>
-          </a:prstGeom>
-          <a:solidFill>
-            <a:srgbClr val="FFFFFF"/>
-          </a:solidFill>
-          <a:ln w="12700">
-            <a:solidFill>
-              <a:srgbClr val="7C3AED"/>
-            </a:solidFill>
-            <a:prstDash val="solid"/>
-          </a:ln>
-        </p:spPr>
-      </p:sp>
-      <p:sp>
-        <p:nvSpPr>
-          <p:cNvPr id="28" name="Shape 26"/>
-          <p:cNvSpPr/>
-          <p:nvPr/>
-        </p:nvSpPr>
-        <p:spPr>
-          <a:xfrm>
-            <a:off x="4892040" y="3840480"/>
-            <a:ext cx="1755648" cy="329184"/>
-          </a:xfrm>
-          <a:prstGeom prst="rect">
-            <a:avLst/>
-          </a:prstGeom>
-          <a:solidFill>
-            <a:srgbClr val="7C3AED"/>
-          </a:solidFill>
-          <a:ln w="12700">
-            <a:solidFill>
-              <a:srgbClr val="7C3AED"/>
-            </a:solidFill>
-            <a:prstDash val="solid"/>
-          </a:ln>
-        </p:spPr>
-      </p:sp>
-      <p:sp>
-        <p:nvSpPr>
-          <p:cNvPr id="29" name="Text 27"/>
-          <p:cNvSpPr txBox="1"/>
-          <p:nvPr/>
-        </p:nvSpPr>
-        <p:spPr>
-          <a:xfrm>
-            <a:off x="5010912" y="3922776"/>
-            <a:ext cx="1517904" cy="164592"/>
-          </a:xfrm>
-          <a:prstGeom prst="rect">
-            <a:avLst/>
-          </a:prstGeom>
-          <a:noFill/>
-          <a:ln/>
-        </p:spPr>
-        <p:txBody>
-          <a:bodyPr wrap="square" lIns="0" tIns="0" rIns="0" bIns="0" rtlCol="0" anchor="ctr">
-            <a:normAutofit/>
-          </a:bodyPr>
-          <a:lstStyle/>
-          <a:p>
-            <a:pPr marL="0" indent="0" algn="l">
-              <a:lnSpc>
-                <a:spcPct val="100000"/>
-              </a:lnSpc>
-              <a:buNone/>
-            </a:pPr>
-            <a:r>
-              <a:rPr lang="en-US" sz="1050" b="1" dirty="0">
-                <a:solidFill>
-                  <a:srgbClr val="FFFFFF"/>
-                </a:solidFill>
-                <a:latin typeface="Microsoft JhengHei" pitchFamily="34" charset="0"/>
-                <a:ea typeface="Microsoft JhengHei" pitchFamily="34" charset="-122"/>
-                <a:cs typeface="Microsoft JhengHei" pitchFamily="34" charset="-120"/>
-              </a:rPr>
-              <a:t>game_modes</a:t>
-            </a:r>
-            <a:endParaRPr lang="en-US" sz="1050" dirty="0"/>
-          </a:p>
-        </p:txBody>
-      </p:sp>
-      <p:sp>
-        <p:nvSpPr>
-          <p:cNvPr id="30" name="Text 28"/>
-          <p:cNvSpPr txBox="1"/>
-          <p:nvPr/>
-        </p:nvSpPr>
-        <p:spPr>
-          <a:xfrm>
-            <a:off x="5020056" y="4279392"/>
-            <a:ext cx="1499616" cy="896112"/>
-          </a:xfrm>
-          <a:prstGeom prst="rect">
-            <a:avLst/>
-          </a:prstGeom>
-          <a:noFill/>
-          <a:ln/>
-        </p:spPr>
-        <p:txBody>
-          <a:bodyPr wrap="square" lIns="0" tIns="0" rIns="0" bIns="0" rtlCol="0" anchor="t">
-            <a:normAutofit/>
-          </a:bodyPr>
-          <a:lstStyle/>
-          <a:p>
-            <a:pPr marL="0" indent="0" algn="l">
-              <a:lnSpc>
-                <a:spcPct val="100000"/>
-              </a:lnSpc>
-              <a:buNone/>
-            </a:pPr>
-            <a:r>
-              <a:rPr lang="en-US" sz="850" dirty="0">
-                <a:solidFill>
-                  <a:srgbClr val="334155"/>
-                </a:solidFill>
-                <a:latin typeface="Microsoft JhengHei" pitchFamily="34" charset="0"/>
-                <a:ea typeface="Microsoft JhengHei" pitchFamily="34" charset="-122"/>
-                <a:cs typeface="Microsoft JhengHei" pitchFamily="34" charset="-120"/>
-              </a:rPr>
-              <a:t>PK mode_id</a:t>
-            </a:r>
-            <a:endParaRPr lang="en-US" sz="850" dirty="0"/>
-          </a:p>
-          <a:p>
-            <a:pPr marL="0" indent="0" algn="l">
-              <a:lnSpc>
-                <a:spcPct val="100000"/>
-              </a:lnSpc>
-              <a:buNone/>
-            </a:pPr>
-            <a:r>
-              <a:rPr lang="en-US" sz="850" dirty="0">
-                <a:solidFill>
-                  <a:srgbClr val="334155"/>
-                </a:solidFill>
-                <a:latin typeface="Microsoft JhengHei" pitchFamily="34" charset="0"/>
-                <a:ea typeface="Microsoft JhengHei" pitchFamily="34" charset="-122"/>
-                <a:cs typeface="Microsoft JhengHei" pitchFamily="34" charset="-120"/>
-              </a:rPr>
-              <a:t>FK game_id</a:t>
-            </a:r>
-            <a:endParaRPr lang="en-US" sz="850" dirty="0"/>
-          </a:p>
-          <a:p>
-            <a:pPr marL="0" indent="0" algn="l">
-              <a:lnSpc>
-                <a:spcPct val="100000"/>
-              </a:lnSpc>
-              <a:buNone/>
-            </a:pPr>
-            <a:r>
-              <a:rPr lang="en-US" sz="850" dirty="0">
-                <a:solidFill>
-                  <a:srgbClr val="334155"/>
-                </a:solidFill>
-                <a:latin typeface="Microsoft JhengHei" pitchFamily="34" charset="0"/>
-                <a:ea typeface="Microsoft JhengHei" pitchFamily="34" charset="-122"/>
-                <a:cs typeface="Microsoft JhengHei" pitchFamily="34" charset="-120"/>
-              </a:rPr>
-              <a:t>mode_code</a:t>
-            </a:r>
-            <a:endParaRPr lang="en-US" sz="850" dirty="0"/>
-          </a:p>
-          <a:p>
-            <a:pPr marL="0" indent="0" algn="l">
-              <a:lnSpc>
-                <a:spcPct val="100000"/>
-              </a:lnSpc>
-              <a:buNone/>
-            </a:pPr>
-            <a:r>
-              <a:rPr lang="en-US" sz="850" dirty="0">
-                <a:solidFill>
-                  <a:srgbClr val="334155"/>
-                </a:solidFill>
-                <a:latin typeface="Microsoft JhengHei" pitchFamily="34" charset="0"/>
-                <a:ea typeface="Microsoft JhengHei" pitchFamily="34" charset="-122"/>
-                <a:cs typeface="Microsoft JhengHei" pitchFamily="34" charset="-120"/>
-              </a:rPr>
-              <a:t>min/max players</a:t>
-            </a:r>
-            <a:endParaRPr lang="en-US" sz="850" dirty="0"/>
-          </a:p>
-        </p:txBody>
-      </p:sp>
-      <p:sp>
-        <p:nvSpPr>
-          <p:cNvPr id="31" name="Shape 29"/>
-          <p:cNvSpPr/>
-          <p:nvPr/>
-        </p:nvSpPr>
-        <p:spPr>
-          <a:xfrm>
-            <a:off x="7516368" y="2331720"/>
-            <a:ext cx="1965960" cy="1627632"/>
-          </a:xfrm>
-          <a:prstGeom prst="roundRect">
-            <a:avLst>
-              <a:gd name="adj" fmla="val 6742"/>
-            </a:avLst>
-          </a:prstGeom>
-          <a:solidFill>
-            <a:srgbClr val="FFFFFF"/>
-          </a:solidFill>
-          <a:ln w="12700">
-            <a:solidFill>
-              <a:srgbClr val="059669"/>
-            </a:solidFill>
-            <a:prstDash val="solid"/>
-          </a:ln>
-        </p:spPr>
-      </p:sp>
-      <p:sp>
-        <p:nvSpPr>
-          <p:cNvPr id="32" name="Shape 30"/>
-          <p:cNvSpPr/>
-          <p:nvPr/>
-        </p:nvSpPr>
-        <p:spPr>
-          <a:xfrm>
-            <a:off x="7516368" y="2331720"/>
-            <a:ext cx="1965960" cy="329184"/>
-          </a:xfrm>
-          <a:prstGeom prst="rect">
-            <a:avLst/>
-          </a:prstGeom>
-          <a:solidFill>
-            <a:srgbClr val="059669"/>
-          </a:solidFill>
-          <a:ln w="12700">
-            <a:solidFill>
-              <a:srgbClr val="059669"/>
-            </a:solidFill>
-            <a:prstDash val="solid"/>
-          </a:ln>
-        </p:spPr>
-      </p:sp>
-      <p:sp>
-        <p:nvSpPr>
-          <p:cNvPr id="33" name="Text 31"/>
-          <p:cNvSpPr txBox="1"/>
-          <p:nvPr/>
-        </p:nvSpPr>
-        <p:spPr>
-          <a:xfrm>
-            <a:off x="7635240" y="2414016"/>
-            <a:ext cx="1728216" cy="164592"/>
-          </a:xfrm>
-          <a:prstGeom prst="rect">
-            <a:avLst/>
-          </a:prstGeom>
-          <a:noFill/>
-          <a:ln/>
-        </p:spPr>
-        <p:txBody>
-          <a:bodyPr wrap="square" lIns="0" tIns="0" rIns="0" bIns="0" rtlCol="0" anchor="ctr">
-            <a:normAutofit/>
-          </a:bodyPr>
-          <a:lstStyle/>
-          <a:p>
-            <a:pPr marL="0" indent="0" algn="l">
-              <a:lnSpc>
-                <a:spcPct val="100000"/>
-              </a:lnSpc>
-              <a:buNone/>
-            </a:pPr>
-            <a:r>
-              <a:rPr lang="en-US" sz="1050" b="1" dirty="0">
-                <a:solidFill>
-                  <a:srgbClr val="FFFFFF"/>
-                </a:solidFill>
-                <a:latin typeface="Microsoft JhengHei" pitchFamily="34" charset="0"/>
-                <a:ea typeface="Microsoft JhengHei" pitchFamily="34" charset="-122"/>
-                <a:cs typeface="Microsoft JhengHei" pitchFamily="34" charset="-120"/>
-              </a:rPr>
-              <a:t>rooms</a:t>
-            </a:r>
-            <a:endParaRPr lang="en-US" sz="1050" dirty="0"/>
-          </a:p>
-        </p:txBody>
-      </p:sp>
-      <p:sp>
-        <p:nvSpPr>
-          <p:cNvPr id="34" name="Text 32"/>
-          <p:cNvSpPr txBox="1"/>
-          <p:nvPr/>
-        </p:nvSpPr>
-        <p:spPr>
-          <a:xfrm>
-            <a:off x="7644384" y="2770632"/>
-            <a:ext cx="1709928" cy="1152144"/>
-          </a:xfrm>
-          <a:prstGeom prst="rect">
-            <a:avLst/>
-          </a:prstGeom>
-          <a:noFill/>
-          <a:ln/>
-        </p:spPr>
-        <p:txBody>
-          <a:bodyPr wrap="square" lIns="0" tIns="0" rIns="0" bIns="0" rtlCol="0" anchor="t">
-            <a:normAutofit/>
-          </a:bodyPr>
-          <a:lstStyle/>
-          <a:p>
-            <a:pPr marL="0" indent="0" algn="l">
-              <a:lnSpc>
-                <a:spcPct val="100000"/>
-              </a:lnSpc>
-              <a:buNone/>
-            </a:pPr>
-            <a:r>
-              <a:rPr lang="en-US" sz="850" dirty="0">
-                <a:solidFill>
-                  <a:srgbClr val="334155"/>
-                </a:solidFill>
-                <a:latin typeface="Microsoft JhengHei" pitchFamily="34" charset="0"/>
-                <a:ea typeface="Microsoft JhengHei" pitchFamily="34" charset="-122"/>
-                <a:cs typeface="Microsoft JhengHei" pitchFamily="34" charset="-120"/>
-              </a:rPr>
-              <a:t>PK id (8碼)</a:t>
-            </a:r>
-            <a:endParaRPr lang="en-US" sz="850" dirty="0"/>
-          </a:p>
-          <a:p>
-            <a:pPr marL="0" indent="0" algn="l">
-              <a:lnSpc>
-                <a:spcPct val="100000"/>
-              </a:lnSpc>
-              <a:buNone/>
-            </a:pPr>
-            <a:r>
-              <a:rPr lang="en-US" sz="850" dirty="0">
-                <a:solidFill>
-                  <a:srgbClr val="334155"/>
-                </a:solidFill>
-                <a:latin typeface="Microsoft JhengHei" pitchFamily="34" charset="0"/>
-                <a:ea typeface="Microsoft JhengHei" pitchFamily="34" charset="-122"/>
-                <a:cs typeface="Microsoft JhengHei" pitchFamily="34" charset="-120"/>
-              </a:rPr>
-              <a:t>game_id · mode_id</a:t>
-            </a:r>
-            <a:endParaRPr lang="en-US" sz="850" dirty="0"/>
-          </a:p>
-          <a:p>
-            <a:pPr marL="0" indent="0" algn="l">
-              <a:lnSpc>
-                <a:spcPct val="100000"/>
-              </a:lnSpc>
-              <a:buNone/>
-            </a:pPr>
-            <a:r>
-              <a:rPr lang="en-US" sz="850" dirty="0">
-                <a:solidFill>
-                  <a:srgbClr val="334155"/>
-                </a:solidFill>
-                <a:latin typeface="Microsoft JhengHei" pitchFamily="34" charset="0"/>
-                <a:ea typeface="Microsoft JhengHei" pitchFamily="34" charset="-122"/>
-                <a:cs typeface="Microsoft JhengHei" pitchFamily="34" charset="-120"/>
-              </a:rPr>
-              <a:t>host_account</a:t>
-            </a:r>
-            <a:endParaRPr lang="en-US" sz="850" dirty="0"/>
-          </a:p>
-          <a:p>
-            <a:pPr marL="0" indent="0" algn="l">
-              <a:lnSpc>
-                <a:spcPct val="100000"/>
-              </a:lnSpc>
-              <a:buNone/>
-            </a:pPr>
-            <a:r>
-              <a:rPr lang="en-US" sz="850" dirty="0">
-                <a:solidFill>
-                  <a:srgbClr val="334155"/>
-                </a:solidFill>
-                <a:latin typeface="Microsoft JhengHei" pitchFamily="34" charset="0"/>
-                <a:ea typeface="Microsoft JhengHei" pitchFamily="34" charset="-122"/>
-                <a:cs typeface="Microsoft JhengHei" pitchFamily="34" charset="-120"/>
-              </a:rPr>
-              <a:t>status</a:t>
-            </a:r>
-            <a:endParaRPr lang="en-US" sz="850" dirty="0"/>
-          </a:p>
-        </p:txBody>
-      </p:sp>
-      <p:sp>
-        <p:nvSpPr>
-          <p:cNvPr id="35" name="Shape 33"/>
-          <p:cNvSpPr/>
-          <p:nvPr/>
-        </p:nvSpPr>
-        <p:spPr>
-          <a:xfrm>
-            <a:off x="10012680" y="2596896"/>
-            <a:ext cx="1481328" cy="1188720"/>
-          </a:xfrm>
-          <a:prstGeom prst="roundRect">
-            <a:avLst>
-              <a:gd name="adj" fmla="val 9231"/>
-            </a:avLst>
-          </a:prstGeom>
-          <a:solidFill>
-            <a:srgbClr val="FFFFFF"/>
-          </a:solidFill>
-          <a:ln w="12700">
-            <a:solidFill>
-              <a:srgbClr val="059669"/>
-            </a:solidFill>
-            <a:prstDash val="solid"/>
-          </a:ln>
-        </p:spPr>
-      </p:sp>
-      <p:sp>
-        <p:nvSpPr>
-          <p:cNvPr id="36" name="Shape 34"/>
-          <p:cNvSpPr/>
-          <p:nvPr/>
-        </p:nvSpPr>
-        <p:spPr>
-          <a:xfrm>
-            <a:off x="10012680" y="2596896"/>
-            <a:ext cx="1481328" cy="329184"/>
-          </a:xfrm>
-          <a:prstGeom prst="rect">
-            <a:avLst/>
-          </a:prstGeom>
-          <a:solidFill>
-            <a:srgbClr val="059669"/>
-          </a:solidFill>
-          <a:ln w="12700">
-            <a:solidFill>
-              <a:srgbClr val="059669"/>
-            </a:solidFill>
-            <a:prstDash val="solid"/>
-          </a:ln>
-        </p:spPr>
-      </p:sp>
-      <p:sp>
-        <p:nvSpPr>
-          <p:cNvPr id="37" name="Text 35"/>
-          <p:cNvSpPr txBox="1"/>
-          <p:nvPr/>
-        </p:nvSpPr>
-        <p:spPr>
-          <a:xfrm>
-            <a:off x="10131552" y="2679192"/>
-            <a:ext cx="1243584" cy="164592"/>
-          </a:xfrm>
-          <a:prstGeom prst="rect">
-            <a:avLst/>
-          </a:prstGeom>
-          <a:noFill/>
-          <a:ln/>
-        </p:spPr>
-        <p:txBody>
-          <a:bodyPr wrap="square" lIns="0" tIns="0" rIns="0" bIns="0" rtlCol="0" anchor="ctr">
-            <a:normAutofit/>
-          </a:bodyPr>
-          <a:lstStyle/>
-          <a:p>
-            <a:pPr marL="0" indent="0" algn="l">
-              <a:lnSpc>
-                <a:spcPct val="100000"/>
-              </a:lnSpc>
-              <a:buNone/>
-            </a:pPr>
-            <a:r>
-              <a:rPr lang="en-US" sz="1050" b="1" dirty="0">
-                <a:solidFill>
-                  <a:srgbClr val="FFFFFF"/>
-                </a:solidFill>
-                <a:latin typeface="Microsoft JhengHei" pitchFamily="34" charset="0"/>
-                <a:ea typeface="Microsoft JhengHei" pitchFamily="34" charset="-122"/>
-                <a:cs typeface="Microsoft JhengHei" pitchFamily="34" charset="-120"/>
-              </a:rPr>
-              <a:t>room_players</a:t>
-            </a:r>
-            <a:endParaRPr lang="en-US" sz="1050" dirty="0"/>
-          </a:p>
-        </p:txBody>
-      </p:sp>
-      <p:sp>
-        <p:nvSpPr>
-          <p:cNvPr id="38" name="Text 36"/>
-          <p:cNvSpPr txBox="1"/>
-          <p:nvPr/>
-        </p:nvSpPr>
-        <p:spPr>
-          <a:xfrm>
-            <a:off x="10140696" y="3035808"/>
-            <a:ext cx="1225296" cy="713232"/>
-          </a:xfrm>
-          <a:prstGeom prst="rect">
-            <a:avLst/>
-          </a:prstGeom>
-          <a:noFill/>
-          <a:ln/>
-        </p:spPr>
-        <p:txBody>
-          <a:bodyPr wrap="square" lIns="0" tIns="0" rIns="0" bIns="0" rtlCol="0" anchor="t">
-            <a:normAutofit/>
-          </a:bodyPr>
-          <a:lstStyle/>
-          <a:p>
-            <a:pPr marL="0" indent="0" algn="l">
-              <a:lnSpc>
-                <a:spcPct val="100000"/>
-              </a:lnSpc>
-              <a:buNone/>
-            </a:pPr>
-            <a:r>
-              <a:rPr lang="en-US" sz="850" dirty="0">
-                <a:solidFill>
-                  <a:srgbClr val="334155"/>
-                </a:solidFill>
-                <a:latin typeface="Microsoft JhengHei" pitchFamily="34" charset="0"/>
-                <a:ea typeface="Microsoft JhengHei" pitchFamily="34" charset="-122"/>
-                <a:cs typeface="Microsoft JhengHei" pitchFamily="34" charset="-120"/>
-              </a:rPr>
-              <a:t>room_id</a:t>
-            </a:r>
-            <a:endParaRPr lang="en-US" sz="850" dirty="0"/>
-          </a:p>
-          <a:p>
-            <a:pPr marL="0" indent="0" algn="l">
-              <a:lnSpc>
-                <a:spcPct val="100000"/>
-              </a:lnSpc>
-              <a:buNone/>
-            </a:pPr>
-            <a:r>
-              <a:rPr lang="en-US" sz="850" dirty="0">
-                <a:solidFill>
-                  <a:srgbClr val="334155"/>
-                </a:solidFill>
-                <a:latin typeface="Microsoft JhengHei" pitchFamily="34" charset="0"/>
-                <a:ea typeface="Microsoft JhengHei" pitchFamily="34" charset="-122"/>
-                <a:cs typeface="Microsoft JhengHei" pitchFamily="34" charset="-120"/>
-              </a:rPr>
-              <a:t>player_account</a:t>
-            </a:r>
-            <a:endParaRPr lang="en-US" sz="850" dirty="0"/>
-          </a:p>
-        </p:txBody>
-      </p:sp>
-      <p:sp>
-        <p:nvSpPr>
-          <p:cNvPr id="39" name="Shape 37"/>
-          <p:cNvSpPr/>
-          <p:nvPr/>
-        </p:nvSpPr>
-        <p:spPr>
-          <a:xfrm>
-            <a:off x="1956816" y="2560320"/>
-            <a:ext cx="384048" cy="109728"/>
-          </a:xfrm>
-          <a:prstGeom prst="rightArrow">
-            <a:avLst/>
-          </a:prstGeom>
-          <a:solidFill>
-            <a:srgbClr val="D7E0EB"/>
-          </a:solidFill>
-          <a:ln w="12700">
-            <a:solidFill>
-              <a:srgbClr val="D7E0EB"/>
-            </a:solidFill>
-            <a:prstDash val="solid"/>
-          </a:ln>
-        </p:spPr>
-      </p:sp>
-      <p:sp>
-        <p:nvSpPr>
-          <p:cNvPr id="40" name="Shape 38"/>
-          <p:cNvSpPr/>
-          <p:nvPr/>
-        </p:nvSpPr>
-        <p:spPr>
-          <a:xfrm>
-            <a:off x="1956816" y="4142232"/>
-            <a:ext cx="384048" cy="109728"/>
-          </a:xfrm>
-          <a:prstGeom prst="rightArrow">
-            <a:avLst/>
-          </a:prstGeom>
-          <a:solidFill>
-            <a:srgbClr val="D7E0EB"/>
-          </a:solidFill>
-          <a:ln w="12700">
-            <a:solidFill>
-              <a:srgbClr val="D7E0EB"/>
-            </a:solidFill>
-            <a:prstDash val="solid"/>
-          </a:ln>
-        </p:spPr>
-      </p:sp>
-      <p:sp>
-        <p:nvSpPr>
-          <p:cNvPr id="41" name="Shape 39"/>
-          <p:cNvSpPr/>
-          <p:nvPr/>
-        </p:nvSpPr>
-        <p:spPr>
-          <a:xfrm>
-            <a:off x="6656832" y="2578608"/>
-            <a:ext cx="594360" cy="109728"/>
-          </a:xfrm>
-          <a:prstGeom prst="rightArrow">
-            <a:avLst/>
-          </a:prstGeom>
-          <a:solidFill>
-            <a:srgbClr val="D7E0EB"/>
-          </a:solidFill>
-          <a:ln w="12700">
-            <a:solidFill>
-              <a:srgbClr val="D7E0EB"/>
-            </a:solidFill>
-            <a:prstDash val="solid"/>
-          </a:ln>
-        </p:spPr>
-      </p:sp>
-      <p:sp>
-        <p:nvSpPr>
-          <p:cNvPr id="42" name="Shape 40"/>
-          <p:cNvSpPr/>
-          <p:nvPr/>
-        </p:nvSpPr>
-        <p:spPr>
-          <a:xfrm>
-            <a:off x="6839712" y="4315968"/>
-            <a:ext cx="512064" cy="109728"/>
-          </a:xfrm>
-          <a:prstGeom prst="rightArrow">
-            <a:avLst/>
-          </a:prstGeom>
-          <a:solidFill>
-            <a:srgbClr val="D7E0EB"/>
-          </a:solidFill>
-          <a:ln w="12700">
-            <a:solidFill>
-              <a:srgbClr val="D7E0EB"/>
-            </a:solidFill>
-            <a:prstDash val="solid"/>
-          </a:ln>
-        </p:spPr>
-      </p:sp>
-      <p:sp>
-        <p:nvSpPr>
-          <p:cNvPr id="43" name="Shape 41"/>
-          <p:cNvSpPr/>
-          <p:nvPr/>
-        </p:nvSpPr>
-        <p:spPr>
-          <a:xfrm>
-            <a:off x="9564624" y="3118104"/>
-            <a:ext cx="320040" cy="109728"/>
-          </a:xfrm>
-          <a:prstGeom prst="rightArrow">
-            <a:avLst/>
-          </a:prstGeom>
-          <a:solidFill>
-            <a:srgbClr val="D7E0EB"/>
-          </a:solidFill>
-          <a:ln w="12700">
-            <a:solidFill>
-              <a:srgbClr val="D7E0EB"/>
-            </a:solidFill>
-            <a:prstDash val="solid"/>
-          </a:ln>
-        </p:spPr>
-      </p:sp>
-      <p:sp>
-        <p:nvSpPr>
-          <p:cNvPr id="44" name="Shape 42"/>
-          <p:cNvSpPr/>
-          <p:nvPr/>
-        </p:nvSpPr>
-        <p:spPr>
-          <a:xfrm>
-            <a:off x="1984248" y="2139696"/>
-            <a:ext cx="502920" cy="329184"/>
-          </a:xfrm>
-          <a:prstGeom prst="roundRect">
-            <a:avLst>
-              <a:gd name="adj" fmla="val 50000"/>
-            </a:avLst>
-          </a:prstGeom>
-          <a:solidFill>
-            <a:srgbClr val="F2F6FB"/>
-          </a:solidFill>
-          <a:ln w="12700">
-            <a:solidFill>
-              <a:srgbClr val="0891B2"/>
-            </a:solidFill>
-            <a:prstDash val="solid"/>
-          </a:ln>
-        </p:spPr>
-      </p:sp>
-      <p:sp>
-        <p:nvSpPr>
-          <p:cNvPr id="45" name="Text 43"/>
-          <p:cNvSpPr txBox="1"/>
-          <p:nvPr/>
-        </p:nvSpPr>
-        <p:spPr>
-          <a:xfrm>
-            <a:off x="2057400" y="2208276"/>
-            <a:ext cx="356616" cy="182880"/>
-          </a:xfrm>
-          <a:prstGeom prst="rect">
-            <a:avLst/>
-          </a:prstGeom>
-          <a:noFill/>
-          <a:ln/>
-        </p:spPr>
-        <p:txBody>
-          <a:bodyPr wrap="square" lIns="254" tIns="254" rIns="254" bIns="254" rtlCol="0" anchor="ctr">
-            <a:normAutofit/>
-          </a:bodyPr>
-          <a:lstStyle/>
-          <a:p>
-            <a:pPr marL="0" indent="0" algn="ctr">
-              <a:lnSpc>
-                <a:spcPct val="100000"/>
-              </a:lnSpc>
-              <a:buNone/>
-            </a:pPr>
-            <a:r>
-              <a:rPr lang="en-US" sz="950" b="1" dirty="0">
-                <a:solidFill>
-                  <a:srgbClr val="0891B2"/>
-                </a:solidFill>
-                <a:latin typeface="Microsoft JhengHei" pitchFamily="34" charset="0"/>
-                <a:ea typeface="Microsoft JhengHei" pitchFamily="34" charset="-122"/>
-                <a:cs typeface="Microsoft JhengHei" pitchFamily="34" charset="-120"/>
-              </a:rPr>
-              <a:t>1 : N</a:t>
-            </a:r>
-            <a:endParaRPr lang="en-US" sz="950" dirty="0"/>
-          </a:p>
-        </p:txBody>
-      </p:sp>
-      <p:sp>
-        <p:nvSpPr>
-          <p:cNvPr id="46" name="Shape 44"/>
-          <p:cNvSpPr/>
-          <p:nvPr/>
-        </p:nvSpPr>
-        <p:spPr>
-          <a:xfrm>
-            <a:off x="1984248" y="3712464"/>
-            <a:ext cx="502920" cy="329184"/>
-          </a:xfrm>
-          <a:prstGeom prst="roundRect">
-            <a:avLst>
-              <a:gd name="adj" fmla="val 50000"/>
-            </a:avLst>
-          </a:prstGeom>
-          <a:solidFill>
-            <a:srgbClr val="F2F6FB"/>
-          </a:solidFill>
-          <a:ln w="12700">
-            <a:solidFill>
-              <a:srgbClr val="0891B2"/>
-            </a:solidFill>
-            <a:prstDash val="solid"/>
-          </a:ln>
-        </p:spPr>
-      </p:sp>
-      <p:sp>
-        <p:nvSpPr>
-          <p:cNvPr id="47" name="Text 45"/>
-          <p:cNvSpPr txBox="1"/>
-          <p:nvPr/>
-        </p:nvSpPr>
-        <p:spPr>
-          <a:xfrm>
-            <a:off x="2057400" y="3781044"/>
-            <a:ext cx="356616" cy="182880"/>
-          </a:xfrm>
-          <a:prstGeom prst="rect">
-            <a:avLst/>
-          </a:prstGeom>
-          <a:noFill/>
-          <a:ln/>
-        </p:spPr>
-        <p:txBody>
-          <a:bodyPr wrap="square" lIns="254" tIns="254" rIns="254" bIns="254" rtlCol="0" anchor="ctr">
-            <a:normAutofit/>
-          </a:bodyPr>
-          <a:lstStyle/>
-          <a:p>
-            <a:pPr marL="0" indent="0" algn="ctr">
-              <a:lnSpc>
-                <a:spcPct val="100000"/>
-              </a:lnSpc>
-              <a:buNone/>
-            </a:pPr>
-            <a:r>
-              <a:rPr lang="en-US" sz="950" b="1" dirty="0">
-                <a:solidFill>
-                  <a:srgbClr val="0891B2"/>
-                </a:solidFill>
-                <a:latin typeface="Microsoft JhengHei" pitchFamily="34" charset="0"/>
-                <a:ea typeface="Microsoft JhengHei" pitchFamily="34" charset="-122"/>
-                <a:cs typeface="Microsoft JhengHei" pitchFamily="34" charset="-120"/>
-              </a:rPr>
-              <a:t>1 : N</a:t>
-            </a:r>
-            <a:endParaRPr lang="en-US" sz="950" dirty="0"/>
-          </a:p>
-        </p:txBody>
-      </p:sp>
-      <p:sp>
-        <p:nvSpPr>
-          <p:cNvPr id="48" name="Shape 46"/>
-          <p:cNvSpPr/>
-          <p:nvPr/>
-        </p:nvSpPr>
-        <p:spPr>
-          <a:xfrm>
-            <a:off x="6693408" y="2148840"/>
-            <a:ext cx="502920" cy="329184"/>
-          </a:xfrm>
-          <a:prstGeom prst="roundRect">
-            <a:avLst>
-              <a:gd name="adj" fmla="val 50000"/>
-            </a:avLst>
-          </a:prstGeom>
-          <a:solidFill>
-            <a:srgbClr val="F2F6FB"/>
-          </a:solidFill>
-          <a:ln w="12700">
-            <a:solidFill>
-              <a:srgbClr val="7C3AED"/>
-            </a:solidFill>
-            <a:prstDash val="solid"/>
-          </a:ln>
-        </p:spPr>
-      </p:sp>
-      <p:sp>
-        <p:nvSpPr>
-          <p:cNvPr id="49" name="Text 47"/>
-          <p:cNvSpPr txBox="1"/>
-          <p:nvPr/>
-        </p:nvSpPr>
-        <p:spPr>
-          <a:xfrm>
-            <a:off x="6766560" y="2217420"/>
-            <a:ext cx="356616" cy="182880"/>
-          </a:xfrm>
-          <a:prstGeom prst="rect">
-            <a:avLst/>
-          </a:prstGeom>
-          <a:noFill/>
-          <a:ln/>
-        </p:spPr>
-        <p:txBody>
-          <a:bodyPr wrap="square" lIns="254" tIns="254" rIns="254" bIns="254" rtlCol="0" anchor="ctr">
-            <a:normAutofit/>
-          </a:bodyPr>
-          <a:lstStyle/>
-          <a:p>
-            <a:pPr marL="0" indent="0" algn="ctr">
-              <a:lnSpc>
-                <a:spcPct val="100000"/>
-              </a:lnSpc>
-              <a:buNone/>
-            </a:pPr>
-            <a:r>
-              <a:rPr lang="en-US" sz="950" b="1" dirty="0">
-                <a:solidFill>
-                  <a:srgbClr val="7C3AED"/>
-                </a:solidFill>
-                <a:latin typeface="Microsoft JhengHei" pitchFamily="34" charset="0"/>
-                <a:ea typeface="Microsoft JhengHei" pitchFamily="34" charset="-122"/>
-                <a:cs typeface="Microsoft JhengHei" pitchFamily="34" charset="-120"/>
-              </a:rPr>
-              <a:t>1 : N</a:t>
-            </a:r>
-            <a:endParaRPr lang="en-US" sz="950" dirty="0"/>
-          </a:p>
-        </p:txBody>
-      </p:sp>
-      <p:sp>
-        <p:nvSpPr>
-          <p:cNvPr id="50" name="Shape 48"/>
-          <p:cNvSpPr/>
-          <p:nvPr/>
-        </p:nvSpPr>
-        <p:spPr>
-          <a:xfrm>
-            <a:off x="6876288" y="3886200"/>
-            <a:ext cx="502920" cy="329184"/>
-          </a:xfrm>
-          <a:prstGeom prst="roundRect">
-            <a:avLst>
-              <a:gd name="adj" fmla="val 50000"/>
-            </a:avLst>
-          </a:prstGeom>
-          <a:solidFill>
-            <a:srgbClr val="F2F6FB"/>
-          </a:solidFill>
-          <a:ln w="12700">
-            <a:solidFill>
-              <a:srgbClr val="7C3AED"/>
-            </a:solidFill>
-            <a:prstDash val="solid"/>
-          </a:ln>
-        </p:spPr>
-      </p:sp>
-      <p:sp>
-        <p:nvSpPr>
-          <p:cNvPr id="51" name="Text 49"/>
-          <p:cNvSpPr txBox="1"/>
-          <p:nvPr/>
-        </p:nvSpPr>
-        <p:spPr>
-          <a:xfrm>
-            <a:off x="6949440" y="3954780"/>
-            <a:ext cx="356616" cy="182880"/>
-          </a:xfrm>
-          <a:prstGeom prst="rect">
-            <a:avLst/>
-          </a:prstGeom>
-          <a:noFill/>
-          <a:ln/>
-        </p:spPr>
-        <p:txBody>
-          <a:bodyPr wrap="square" lIns="254" tIns="254" rIns="254" bIns="254" rtlCol="0" anchor="ctr">
-            <a:normAutofit/>
-          </a:bodyPr>
-          <a:lstStyle/>
-          <a:p>
-            <a:pPr marL="0" indent="0" algn="ctr">
-              <a:lnSpc>
-                <a:spcPct val="100000"/>
-              </a:lnSpc>
-              <a:buNone/>
-            </a:pPr>
-            <a:r>
-              <a:rPr lang="en-US" sz="950" b="1" dirty="0">
-                <a:solidFill>
-                  <a:srgbClr val="7C3AED"/>
-                </a:solidFill>
-                <a:latin typeface="Microsoft JhengHei" pitchFamily="34" charset="0"/>
-                <a:ea typeface="Microsoft JhengHei" pitchFamily="34" charset="-122"/>
-                <a:cs typeface="Microsoft JhengHei" pitchFamily="34" charset="-120"/>
-              </a:rPr>
-              <a:t>1 : N</a:t>
-            </a:r>
-            <a:endParaRPr lang="en-US" sz="950" dirty="0"/>
-          </a:p>
-        </p:txBody>
-      </p:sp>
-      <p:sp>
-        <p:nvSpPr>
-          <p:cNvPr id="52" name="Shape 50"/>
-          <p:cNvSpPr/>
-          <p:nvPr/>
-        </p:nvSpPr>
-        <p:spPr>
-          <a:xfrm>
-            <a:off x="9537192" y="2706624"/>
-            <a:ext cx="502920" cy="329184"/>
-          </a:xfrm>
-          <a:prstGeom prst="roundRect">
-            <a:avLst>
-              <a:gd name="adj" fmla="val 50000"/>
-            </a:avLst>
-          </a:prstGeom>
-          <a:solidFill>
-            <a:srgbClr val="F2F6FB"/>
-          </a:solidFill>
-          <a:ln w="12700">
-            <a:solidFill>
-              <a:srgbClr val="059669"/>
-            </a:solidFill>
-            <a:prstDash val="solid"/>
-          </a:ln>
-        </p:spPr>
-      </p:sp>
-      <p:sp>
-        <p:nvSpPr>
-          <p:cNvPr id="53" name="Text 51"/>
-          <p:cNvSpPr txBox="1"/>
-          <p:nvPr/>
-        </p:nvSpPr>
-        <p:spPr>
-          <a:xfrm>
-            <a:off x="9610344" y="2775204"/>
-            <a:ext cx="356616" cy="182880"/>
-          </a:xfrm>
-          <a:prstGeom prst="rect">
-            <a:avLst/>
-          </a:prstGeom>
-          <a:noFill/>
-          <a:ln/>
-        </p:spPr>
-        <p:txBody>
-          <a:bodyPr wrap="square" lIns="254" tIns="254" rIns="254" bIns="254" rtlCol="0" anchor="ctr">
-            <a:normAutofit/>
-          </a:bodyPr>
-          <a:lstStyle/>
-          <a:p>
-            <a:pPr marL="0" indent="0" algn="ctr">
-              <a:lnSpc>
-                <a:spcPct val="100000"/>
-              </a:lnSpc>
-              <a:buNone/>
-            </a:pPr>
-            <a:r>
-              <a:rPr lang="en-US" sz="950" b="1" dirty="0">
-                <a:solidFill>
-                  <a:srgbClr val="059669"/>
-                </a:solidFill>
-                <a:latin typeface="Microsoft JhengHei" pitchFamily="34" charset="0"/>
-                <a:ea typeface="Microsoft JhengHei" pitchFamily="34" charset="-122"/>
-                <a:cs typeface="Microsoft JhengHei" pitchFamily="34" charset="-120"/>
-              </a:rPr>
-              <a:t>1 : N</a:t>
-            </a:r>
-            <a:endParaRPr lang="en-US" sz="950" dirty="0"/>
-          </a:p>
-        </p:txBody>
-      </p:sp>
-      <p:sp>
-        <p:nvSpPr>
-          <p:cNvPr id="54" name="Text 52"/>
-          <p:cNvSpPr txBox="1"/>
-          <p:nvPr/>
-        </p:nvSpPr>
-        <p:spPr>
-          <a:xfrm>
-            <a:off x="4572000" y="5623560"/>
-            <a:ext cx="6263640" cy="292608"/>
-          </a:xfrm>
-          <a:prstGeom prst="rect">
-            <a:avLst/>
-          </a:prstGeom>
-          <a:noFill/>
-          <a:ln/>
-        </p:spPr>
-        <p:txBody>
-          <a:bodyPr wrap="square" lIns="254" tIns="254" rIns="254" bIns="254" rtlCol="0" anchor="ctr">
-            <a:normAutofit/>
-          </a:bodyPr>
-          <a:lstStyle/>
-          <a:p>
-            <a:pPr marL="0" indent="0" algn="ctr">
-              <a:lnSpc>
-                <a:spcPct val="100000"/>
-              </a:lnSpc>
-              <a:buNone/>
-            </a:pPr>
-            <a:r>
-              <a:rPr lang="en-US" sz="1020" dirty="0">
-                <a:solidFill>
-                  <a:srgbClr val="5C6B82"/>
-                </a:solidFill>
-                <a:latin typeface="Microsoft JhengHei" pitchFamily="34" charset="0"/>
-                <a:ea typeface="Microsoft JhengHei" pitchFamily="34" charset="-122"/>
-                <a:cs typeface="Microsoft JhengHei" pitchFamily="34" charset="-120"/>
-              </a:rPr>
-              <a:t>rooms 同時保存 game_id 與 mode_id；room_players 是 Room.players 的 ElementCollection 關聯表。</a:t>
-            </a:r>
-            <a:endParaRPr lang="en-US" sz="1020" dirty="0"/>
           </a:p>
         </p:txBody>
       </p:sp>
